--- a/slides/08 The Legend of Zelda.pptx
+++ b/slides/08 The Legend of Zelda.pptx
@@ -44,6 +44,7 @@
     <p:sldId id="285" r:id="rId35"/>
     <p:sldId id="286" r:id="rId36"/>
     <p:sldId id="292" r:id="rId51"/>
+    <p:sldId id="294" r:id="rId53"/>
     <p:sldId id="287" r:id="rId37"/>
     <p:sldId id="293" r:id="rId52"/>
   </p:sldIdLst>
@@ -2602,139 +2603,76 @@
           </a:bodyPr>
           <a:lstStyle/>
           <a:p>
-            <a:pPr indent="0" lvl="0" marL="0" rtl="0" algn="l">
-              <a:spcBef>
-                <a:spcPts val="0"/>
-              </a:spcBef>
-              <a:spcAft>
-                <a:spcPts val="0"/>
-              </a:spcAft>
-              <a:buClr>
-                <a:schemeClr val="dk1"/>
-              </a:buClr>
-              <a:buSzPts val="1100"/>
-              <a:buFont typeface="Arial"/>
-              <a:buNone/>
-            </a:pPr>
-            <a:r>
-              <a:t/>
-            </a:r>
-            <a:endParaRPr>
-              <a:solidFill>
-                <a:schemeClr val="dk1"/>
-              </a:solidFill>
-            </a:endParaRPr>
-          </a:p>
-          <a:p>
-            <a:pPr indent="0" lvl="0" marL="0" rtl="0" algn="l">
-              <a:spcBef>
-                <a:spcPts val="0"/>
-              </a:spcBef>
-              <a:spcAft>
-                <a:spcPts val="0"/>
-              </a:spcAft>
-              <a:buNone/>
-            </a:pPr>
-            <a:r>
-              <a:rPr lang="en">
-                <a:solidFill>
-                  <a:schemeClr val="dk1"/>
-                </a:solidFill>
-              </a:rPr>
+            <a:r>
               <a:t>Player health changed? HUD Updated</a:t>
             </a:r>
-            <a:endParaRPr>
-              <a:solidFill>
-                <a:schemeClr val="dk1"/>
-              </a:solidFill>
-            </a:endParaRPr>
-          </a:p>
-          <a:p>
-            <a:pPr indent="0" lvl="0" marL="0" rtl="0" algn="l">
-              <a:spcBef>
-                <a:spcPts val="0"/>
-              </a:spcBef>
-              <a:spcAft>
-                <a:spcPts val="0"/>
-              </a:spcAft>
-              <a:buNone/>
-            </a:pPr>
-            <a:r>
-              <a:rPr lang="en">
-                <a:solidFill>
-                  <a:schemeClr val="dk1"/>
-                </a:solidFill>
-              </a:rPr>
+          </a:p>
+          <a:p>
+            <a:r>
               <a:t>Enemy dies</a:t>
             </a:r>
-            <a:endParaRPr>
-              <a:solidFill>
-                <a:schemeClr val="dk1"/>
-              </a:solidFill>
-            </a:endParaRPr>
-          </a:p>
-          <a:p>
-            <a:pPr indent="0" lvl="0" marL="0" rtl="0" algn="l">
-              <a:spcBef>
-                <a:spcPts val="0"/>
-              </a:spcBef>
-              <a:spcAft>
-                <a:spcPts val="0"/>
-              </a:spcAft>
-              <a:buNone/>
-            </a:pPr>
-            <a:r>
-              <a:rPr lang="en">
-                <a:solidFill>
-                  <a:schemeClr val="dk1"/>
-                </a:solidFill>
-              </a:rPr>
+          </a:p>
+          <a:p>
+            <a:r>
               <a:t>Sword is swung!</a:t>
             </a:r>
-            <a:endParaRPr>
-              <a:solidFill>
-                <a:schemeClr val="dk1"/>
-              </a:solidFill>
-            </a:endParaRPr>
-          </a:p>
-          <a:p>
-            <a:pPr indent="0" lvl="0" marL="0" rtl="0" algn="l">
-              <a:spcBef>
-                <a:spcPts val="0"/>
-              </a:spcBef>
-              <a:spcAft>
-                <a:spcPts val="0"/>
-              </a:spcAft>
-              <a:buNone/>
-            </a:pPr>
-            <a:r>
-              <a:t/>
-            </a:r>
-            <a:endParaRPr>
-              <a:solidFill>
-                <a:schemeClr val="dk1"/>
-              </a:solidFill>
-            </a:endParaRPr>
-          </a:p>
-          <a:p>
-            <a:pPr indent="0" lvl="0" marL="0" rtl="0" algn="l">
-              <a:spcBef>
-                <a:spcPts val="0"/>
-              </a:spcBef>
-              <a:spcAft>
-                <a:spcPts val="0"/>
-              </a:spcAft>
-              <a:buNone/>
-            </a:pPr>
-            <a:r>
-              <a:rPr lang="en">
-                <a:solidFill>
-                  <a:schemeClr val="dk1"/>
-                </a:solidFill>
-              </a:rPr>
+          </a:p>
+          <a:p/>
+          <a:p>
+            <a:r>
               <a:t>The one caveat: the codebase is small enough that the polling isn't actually painful yet, so students need to be told to imagine it at scale. But that's actually a good teaching moment too - when should you reach for events vs. just polling?</a:t>
             </a:r>
-            <a:endParaRPr/>
+          </a:p>
+          <a:p/>
+          <a:p>
+            <a:r>
+              <a:t>Full instructions (also on the course site):</a:t>
+            </a:r>
+          </a:p>
+          <a:p>
+            <a:r>
+              <a:t>- OnPlayerDied is detected in one place but causes a game over screen to appear somewhere completely different. Trace the full chain through the code.</a:t>
+            </a:r>
+          </a:p>
+          <a:p>
+            <a:r>
+              <a:t>- Enemy death is handled asymmetrically to player death.</a:t>
+            </a:r>
+          </a:p>
+          <a:p>
+            <a:r>
+              <a:t>  - What happens now when an enemy dies?</a:t>
+            </a:r>
+          </a:p>
+          <a:p>
+            <a:r>
+              <a:t>  - What could happen if there were an event for it?</a:t>
+            </a:r>
+          </a:p>
+          <a:p>
+            <a:r>
+              <a:t>  - What would you need to add, and where?</a:t>
+            </a:r>
+          </a:p>
+          <a:p>
+            <a:r>
+              <a:t>- SoundManager.PlaySound(...) is called directly from several unrelated classes.</a:t>
+            </a:r>
+          </a:p>
+          <a:p>
+            <a:r>
+              <a:t>  - Find all the call sites. Why is this a problem, and how would events fix it?</a:t>
+            </a:r>
+          </a:p>
+          <a:p>
+            <a:r>
+              <a:t>- Pick one of the above and refactor it to be event-driven.</a:t>
+            </a:r>
+          </a:p>
+          <a:p>
+            <a:r>
+              <a:t>  - The class firing the event should have no reference to the class reacting to it.</a:t>
+            </a:r>
           </a:p>
         </p:txBody>
       </p:sp>
@@ -2920,19 +2858,59 @@
           </a:bodyPr>
           <a:lstStyle/>
           <a:p>
-            <a:pPr indent="0" lvl="0" marL="0" rtl="0" algn="l">
-              <a:spcBef>
-                <a:spcPts val="0"/>
-              </a:spcBef>
-              <a:spcAft>
-                <a:spcPts val="0"/>
-              </a:spcAft>
-              <a:buNone/>
-            </a:pPr>
-            <a:r>
-              <a:t/>
-            </a:r>
-            <a:endParaRPr/>
+            <a:r>
+              <a:t>Talking points:</a:t>
+            </a:r>
+          </a:p>
+          <a:p>
+            <a:r>
+              <a:t>- Short for “in-betweening”</a:t>
+            </a:r>
+          </a:p>
+          <a:p>
+            <a:r>
+              <a:t>  - Animating a value from A to B over time</a:t>
+            </a:r>
+          </a:p>
+          <a:p>
+            <a:r>
+              <a:t>- Comes from traditional animation</a:t>
+            </a:r>
+          </a:p>
+          <a:p>
+            <a:r>
+              <a:t>  - Artists drew keyframes, assistants filled in the frames in between</a:t>
+            </a:r>
+          </a:p>
+          <a:p>
+            <a:r>
+              <a:t>- Instead of snapping a position instantly, you move it a little each frame until it arrives</a:t>
+            </a:r>
+          </a:p>
+          <a:p>
+            <a:r>
+              <a:t>- Used everywhere in games</a:t>
+            </a:r>
+          </a:p>
+          <a:p>
+            <a:r>
+              <a:t>  - UI animations, camera movement, character transitions, screen wipes</a:t>
+            </a:r>
+          </a:p>
+          <a:p>
+            <a:r>
+              <a:t>- The two things you always need to define:</a:t>
+            </a:r>
+          </a:p>
+          <a:p>
+            <a:r>
+              <a:t>  - What is moving</a:t>
+            </a:r>
+          </a:p>
+          <a:p>
+            <a:r>
+              <a:t>  - How fast / by what curve (Easings.net)</a:t>
+            </a:r>
           </a:p>
         </p:txBody>
       </p:sp>
@@ -3019,19 +2997,59 @@
           </a:bodyPr>
           <a:lstStyle/>
           <a:p>
-            <a:pPr indent="0" lvl="0" marL="0" rtl="0" algn="l">
-              <a:spcBef>
-                <a:spcPts val="0"/>
-              </a:spcBef>
-              <a:spcAft>
-                <a:spcPts val="0"/>
-              </a:spcAft>
-              <a:buNone/>
-            </a:pPr>
-            <a:r>
-              <a:t/>
-            </a:r>
-            <a:endParaRPr/>
+            <a:r>
+              <a:t>Talking points:</a:t>
+            </a:r>
+          </a:p>
+          <a:p>
+            <a:r>
+              <a:t>- The simplest tween curve - constant speed from A to B</a:t>
+            </a:r>
+          </a:p>
+          <a:p>
+            <a:r>
+              <a:t>- lerp(a, b, t) = a + (b - a) * t where t goes from 0 to 1</a:t>
+            </a:r>
+          </a:p>
+          <a:p>
+            <a:r>
+              <a:t>  - t = 0 → result is a</a:t>
+            </a:r>
+          </a:p>
+          <a:p>
+            <a:r>
+              <a:t>  - t = 0.5 → result is exactly halfway</a:t>
+            </a:r>
+          </a:p>
+          <a:p>
+            <a:r>
+              <a:t>  - t = 1 → result is b</a:t>
+            </a:r>
+          </a:p>
+          <a:p>
+            <a:r>
+              <a:t>- "Linear" means equal steps</a:t>
+            </a:r>
+          </a:p>
+          <a:p>
+            <a:r>
+              <a:t>  - The value moves the same amount every frame</a:t>
+            </a:r>
+          </a:p>
+          <a:p>
+            <a:r>
+              <a:t>- Works on anything numeric</a:t>
+            </a:r>
+          </a:p>
+          <a:p>
+            <a:r>
+              <a:t>  - floats, positions, colours, even angles</a:t>
+            </a:r>
+          </a:p>
+          <a:p>
+            <a:r>
+              <a:t>- Non-linear curves (ease-in, ease-out) feel more natural but lerp is a good starting point</a:t>
+            </a:r>
           </a:p>
         </p:txBody>
       </p:sp>
@@ -3118,51 +3136,95 @@
           </a:bodyPr>
           <a:lstStyle/>
           <a:p>
-            <a:pPr indent="0" lvl="0" marL="0" rtl="0" algn="l">
-              <a:spcBef>
-                <a:spcPts val="0"/>
-              </a:spcBef>
-              <a:spcAft>
-                <a:spcPts val="0"/>
-              </a:spcAft>
-              <a:buNone/>
-            </a:pPr>
-            <a:r>
-              <a:rPr lang="en"/>
+            <a:r>
               <a:t>the lerp on the camera and the lerp on the player are independent but run in parallel, which is what makes the player look like they're walking through the doorway rather than floating across a black screen.</a:t>
             </a:r>
-            <a:endParaRPr/>
-          </a:p>
-          <a:p>
-            <a:pPr indent="0" lvl="0" marL="0" rtl="0" algn="l">
-              <a:spcBef>
-                <a:spcPts val="0"/>
-              </a:spcBef>
-              <a:spcAft>
-                <a:spcPts val="0"/>
-              </a:spcAft>
-              <a:buNone/>
-            </a:pPr>
-            <a:r>
-              <a:rPr lang="en"/>
+          </a:p>
+          <a:p>
+            <a:r>
               <a:t>During the scroll, Room.Update is not called — enemies and gameplay are frozen until the transition finishes</a:t>
             </a:r>
-            <a:endParaRPr/>
-          </a:p>
-          <a:p>
-            <a:pPr indent="0" lvl="0" marL="0" rtl="0" algn="l">
-              <a:spcBef>
-                <a:spcPts val="0"/>
-              </a:spcBef>
-              <a:spcAft>
-                <a:spcPts val="0"/>
-              </a:spcAft>
-              <a:buNone/>
-            </a:pPr>
-            <a:r>
-              <a:t/>
-            </a:r>
-            <a:endParaRPr/>
+          </a:p>
+          <a:p/>
+          <a:p>
+            <a:r>
+              <a:t>Talking points:</a:t>
+            </a:r>
+          </a:p>
+          <a:p>
+            <a:r>
+              <a:t>- When the player walks through a door, two things tween simultaneously</a:t>
+            </a:r>
+          </a:p>
+          <a:p>
+            <a:r>
+              <a:t>  - The camera - from (0, 0) to _shiftTarget (one screen width/height away)</a:t>
+            </a:r>
+          </a:p>
+          <a:p>
+            <a:r>
+              <a:t>  - The player - from the exit doorway to the matching entry point in the new room</a:t>
+            </a:r>
+          </a:p>
+          <a:p>
+            <a:r>
+              <a:t>- The new room is placed at _shiftTarget and never moves</a:t>
+            </a:r>
+          </a:p>
+          <a:p>
+            <a:r>
+              <a:t>  - The camera travelling toward it is what creates the scroll effect</a:t>
+            </a:r>
+          </a:p>
+          <a:p>
+            <a:r>
+              <a:t>- All objects render through the same camera.Transform * screenScaleMatrix</a:t>
+            </a:r>
+          </a:p>
+          <a:p>
+            <a:r>
+              <a:t>  - The whole scene shifts together</a:t>
+            </a:r>
+          </a:p>
+          <a:p>
+            <a:r>
+              <a:t>- When the tween finishes, FinishShift makes the new room current</a:t>
+            </a:r>
+          </a:p>
+          <a:p>
+            <a:r>
+              <a:t>  - Camera &amp; Player position is then reset</a:t>
+            </a:r>
+          </a:p>
+          <a:p>
+            <a:r>
+              <a:t>  - Gameplay resumes (Room.Update is now called again)</a:t>
+            </a:r>
+          </a:p>
+          <a:p>
+            <a:r>
+              <a:t>// Dungeon.cs, BeginShift</a:t>
+            </a:r>
+          </a:p>
+          <a:p>
+            <a:r>
+              <a:t>_tweens.Tween(GameSettings.RoomShiftDuration)</a:t>
+            </a:r>
+          </a:p>
+          <a:p>
+            <a:r>
+              <a:t>    .Add(t =&gt; /* move the camera */, 0f, 1f)</a:t>
+            </a:r>
+          </a:p>
+          <a:p>
+            <a:r>
+              <a:t>    .Add(t =&gt; /* walk the player */, 0f, 1f)</a:t>
+            </a:r>
+          </a:p>
+          <a:p>
+            <a:r>
+              <a:t>    .Finish(FinishShift);</a:t>
+            </a:r>
           </a:p>
         </p:txBody>
       </p:sp>
@@ -3249,20 +3311,20 @@
           </a:bodyPr>
           <a:lstStyle/>
           <a:p>
-            <a:pPr indent="0" lvl="0" marL="0" rtl="0" algn="l">
-              <a:spcBef>
-                <a:spcPts val="0"/>
-              </a:spcBef>
-              <a:spcAft>
-                <a:spcPts val="0"/>
-              </a:spcAft>
-              <a:buNone/>
-            </a:pPr>
-            <a:r>
-              <a:rPr lang="en"/>
+            <a:r>
               <a:t>Stencil buffer</a:t>
             </a:r>
-            <a:endParaRPr/>
+          </a:p>
+          <a:p/>
+          <a:p>
+            <a:r>
+              <a:t>Talking points:</a:t>
+            </a:r>
+          </a:p>
+          <a:p>
+            <a:r>
+              <a:t>- Stencil buffer</a:t>
+            </a:r>
           </a:p>
         </p:txBody>
       </p:sp>
@@ -3448,20 +3510,80 @@
           </a:bodyPr>
           <a:lstStyle/>
           <a:p>
-            <a:pPr indent="0" lvl="0" marL="0" rtl="0" algn="l">
-              <a:spcBef>
-                <a:spcPts val="0"/>
-              </a:spcBef>
-              <a:spcAft>
-                <a:spcPts val="0"/>
-              </a:spcAft>
-              <a:buNone/>
-            </a:pPr>
-            <a:r>
-              <a:rPr lang="en"/>
+            <a:r>
               <a:t>point out that a designer can read and edit XML without knowing C#</a:t>
             </a:r>
-            <a:endParaRPr/>
+          </a:p>
+          <a:p/>
+          <a:p>
+            <a:r>
+              <a:t>Talking points:</a:t>
+            </a:r>
+          </a:p>
+          <a:p>
+            <a:r>
+              <a:t>- Content lives in config files, behaviour lives in C#</a:t>
+            </a:r>
+          </a:p>
+          <a:p>
+            <a:r>
+              <a:t>  - This project uses XML — alternatives: JSON, YAML, TOML, Lua</a:t>
+            </a:r>
+          </a:p>
+          <a:p>
+            <a:r>
+              <a:t>- Definition classes parse the files once at startup into dictionaries</a:t>
+            </a:r>
+          </a:p>
+          <a:p>
+            <a:r>
+              <a:t>  - The rest of the code never touches XML</a:t>
+            </a:r>
+          </a:p>
+          <a:p>
+            <a:r>
+              <a:t>- Adding a new enemy type = one &lt;Enemy&gt; block in XML + a spritesheet row</a:t>
+            </a:r>
+          </a:p>
+          <a:p>
+            <a:r>
+              <a:t>  - No C# changes, no recompile</a:t>
+            </a:r>
+          </a:p>
+          <a:p>
+            <a:r>
+              <a:t>- GameObject has no if (type == "switch") anywhere</a:t>
+            </a:r>
+          </a:p>
+          <a:p>
+            <a:r>
+              <a:t>  - the XML defines valid states, the C# just looks up the current state name at draw time</a:t>
+            </a:r>
+          </a:p>
+          <a:p>
+            <a:r>
+              <a:t>&lt;Enemy type="skeleton" width="16" height="16" walkSpeed="20" health="1"&gt;</a:t>
+            </a:r>
+          </a:p>
+          <a:p>
+            <a:r>
+              <a:t>  &lt;Animation name="walk-down"  frames="9,10,11,10"   interval="0.2" /&gt;</a:t>
+            </a:r>
+          </a:p>
+          <a:p>
+            <a:r>
+              <a:t>  &lt;Animation name="idle-down"  frames="10"           interval="0.2" /&gt;</a:t>
+            </a:r>
+          </a:p>
+          <a:p>
+            <a:r>
+              <a:t>&lt;/Enemy&gt;</a:t>
+            </a:r>
+          </a:p>
+          <a:p>
+            <a:r>
+              <a:t>Tradeoff: typos in XML become runtime errors, not compile errors — the compiler can't catch type="skelton"</a:t>
+            </a:r>
           </a:p>
         </p:txBody>
       </p:sp>
@@ -3548,19 +3670,54 @@
           </a:bodyPr>
           <a:lstStyle/>
           <a:p>
-            <a:pPr indent="0" lvl="0" marL="0" rtl="0" algn="l">
-              <a:spcBef>
-                <a:spcPts val="0"/>
-              </a:spcBef>
-              <a:spcAft>
-                <a:spcPts val="0"/>
-              </a:spcAft>
-              <a:buNone/>
-            </a:pPr>
-            <a:r>
-              <a:t/>
-            </a:r>
-            <a:endParaRPr/>
+            <a:r>
+              <a:t>Full instructions (also on the course site):</a:t>
+            </a:r>
+          </a:p>
+          <a:p>
+            <a:r>
+              <a:t>- Start from Zelda7, the finished game</a:t>
+            </a:r>
+          </a:p>
+          <a:p>
+            <a:r>
+              <a:t>- Make some enemies drop hearts randomly, which heal the player for 2 damage</a:t>
+            </a:r>
+          </a:p>
+          <a:p>
+            <a:r>
+              <a:t>  - I.e. one whole heart</a:t>
+            </a:r>
+          </a:p>
+          <a:p>
+            <a:r>
+              <a:t>- Allow the player to lift pots</a:t>
+            </a:r>
+          </a:p>
+          <a:p>
+            <a:r>
+              <a:t>  - Using the animations included in the sprite sheets here</a:t>
+            </a:r>
+          </a:p>
+          <a:p>
+            <a:r>
+              <a:t>- Pots should stick to the player while they are carrying them</a:t>
+            </a:r>
+          </a:p>
+          <a:p>
+            <a:r>
+              <a:t>  - The pot needs to track player position</a:t>
+            </a:r>
+          </a:p>
+          <a:p>
+            <a:r>
+              <a:t>- Allow the player to throw pots and damage enemies</a:t>
+            </a:r>
+          </a:p>
+          <a:p>
+            <a:r>
+              <a:t>  - If it hits a wall, an enemy, or travels farther than four tiles, destroy it.</a:t>
+            </a:r>
           </a:p>
         </p:txBody>
       </p:sp>
@@ -3671,6 +3828,250 @@
 </p:notes>
 </file>
 
+<file path=ppt/notesSlides/notesSlide33.xml><?xml version="1.0" encoding="utf-8"?>
+<p:notes xmlns:a="http://schemas.openxmlformats.org/drawingml/2006/main" xmlns:p="http://schemas.openxmlformats.org/presentationml/2006/main" xmlns:r="http://schemas.openxmlformats.org/officeDocument/2006/relationships">
+  <p:cSld>
+    <p:spTree>
+      <p:nvGrpSpPr>
+        <p:cNvPr id="1" name=""/>
+        <p:cNvGrpSpPr/>
+        <p:nvPr/>
+      </p:nvGrpSpPr>
+      <p:grpSpPr>
+        <a:xfrm>
+          <a:off x="0" y="0"/>
+          <a:ext cx="0" cy="0"/>
+          <a:chOff x="0" y="0"/>
+          <a:chExt cx="0" cy="0"/>
+        </a:xfrm>
+      </p:grpSpPr>
+      <p:sp>
+        <p:nvSpPr>
+          <p:cNvPr id="2" name="Slide Image Placeholder 1"/>
+          <p:cNvSpPr>
+            <a:spLocks noGrp="1"/>
+          </p:cNvSpPr>
+          <p:nvPr>
+            <p:ph type="sldImg" idx="2"/>
+          </p:nvPr>
+        </p:nvSpPr>
+        <p:spPr/>
+      </p:sp>
+      <p:sp>
+        <p:nvSpPr>
+          <p:cNvPr id="3" name="Notes Placeholder 2"/>
+          <p:cNvSpPr>
+            <a:spLocks noGrp="1"/>
+          </p:cNvSpPr>
+          <p:nvPr>
+            <p:ph type="body" idx="1"/>
+          </p:nvPr>
+        </p:nvSpPr>
+        <p:spPr/>
+        <p:txBody>
+          <a:bodyPr/>
+          <a:lstStyle/>
+          <a:p>
+            <a:r>
+              <a:t>Talking points:</a:t>
+            </a:r>
+          </a:p>
+          <a:p>
+            <a:r>
+              <a:t>- The player and the enemies share an abstract Entity base class</a:t>
+            </a:r>
+          </a:p>
+          <a:p>
+            <a:r>
+              <a:t>  - Position, collision box, animations, health, invulnerability, a current state</a:t>
+            </a:r>
+          </a:p>
+          <a:p>
+            <a:r>
+              <a:t>- Inheritance works while there is one axis of variation</a:t>
+            </a:r>
+          </a:p>
+          <a:p>
+            <a:r>
+              <a:t>  - But an enemy that shoots and flies and explodes?</a:t>
+            </a:r>
+          </a:p>
+          <a:p>
+            <a:r>
+              <a:t>- Deep hierarchies lead to duplicated code, or a bloated base class</a:t>
+            </a:r>
+          </a:p>
+          <a:p>
+            <a:r>
+              <a:t>- “Favor object composition over class inheritance” (Gang of Four)</a:t>
+            </a:r>
+          </a:p>
+        </p:txBody>
+      </p:sp>
+    </p:spTree>
+  </p:cSld>
+  <p:clrMapOvr>
+    <a:masterClrMapping/>
+  </p:clrMapOvr>
+</p:notes>
+</file>
+
+<file path=ppt/notesSlides/notesSlide34.xml><?xml version="1.0" encoding="utf-8"?>
+<p:notes xmlns:a="http://schemas.openxmlformats.org/drawingml/2006/main" xmlns:p="http://schemas.openxmlformats.org/presentationml/2006/main" xmlns:r="http://schemas.openxmlformats.org/officeDocument/2006/relationships">
+  <p:cSld>
+    <p:spTree>
+      <p:nvGrpSpPr>
+        <p:cNvPr id="1" name=""/>
+        <p:cNvGrpSpPr/>
+        <p:nvPr/>
+      </p:nvGrpSpPr>
+      <p:grpSpPr>
+        <a:xfrm>
+          <a:off x="0" y="0"/>
+          <a:ext cx="0" cy="0"/>
+          <a:chOff x="0" y="0"/>
+          <a:chExt cx="0" cy="0"/>
+        </a:xfrm>
+      </p:grpSpPr>
+      <p:sp>
+        <p:nvSpPr>
+          <p:cNvPr id="2" name="Slide Image Placeholder 1"/>
+          <p:cNvSpPr>
+            <a:spLocks noGrp="1"/>
+          </p:cNvSpPr>
+          <p:nvPr>
+            <p:ph type="sldImg" idx="2"/>
+          </p:nvPr>
+        </p:nvSpPr>
+        <p:spPr/>
+      </p:sp>
+      <p:sp>
+        <p:nvSpPr>
+          <p:cNvPr id="3" name="Notes Placeholder 2"/>
+          <p:cNvSpPr>
+            <a:spLocks noGrp="1"/>
+          </p:cNvSpPr>
+          <p:nvPr>
+            <p:ph type="body" idx="1"/>
+          </p:nvPr>
+        </p:nvSpPr>
+        <p:spPr/>
+        <p:txBody>
+          <a:bodyPr/>
+          <a:lstStyle/>
+          <a:p>
+            <a:r>
+              <a:t>Talking points:</a:t>
+            </a:r>
+          </a:p>
+          <a:p>
+            <a:r>
+              <a:t>- Behaviour in state objects</a:t>
+            </a:r>
+          </a:p>
+          <a:p>
+            <a:r>
+              <a:t>  - An enemy’s AI is the state object it holds, not the Enemy class itself</a:t>
+            </a:r>
+          </a:p>
+          <a:p>
+            <a:r>
+              <a:t>- Behaviour wired from outside</a:t>
+            </a:r>
+          </a:p>
+          <a:p>
+            <a:r>
+              <a:t>  - A floor switch is a plain GameObject; the room attaches what happens via OnCollide</a:t>
+            </a:r>
+          </a:p>
+          <a:p>
+            <a:r>
+              <a:t>- Data instead of subclasses</a:t>
+            </a:r>
+          </a:p>
+          <a:p>
+            <a:r>
+              <a:t>  - Enemy types come from XML, not one class per type</a:t>
+            </a:r>
+          </a:p>
+          <a:p>
+            <a:r>
+              <a:t>- Ask: is it what something is, or what it can do?</a:t>
+            </a:r>
+          </a:p>
+          <a:p>
+            <a:r>
+              <a:t>  - Plants vs. Zombies takes this all the way: the Component pattern</a:t>
+            </a:r>
+          </a:p>
+        </p:txBody>
+      </p:sp>
+    </p:spTree>
+  </p:cSld>
+  <p:clrMapOvr>
+    <a:masterClrMapping/>
+  </p:clrMapOvr>
+</p:notes>
+</file>
+
+<file path=ppt/notesSlides/notesSlide35.xml><?xml version="1.0" encoding="utf-8"?>
+<p:notes xmlns:a="http://schemas.openxmlformats.org/drawingml/2006/main" xmlns:p="http://schemas.openxmlformats.org/presentationml/2006/main" xmlns:r="http://schemas.openxmlformats.org/officeDocument/2006/relationships">
+  <p:cSld>
+    <p:spTree>
+      <p:nvGrpSpPr>
+        <p:cNvPr id="1" name=""/>
+        <p:cNvGrpSpPr/>
+        <p:nvPr/>
+      </p:nvGrpSpPr>
+      <p:grpSpPr>
+        <a:xfrm>
+          <a:off x="0" y="0"/>
+          <a:ext cx="0" cy="0"/>
+          <a:chOff x="0" y="0"/>
+          <a:chExt cx="0" cy="0"/>
+        </a:xfrm>
+      </p:grpSpPr>
+      <p:sp>
+        <p:nvSpPr>
+          <p:cNvPr id="2" name="Slide Image Placeholder 1"/>
+          <p:cNvSpPr>
+            <a:spLocks noGrp="1"/>
+          </p:cNvSpPr>
+          <p:nvPr>
+            <p:ph type="sldImg" idx="2"/>
+          </p:nvPr>
+        </p:nvSpPr>
+        <p:spPr/>
+      </p:sp>
+      <p:sp>
+        <p:nvSpPr>
+          <p:cNvPr id="3" name="Notes Placeholder 2"/>
+          <p:cNvSpPr>
+            <a:spLocks noGrp="1"/>
+          </p:cNvSpPr>
+          <p:nvPr>
+            <p:ph type="body" idx="1"/>
+          </p:nvPr>
+        </p:nvSpPr>
+        <p:spPr/>
+        <p:txBody>
+          <a:bodyPr/>
+          <a:lstStyle/>
+          <a:p>
+            <a:r>
+              <a:t>Ask, let them answer in pairs for a minute, then take a few answers. These are the site’s Check yourself questions.</a:t>
+            </a:r>
+          </a:p>
+        </p:txBody>
+      </p:sp>
+    </p:spTree>
+  </p:cSld>
+  <p:clrMapOvr>
+    <a:masterClrMapping/>
+  </p:clrMapOvr>
+</p:notes>
+</file>
+
 <file path=ppt/notesSlides/notesSlide4.xml><?xml version="1.0" encoding="utf-8"?>
 <p:notes xmlns:a="http://schemas.openxmlformats.org/drawingml/2006/main" xmlns:r="http://schemas.openxmlformats.org/officeDocument/2006/relationships" xmlns:mc="http://schemas.openxmlformats.org/markup-compatibility/2006" xmlns:mv="urn:schemas-microsoft-com:mac:vml" xmlns:p="http://schemas.openxmlformats.org/presentationml/2006/main" xmlns:c="http://schemas.openxmlformats.org/drawingml/2006/chart" xmlns:dgm="http://schemas.openxmlformats.org/drawingml/2006/diagram" xmlns:o="urn:schemas-microsoft-com:office:office" xmlns:v="urn:schemas-microsoft-com:vml" xmlns:pvml="urn:schemas-microsoft-com:office:powerpoint" xmlns:com="http://schemas.openxmlformats.org/drawingml/2006/compatibility" xmlns:p14="http://schemas.microsoft.com/office/powerpoint/2010/main" xmlns:p15="http://schemas.microsoft.com/office/powerpoint/2012/main" xmlns:ahyp="http://schemas.microsoft.com/office/drawing/2018/hyperlinkcolor" showMasterPhAnim="0" showMasterSp="0">
   <p:cSld>
@@ -3845,19 +4246,44 @@
           </a:bodyPr>
           <a:lstStyle/>
           <a:p>
-            <a:pPr indent="0" lvl="0" marL="0" rtl="0" algn="l">
-              <a:spcBef>
-                <a:spcPts val="0"/>
-              </a:spcBef>
-              <a:spcAft>
-                <a:spcPts val="0"/>
-              </a:spcAft>
-              <a:buNone/>
-            </a:pPr>
-            <a:r>
-              <a:t/>
-            </a:r>
-            <a:endParaRPr/>
+            <a:r>
+              <a:t>Talking points:</a:t>
+            </a:r>
+          </a:p>
+          <a:p>
+            <a:r>
+              <a:t>- All Source code for today’s game can be found here:</a:t>
+            </a:r>
+          </a:p>
+          <a:p>
+            <a:r>
+              <a:t>  - github.com/Metamate/gar-games (folder 08-zelda)</a:t>
+            </a:r>
+          </a:p>
+          <a:p>
+            <a:r>
+              <a:t>- Walkthrough in README.md</a:t>
+            </a:r>
+          </a:p>
+          <a:p>
+            <a:r>
+              <a:t>- The game is built up in steps: Zelda0 → Zelda7</a:t>
+            </a:r>
+          </a:p>
+          <a:p>
+            <a:r>
+              <a:t>  - Each step is a separate project that adds one concept</a:t>
+            </a:r>
+          </a:p>
+          <a:p>
+            <a:r>
+              <a:t>  - Compare neighbouring steps to see exactly what changed</a:t>
+            </a:r>
+          </a:p>
+          <a:p>
+            <a:r>
+              <a:t>- Zelda7 is the finished game: explore it, and start the exercises from it</a:t>
+            </a:r>
           </a:p>
         </p:txBody>
       </p:sp>
@@ -7996,7 +8422,7 @@
         <p:spPr>
           <a:xfrm>
             <a:off x="311700" y="885950"/>
-            <a:ext cx="8520600" cy="4023300"/>
+            <a:ext cx="8520600" cy="521208"/>
           </a:xfrm>
           <a:prstGeom prst="rect">
             <a:avLst/>
@@ -8020,128 +8446,271 @@
             </a:pPr>
             <a:r>
               <a:rPr lang="en"/>
+              <a:t>Zelda already composes: ask whether it’s what something is, or what it can do.</a:t>
+            </a:r>
+            <a:endParaRPr/>
+          </a:p>
+        </p:txBody>
+      </p:sp>
+      <p:sp>
+        <p:nvSpPr>
+          <p:cNvPr id="251" name="Rounded Rectangle 250"/>
+          <p:cNvSpPr/>
+          <p:nvPr/>
+        </p:nvSpPr>
+        <p:spPr>
+          <a:xfrm>
+            <a:off x="411480" y="1463040"/>
+            <a:ext cx="2651760" cy="1188720"/>
+          </a:xfrm>
+          <a:prstGeom prst="roundRect">
+            <a:avLst>
+              <a:gd name="adj" fmla="val 12000"/>
+            </a:avLst>
+          </a:prstGeom>
+          <a:solidFill>
+            <a:srgbClr val="2E3338"/>
+          </a:solidFill>
+          <a:ln>
+            <a:noFill/>
+          </a:ln>
+          <a:effectLst/>
+        </p:spPr>
+        <p:style>
+          <a:lnRef idx="1">
+            <a:schemeClr val="accent1"/>
+          </a:lnRef>
+          <a:fillRef idx="3">
+            <a:schemeClr val="accent1"/>
+          </a:fillRef>
+          <a:effectRef idx="2">
+            <a:schemeClr val="accent1"/>
+          </a:effectRef>
+          <a:fontRef idx="minor">
+            <a:schemeClr val="lt1"/>
+          </a:fontRef>
+        </p:style>
+        <p:txBody>
+          <a:bodyPr rtlCol="0" anchor="ctr" wrap="square" lIns="73152" rIns="73152"/>
+          <a:lstStyle/>
+          <a:p>
+            <a:pPr algn="ctr"/>
+            <a:r>
+              <a:rPr sz="1500" b="1">
+                <a:solidFill>
+                  <a:srgbClr val="DEE2E6"/>
+                </a:solidFill>
+              </a:rPr>
               <a:t>Behaviour in state objects</a:t>
             </a:r>
-            <a:endParaRPr/>
-          </a:p>
-          <a:p>
-            <a:pPr indent="-317500" lvl="1" marL="914400" rtl="0" algn="l">
-              <a:spcBef>
-                <a:spcPts val="0"/>
-              </a:spcBef>
-              <a:spcAft>
-                <a:spcPts val="0"/>
-              </a:spcAft>
-              <a:buSzPts val="1400"/>
-              <a:buChar char="○"/>
-            </a:pPr>
-            <a:r>
-              <a:rPr lang="en"/>
-              <a:t>An enemy’s AI is the state object it holds, not the Enemy class itself</a:t>
-            </a:r>
-            <a:endParaRPr/>
-          </a:p>
-          <a:p>
-            <a:pPr indent="-330200" lvl="0" marL="457200" rtl="0" algn="l">
-              <a:spcBef>
-                <a:spcPts val="0"/>
-              </a:spcBef>
-              <a:spcAft>
-                <a:spcPts val="0"/>
-              </a:spcAft>
-              <a:buSzPts val="1600"/>
-              <a:buChar char="●"/>
-            </a:pPr>
-            <a:r>
-              <a:rPr lang="en"/>
+          </a:p>
+          <a:p>
+            <a:pPr algn="ctr"/>
+            <a:r>
+              <a:rPr sz="1300" b="0">
+                <a:solidFill>
+                  <a:srgbClr val="9AA3AB"/>
+                </a:solidFill>
+              </a:rPr>
+              <a:t>an enemy’s AI is the state</a:t>
+            </a:r>
+          </a:p>
+          <a:p>
+            <a:pPr algn="ctr"/>
+            <a:r>
+              <a:rPr sz="1300" b="0">
+                <a:solidFill>
+                  <a:srgbClr val="9AA3AB"/>
+                </a:solidFill>
+              </a:rPr>
+              <a:t>it holds, not the Enemy class</a:t>
+            </a:r>
+          </a:p>
+        </p:txBody>
+      </p:sp>
+      <p:sp>
+        <p:nvSpPr>
+          <p:cNvPr id="252" name="Rounded Rectangle 251"/>
+          <p:cNvSpPr/>
+          <p:nvPr/>
+        </p:nvSpPr>
+        <p:spPr>
+          <a:xfrm>
+            <a:off x="3246120" y="1463040"/>
+            <a:ext cx="2651760" cy="1188720"/>
+          </a:xfrm>
+          <a:prstGeom prst="roundRect">
+            <a:avLst>
+              <a:gd name="adj" fmla="val 12000"/>
+            </a:avLst>
+          </a:prstGeom>
+          <a:solidFill>
+            <a:srgbClr val="2E3338"/>
+          </a:solidFill>
+          <a:ln>
+            <a:noFill/>
+          </a:ln>
+          <a:effectLst/>
+        </p:spPr>
+        <p:style>
+          <a:lnRef idx="1">
+            <a:schemeClr val="accent1"/>
+          </a:lnRef>
+          <a:fillRef idx="3">
+            <a:schemeClr val="accent1"/>
+          </a:fillRef>
+          <a:effectRef idx="2">
+            <a:schemeClr val="accent1"/>
+          </a:effectRef>
+          <a:fontRef idx="minor">
+            <a:schemeClr val="lt1"/>
+          </a:fontRef>
+        </p:style>
+        <p:txBody>
+          <a:bodyPr rtlCol="0" anchor="ctr" wrap="square" lIns="73152" rIns="73152"/>
+          <a:lstStyle/>
+          <a:p>
+            <a:pPr algn="ctr"/>
+            <a:r>
+              <a:rPr sz="1500" b="1">
+                <a:solidFill>
+                  <a:srgbClr val="DEE2E6"/>
+                </a:solidFill>
+              </a:rPr>
               <a:t>Behaviour wired from outside</a:t>
             </a:r>
-            <a:endParaRPr/>
-          </a:p>
-          <a:p>
-            <a:pPr indent="-317500" lvl="1" marL="914400" rtl="0" algn="l">
-              <a:spcBef>
-                <a:spcPts val="0"/>
-              </a:spcBef>
-              <a:spcAft>
-                <a:spcPts val="0"/>
-              </a:spcAft>
-              <a:buSzPts val="1400"/>
-              <a:buChar char="○"/>
-            </a:pPr>
-            <a:r>
-              <a:rPr lang="en"/>
-              <a:t>A floor switch is a plain GameObject; the room attaches what happens via OnCollide</a:t>
-            </a:r>
-            <a:endParaRPr/>
-          </a:p>
-          <a:p>
-            <a:pPr indent="-330200" lvl="0" marL="457200" rtl="0" algn="l">
-              <a:spcBef>
-                <a:spcPts val="0"/>
-              </a:spcBef>
-              <a:spcAft>
-                <a:spcPts val="0"/>
-              </a:spcAft>
-              <a:buSzPts val="1600"/>
-              <a:buChar char="●"/>
-            </a:pPr>
-            <a:r>
-              <a:rPr lang="en"/>
+          </a:p>
+          <a:p>
+            <a:pPr algn="ctr"/>
+            <a:r>
+              <a:rPr sz="1300" b="0">
+                <a:solidFill>
+                  <a:srgbClr val="9AA3AB"/>
+                </a:solidFill>
+              </a:rPr>
+              <a:t>a switch is a plain GameObject;</a:t>
+            </a:r>
+          </a:p>
+          <a:p>
+            <a:pPr algn="ctr"/>
+            <a:r>
+              <a:rPr sz="1300" b="0">
+                <a:solidFill>
+                  <a:srgbClr val="9AA3AB"/>
+                </a:solidFill>
+              </a:rPr>
+              <a:t>the room attaches OnCollide</a:t>
+            </a:r>
+          </a:p>
+        </p:txBody>
+      </p:sp>
+      <p:sp>
+        <p:nvSpPr>
+          <p:cNvPr id="253" name="Rounded Rectangle 252"/>
+          <p:cNvSpPr/>
+          <p:nvPr/>
+        </p:nvSpPr>
+        <p:spPr>
+          <a:xfrm>
+            <a:off x="6080760" y="1463040"/>
+            <a:ext cx="2651760" cy="1188720"/>
+          </a:xfrm>
+          <a:prstGeom prst="roundRect">
+            <a:avLst>
+              <a:gd name="adj" fmla="val 12000"/>
+            </a:avLst>
+          </a:prstGeom>
+          <a:solidFill>
+            <a:srgbClr val="2E3338"/>
+          </a:solidFill>
+          <a:ln>
+            <a:noFill/>
+          </a:ln>
+          <a:effectLst/>
+        </p:spPr>
+        <p:style>
+          <a:lnRef idx="1">
+            <a:schemeClr val="accent1"/>
+          </a:lnRef>
+          <a:fillRef idx="3">
+            <a:schemeClr val="accent1"/>
+          </a:fillRef>
+          <a:effectRef idx="2">
+            <a:schemeClr val="accent1"/>
+          </a:effectRef>
+          <a:fontRef idx="minor">
+            <a:schemeClr val="lt1"/>
+          </a:fontRef>
+        </p:style>
+        <p:txBody>
+          <a:bodyPr rtlCol="0" anchor="ctr" wrap="square" lIns="73152" rIns="73152"/>
+          <a:lstStyle/>
+          <a:p>
+            <a:pPr algn="ctr"/>
+            <a:r>
+              <a:rPr sz="1500" b="1">
+                <a:solidFill>
+                  <a:srgbClr val="DEE2E6"/>
+                </a:solidFill>
+              </a:rPr>
               <a:t>Data instead of subclasses</a:t>
             </a:r>
-            <a:endParaRPr/>
-          </a:p>
-          <a:p>
-            <a:pPr indent="-317500" lvl="1" marL="914400" rtl="0" algn="l">
-              <a:spcBef>
-                <a:spcPts val="0"/>
-              </a:spcBef>
-              <a:spcAft>
-                <a:spcPts val="0"/>
-              </a:spcAft>
-              <a:buSzPts val="1400"/>
-              <a:buChar char="○"/>
-            </a:pPr>
-            <a:r>
-              <a:rPr lang="en"/>
-              <a:t>Enemy types come from XML, not one class per type</a:t>
-            </a:r>
-            <a:endParaRPr/>
-          </a:p>
-          <a:p>
-            <a:pPr indent="-330200" lvl="0" marL="457200" rtl="0" algn="l">
-              <a:spcBef>
-                <a:spcPts val="0"/>
-              </a:spcBef>
-              <a:spcAft>
-                <a:spcPts val="0"/>
-              </a:spcAft>
-              <a:buSzPts val="1600"/>
-              <a:buChar char="●"/>
-            </a:pPr>
-            <a:r>
-              <a:rPr lang="en"/>
-              <a:t>Ask: is it what something is, or what it can do?</a:t>
-            </a:r>
-            <a:endParaRPr/>
-          </a:p>
-          <a:p>
-            <a:pPr indent="-317500" lvl="1" marL="914400" rtl="0" algn="l">
-              <a:spcBef>
-                <a:spcPts val="0"/>
-              </a:spcBef>
-              <a:spcAft>
-                <a:spcPts val="0"/>
-              </a:spcAft>
-              <a:buSzPts val="1400"/>
-              <a:buChar char="○"/>
-            </a:pPr>
-            <a:r>
-              <a:rPr lang="en"/>
-              <a:t>Plants vs. Zombies takes this all the way: the Component pattern</a:t>
-            </a:r>
-            <a:endParaRPr/>
+          </a:p>
+          <a:p>
+            <a:pPr algn="ctr"/>
+            <a:r>
+              <a:rPr sz="1300" b="0">
+                <a:solidFill>
+                  <a:srgbClr val="9AA3AB"/>
+                </a:solidFill>
+              </a:rPr>
+              <a:t>enemy types come from XML,</a:t>
+            </a:r>
+          </a:p>
+          <a:p>
+            <a:pPr algn="ctr"/>
+            <a:r>
+              <a:rPr sz="1300" b="0">
+                <a:solidFill>
+                  <a:srgbClr val="9AA3AB"/>
+                </a:solidFill>
+              </a:rPr>
+              <a:t>not one class each</a:t>
+            </a:r>
+          </a:p>
+        </p:txBody>
+      </p:sp>
+      <p:sp>
+        <p:nvSpPr>
+          <p:cNvPr id="254" name="TextBox 253"/>
+          <p:cNvSpPr txBox="1"/>
+          <p:nvPr/>
+        </p:nvSpPr>
+        <p:spPr>
+          <a:xfrm>
+            <a:off x="411480" y="2926080"/>
+            <a:ext cx="8321040" cy="365760"/>
+          </a:xfrm>
+          <a:prstGeom prst="rect">
+            <a:avLst/>
+          </a:prstGeom>
+          <a:noFill/>
+        </p:spPr>
+        <p:txBody>
+          <a:bodyPr wrap="square">
+            <a:spAutoFit/>
+          </a:bodyPr>
+          <a:lstStyle/>
+          <a:p>
+            <a:pPr algn="ctr"/>
+            <a:r>
+              <a:rPr sz="1400" b="0" i="0">
+                <a:solidFill>
+                  <a:srgbClr val="9AA3AB"/>
+                </a:solidFill>
+              </a:rPr>
+              <a:t>Plants vs. Zombies takes this all the way: the Component pattern.</a:t>
+            </a:r>
           </a:p>
         </p:txBody>
       </p:sp>
@@ -15940,7 +16509,7 @@
         <p:spPr>
           <a:xfrm>
             <a:off x="311700" y="885950"/>
-            <a:ext cx="8520600" cy="4023300"/>
+            <a:ext cx="8520600" cy="1673352"/>
           </a:xfrm>
           <a:prstGeom prst="rect">
             <a:avLst/>
@@ -15964,7 +16533,7 @@
             </a:pPr>
             <a:r>
               <a:rPr lang="en"/>
-              <a:t>OnPlayerDied is detected in one place but causes a game over screen to appear somewhere completely different. Trace the full chain through the code.</a:t>
+              <a:t>Pick one and make it event-driven. The class firing the event must not know who reacts.</a:t>
             </a:r>
             <a:endParaRPr/>
           </a:p>
@@ -15981,58 +16550,7 @@
             </a:pPr>
             <a:r>
               <a:rPr lang="en"/>
-              <a:t>Enemy death is handled asymmetrically to player death.</a:t>
-            </a:r>
-            <a:endParaRPr/>
-          </a:p>
-          <a:p>
-            <a:pPr indent="-317500" lvl="1" marL="914400" rtl="0" algn="l">
-              <a:spcBef>
-                <a:spcPts val="0"/>
-              </a:spcBef>
-              <a:spcAft>
-                <a:spcPts val="0"/>
-              </a:spcAft>
-              <a:buSzPts val="1400"/>
-              <a:buChar char="○"/>
-            </a:pPr>
-            <a:r>
-              <a:rPr lang="en"/>
-              <a:t>What happens now when an enemy dies?</a:t>
-            </a:r>
-            <a:endParaRPr/>
-          </a:p>
-          <a:p>
-            <a:pPr indent="-317500" lvl="1" marL="914400" rtl="0" algn="l">
-              <a:spcBef>
-                <a:spcPts val="0"/>
-              </a:spcBef>
-              <a:spcAft>
-                <a:spcPts val="0"/>
-              </a:spcAft>
-              <a:buSzPts val="1400"/>
-              <a:buChar char="○"/>
-            </a:pPr>
-            <a:r>
-              <a:rPr lang="en"/>
-              <a:t>What could happen if there were an event for it?</a:t>
-            </a:r>
-            <a:endParaRPr/>
-          </a:p>
-          <a:p>
-            <a:pPr indent="-317500" lvl="1" marL="914400" rtl="0" algn="l">
-              <a:spcBef>
-                <a:spcPts val="0"/>
-              </a:spcBef>
-              <a:spcAft>
-                <a:spcPts val="0"/>
-              </a:spcAft>
-              <a:buSzPts val="1400"/>
-              <a:buChar char="○"/>
-            </a:pPr>
-            <a:r>
-              <a:rPr lang="en"/>
-              <a:t>What would you need to add, and where?</a:t>
+              <a:t>OnPlayerDied: trace the chain from the room to the game-over screen</a:t>
             </a:r>
             <a:endParaRPr/>
           </a:p>
@@ -16049,24 +16567,7 @@
             </a:pPr>
             <a:r>
               <a:rPr lang="en"/>
-              <a:t>SoundManager.PlaySound(...) is called directly from several unrelated classes.</a:t>
-            </a:r>
-            <a:endParaRPr/>
-          </a:p>
-          <a:p>
-            <a:pPr indent="-317500" lvl="1" marL="914400" rtl="0" algn="l">
-              <a:spcBef>
-                <a:spcPts val="0"/>
-              </a:spcBef>
-              <a:spcAft>
-                <a:spcPts val="0"/>
-              </a:spcAft>
-              <a:buSzPts val="1400"/>
-              <a:buChar char="○"/>
-            </a:pPr>
-            <a:r>
-              <a:rPr lang="en"/>
-              <a:t>Find all the call sites. Why is this a problem, and how would events fix it?</a:t>
+              <a:t>Enemy death: what could react to an event for it?</a:t>
             </a:r>
             <a:endParaRPr/>
           </a:p>
@@ -16083,24 +16584,7 @@
             </a:pPr>
             <a:r>
               <a:rPr lang="en"/>
-              <a:t>Pick one of the above and refactor it to be event-driven.</a:t>
-            </a:r>
-            <a:endParaRPr/>
-          </a:p>
-          <a:p>
-            <a:pPr indent="-317500" lvl="1" marL="914400" rtl="0" algn="l">
-              <a:spcBef>
-                <a:spcPts val="0"/>
-              </a:spcBef>
-              <a:spcAft>
-                <a:spcPts val="0"/>
-              </a:spcAft>
-              <a:buSzPts val="1400"/>
-              <a:buChar char="○"/>
-            </a:pPr>
-            <a:r>
-              <a:rPr lang="en"/>
-              <a:t>The class firing the event should have no reference to the class reacting to it.</a:t>
+              <a:t>SoundManager.PlaySound is called from many classes. How would events help?</a:t>
             </a:r>
             <a:endParaRPr/>
           </a:p>
@@ -16746,7 +17230,7 @@
         <p:spPr>
           <a:xfrm>
             <a:off x="311700" y="885950"/>
-            <a:ext cx="8520600" cy="4023300"/>
+            <a:ext cx="8520600" cy="521208"/>
           </a:xfrm>
           <a:prstGeom prst="rect">
             <a:avLst/>
@@ -16770,175 +17254,1058 @@
             </a:pPr>
             <a:r>
               <a:rPr lang="en"/>
-              <a:t>Short for “in-betweening”</a:t>
+              <a:t>Tweening: move a value from A to B over time, instead of snapping it there.</a:t>
             </a:r>
             <a:endParaRPr/>
           </a:p>
-          <a:p>
-            <a:pPr indent="-317500" lvl="1" marL="914400" rtl="0" algn="l">
-              <a:spcBef>
-                <a:spcPts val="0"/>
-              </a:spcBef>
-              <a:spcAft>
-                <a:spcPts val="0"/>
-              </a:spcAft>
-              <a:buSzPts val="1400"/>
-              <a:buChar char="○"/>
-            </a:pPr>
-            <a:r>
-              <a:rPr lang="en"/>
-              <a:t>Animating a value from A to B over time</a:t>
-            </a:r>
-            <a:endParaRPr/>
-          </a:p>
-          <a:p>
-            <a:pPr indent="-330200" lvl="0" marL="457200" rtl="0" algn="l">
-              <a:spcBef>
-                <a:spcPts val="0"/>
-              </a:spcBef>
-              <a:spcAft>
-                <a:spcPts val="0"/>
-              </a:spcAft>
-              <a:buSzPts val="1600"/>
-              <a:buChar char="●"/>
-            </a:pPr>
-            <a:r>
-              <a:rPr lang="en"/>
-              <a:t>Comes from traditional animation</a:t>
-            </a:r>
-            <a:endParaRPr/>
-          </a:p>
-          <a:p>
-            <a:pPr indent="-317500" lvl="1" marL="914400" rtl="0" algn="l">
-              <a:spcBef>
-                <a:spcPts val="0"/>
-              </a:spcBef>
-              <a:spcAft>
-                <a:spcPts val="0"/>
-              </a:spcAft>
-              <a:buSzPts val="1400"/>
-              <a:buChar char="○"/>
-            </a:pPr>
-            <a:r>
-              <a:rPr lang="en"/>
-              <a:t>Artists drew keyframes, assistants filled in the frames in between</a:t>
-            </a:r>
-            <a:endParaRPr/>
-          </a:p>
-          <a:p>
-            <a:pPr indent="-330200" lvl="0" marL="457200" rtl="0" algn="l">
-              <a:spcBef>
-                <a:spcPts val="0"/>
-              </a:spcBef>
-              <a:spcAft>
-                <a:spcPts val="0"/>
-              </a:spcAft>
-              <a:buSzPts val="1600"/>
-              <a:buChar char="●"/>
-            </a:pPr>
-            <a:r>
-              <a:rPr lang="en"/>
-              <a:t>Instead of snapping a position instantly, you move it a little each frame until it arrives</a:t>
-            </a:r>
-            <a:endParaRPr/>
-          </a:p>
-          <a:p>
-            <a:pPr indent="-330200" lvl="0" marL="457200" rtl="0" algn="l">
-              <a:spcBef>
-                <a:spcPts val="0"/>
-              </a:spcBef>
-              <a:spcAft>
-                <a:spcPts val="0"/>
-              </a:spcAft>
-              <a:buSzPts val="1600"/>
-              <a:buChar char="●"/>
-            </a:pPr>
-            <a:r>
-              <a:rPr lang="en"/>
-              <a:t>Used everywhere in games</a:t>
-            </a:r>
-            <a:endParaRPr/>
-          </a:p>
-          <a:p>
-            <a:pPr indent="-317500" lvl="1" marL="914400" rtl="0" algn="l">
-              <a:spcBef>
-                <a:spcPts val="0"/>
-              </a:spcBef>
-              <a:spcAft>
-                <a:spcPts val="0"/>
-              </a:spcAft>
-              <a:buSzPts val="1400"/>
-              <a:buChar char="○"/>
-            </a:pPr>
-            <a:r>
-              <a:rPr lang="en"/>
-              <a:t>UI animations, camera movement, character transitions, screen wipes</a:t>
-            </a:r>
-            <a:endParaRPr/>
-          </a:p>
-          <a:p>
-            <a:pPr indent="-330200" lvl="0" marL="457200" rtl="0" algn="l">
-              <a:spcBef>
-                <a:spcPts val="0"/>
-              </a:spcBef>
-              <a:spcAft>
-                <a:spcPts val="0"/>
-              </a:spcAft>
-              <a:buSzPts val="1600"/>
-              <a:buChar char="●"/>
-            </a:pPr>
-            <a:r>
-              <a:rPr lang="en"/>
-              <a:t>The two things you always need to define:</a:t>
-            </a:r>
-            <a:endParaRPr/>
-          </a:p>
-          <a:p>
-            <a:pPr indent="-317500" lvl="1" marL="914400" rtl="0" algn="l">
-              <a:spcBef>
-                <a:spcPts val="0"/>
-              </a:spcBef>
-              <a:spcAft>
-                <a:spcPts val="0"/>
-              </a:spcAft>
-              <a:buSzPts val="1400"/>
-              <a:buChar char="○"/>
-            </a:pPr>
-            <a:r>
-              <a:rPr lang="en"/>
-              <a:t>What is moving</a:t>
-            </a:r>
-            <a:endParaRPr/>
-          </a:p>
-          <a:p>
-            <a:pPr indent="-317500" lvl="1" marL="914400" rtl="0" algn="l">
-              <a:spcBef>
-                <a:spcPts val="0"/>
-              </a:spcBef>
-              <a:spcAft>
-                <a:spcPts val="0"/>
-              </a:spcAft>
-              <a:buSzPts val="1400"/>
-              <a:buChar char="○"/>
-            </a:pPr>
-            <a:r>
-              <a:rPr lang="en"/>
-              <a:t>How fast / by what curve (</a:t>
-            </a:r>
-            <a:r>
-              <a:rPr lang="en" u="sng">
-                <a:solidFill>
-                  <a:schemeClr val="hlink"/>
-                </a:solidFill>
-                <a:hlinkClick r:id="rId3"/>
-              </a:rPr>
-              <a:t>Easings.net</a:t>
-            </a:r>
-            <a:r>
-              <a:rPr lang="en"/>
-              <a:t>)</a:t>
-            </a:r>
-            <a:endParaRPr/>
+        </p:txBody>
+      </p:sp>
+      <p:sp>
+        <p:nvSpPr>
+          <p:cNvPr id="211" name="TextBox 210"/>
+          <p:cNvSpPr txBox="1"/>
+          <p:nvPr/>
+        </p:nvSpPr>
+        <p:spPr>
+          <a:xfrm>
+            <a:off x="640080" y="1417320"/>
+            <a:ext cx="1463040" cy="274320"/>
+          </a:xfrm>
+          <a:prstGeom prst="rect">
+            <a:avLst/>
+          </a:prstGeom>
+          <a:noFill/>
+        </p:spPr>
+        <p:txBody>
+          <a:bodyPr wrap="square">
+            <a:spAutoFit/>
+          </a:bodyPr>
+          <a:lstStyle/>
+          <a:p>
+            <a:pPr algn="l"/>
+            <a:r>
+              <a:rPr sz="1300" b="0" i="0">
+                <a:solidFill>
+                  <a:srgbClr val="9AA3AB"/>
+                </a:solidFill>
+              </a:rPr>
+              <a:t>linear</a:t>
+            </a:r>
+          </a:p>
+        </p:txBody>
+      </p:sp>
+      <p:sp>
+        <p:nvSpPr>
+          <p:cNvPr id="212" name="TextBox 211"/>
+          <p:cNvSpPr txBox="1"/>
+          <p:nvPr/>
+        </p:nvSpPr>
+        <p:spPr>
+          <a:xfrm>
+            <a:off x="640080" y="2240280"/>
+            <a:ext cx="1463040" cy="274320"/>
+          </a:xfrm>
+          <a:prstGeom prst="rect">
+            <a:avLst/>
+          </a:prstGeom>
+          <a:noFill/>
+        </p:spPr>
+        <p:txBody>
+          <a:bodyPr wrap="square">
+            <a:spAutoFit/>
+          </a:bodyPr>
+          <a:lstStyle/>
+          <a:p>
+            <a:pPr algn="l"/>
+            <a:r>
+              <a:rPr sz="1300" b="0" i="0">
+                <a:solidFill>
+                  <a:srgbClr val="9AA3AB"/>
+                </a:solidFill>
+              </a:rPr>
+              <a:t>ease-out</a:t>
+            </a:r>
+          </a:p>
+        </p:txBody>
+      </p:sp>
+      <p:sp>
+        <p:nvSpPr>
+          <p:cNvPr id="213" name="Oval 212"/>
+          <p:cNvSpPr/>
+          <p:nvPr/>
+        </p:nvSpPr>
+        <p:spPr>
+          <a:xfrm>
+            <a:off x="1901952" y="1417320"/>
+            <a:ext cx="219456" cy="219456"/>
+          </a:xfrm>
+          <a:prstGeom prst="ellipse">
+            <a:avLst/>
+          </a:prstGeom>
+          <a:solidFill>
+            <a:srgbClr val="D45D35"/>
+          </a:solidFill>
+          <a:ln>
+            <a:noFill/>
+          </a:ln>
+          <a:effectLst/>
+        </p:spPr>
+        <p:style>
+          <a:lnRef idx="1">
+            <a:schemeClr val="accent1"/>
+          </a:lnRef>
+          <a:fillRef idx="3">
+            <a:schemeClr val="accent1"/>
+          </a:fillRef>
+          <a:effectRef idx="2">
+            <a:schemeClr val="accent1"/>
+          </a:effectRef>
+          <a:fontRef idx="minor">
+            <a:schemeClr val="lt1"/>
+          </a:fontRef>
+        </p:style>
+        <p:txBody>
+          <a:bodyPr rtlCol="0" anchor="ctr" wrap="square" lIns="73152" rIns="73152"/>
+          <a:lstStyle/>
+          <a:p>
+            <a:pPr algn="ctr"/>
+            <a:r>
+              <a:rPr sz="1400" b="0">
+                <a:solidFill>
+                  <a:srgbClr val="DEE2E6"/>
+                </a:solidFill>
+              </a:rPr>
+              <a:t/>
+            </a:r>
+          </a:p>
+        </p:txBody>
+      </p:sp>
+      <p:sp>
+        <p:nvSpPr>
+          <p:cNvPr id="214" name="Oval 213"/>
+          <p:cNvSpPr/>
+          <p:nvPr/>
+        </p:nvSpPr>
+        <p:spPr>
+          <a:xfrm>
+            <a:off x="2679192" y="1417320"/>
+            <a:ext cx="219456" cy="219456"/>
+          </a:xfrm>
+          <a:prstGeom prst="ellipse">
+            <a:avLst/>
+          </a:prstGeom>
+          <a:solidFill>
+            <a:srgbClr val="2E3338"/>
+          </a:solidFill>
+          <a:ln>
+            <a:noFill/>
+          </a:ln>
+          <a:effectLst/>
+        </p:spPr>
+        <p:style>
+          <a:lnRef idx="1">
+            <a:schemeClr val="accent1"/>
+          </a:lnRef>
+          <a:fillRef idx="3">
+            <a:schemeClr val="accent1"/>
+          </a:fillRef>
+          <a:effectRef idx="2">
+            <a:schemeClr val="accent1"/>
+          </a:effectRef>
+          <a:fontRef idx="minor">
+            <a:schemeClr val="lt1"/>
+          </a:fontRef>
+        </p:style>
+        <p:txBody>
+          <a:bodyPr rtlCol="0" anchor="ctr" wrap="square" lIns="73152" rIns="73152"/>
+          <a:lstStyle/>
+          <a:p>
+            <a:pPr algn="ctr"/>
+            <a:r>
+              <a:rPr sz="1400" b="0">
+                <a:solidFill>
+                  <a:srgbClr val="DEE2E6"/>
+                </a:solidFill>
+              </a:rPr>
+              <a:t/>
+            </a:r>
+          </a:p>
+        </p:txBody>
+      </p:sp>
+      <p:sp>
+        <p:nvSpPr>
+          <p:cNvPr id="215" name="Oval 214"/>
+          <p:cNvSpPr/>
+          <p:nvPr/>
+        </p:nvSpPr>
+        <p:spPr>
+          <a:xfrm>
+            <a:off x="3456432" y="1417320"/>
+            <a:ext cx="219456" cy="219456"/>
+          </a:xfrm>
+          <a:prstGeom prst="ellipse">
+            <a:avLst/>
+          </a:prstGeom>
+          <a:solidFill>
+            <a:srgbClr val="2E3338"/>
+          </a:solidFill>
+          <a:ln>
+            <a:noFill/>
+          </a:ln>
+          <a:effectLst/>
+        </p:spPr>
+        <p:style>
+          <a:lnRef idx="1">
+            <a:schemeClr val="accent1"/>
+          </a:lnRef>
+          <a:fillRef idx="3">
+            <a:schemeClr val="accent1"/>
+          </a:fillRef>
+          <a:effectRef idx="2">
+            <a:schemeClr val="accent1"/>
+          </a:effectRef>
+          <a:fontRef idx="minor">
+            <a:schemeClr val="lt1"/>
+          </a:fontRef>
+        </p:style>
+        <p:txBody>
+          <a:bodyPr rtlCol="0" anchor="ctr" wrap="square" lIns="73152" rIns="73152"/>
+          <a:lstStyle/>
+          <a:p>
+            <a:pPr algn="ctr"/>
+            <a:r>
+              <a:rPr sz="1400" b="0">
+                <a:solidFill>
+                  <a:srgbClr val="DEE2E6"/>
+                </a:solidFill>
+              </a:rPr>
+              <a:t/>
+            </a:r>
+          </a:p>
+        </p:txBody>
+      </p:sp>
+      <p:sp>
+        <p:nvSpPr>
+          <p:cNvPr id="216" name="Oval 215"/>
+          <p:cNvSpPr/>
+          <p:nvPr/>
+        </p:nvSpPr>
+        <p:spPr>
+          <a:xfrm>
+            <a:off x="4233672" y="1417320"/>
+            <a:ext cx="219456" cy="219456"/>
+          </a:xfrm>
+          <a:prstGeom prst="ellipse">
+            <a:avLst/>
+          </a:prstGeom>
+          <a:solidFill>
+            <a:srgbClr val="2E3338"/>
+          </a:solidFill>
+          <a:ln>
+            <a:noFill/>
+          </a:ln>
+          <a:effectLst/>
+        </p:spPr>
+        <p:style>
+          <a:lnRef idx="1">
+            <a:schemeClr val="accent1"/>
+          </a:lnRef>
+          <a:fillRef idx="3">
+            <a:schemeClr val="accent1"/>
+          </a:fillRef>
+          <a:effectRef idx="2">
+            <a:schemeClr val="accent1"/>
+          </a:effectRef>
+          <a:fontRef idx="minor">
+            <a:schemeClr val="lt1"/>
+          </a:fontRef>
+        </p:style>
+        <p:txBody>
+          <a:bodyPr rtlCol="0" anchor="ctr" wrap="square" lIns="73152" rIns="73152"/>
+          <a:lstStyle/>
+          <a:p>
+            <a:pPr algn="ctr"/>
+            <a:r>
+              <a:rPr sz="1400" b="0">
+                <a:solidFill>
+                  <a:srgbClr val="DEE2E6"/>
+                </a:solidFill>
+              </a:rPr>
+              <a:t/>
+            </a:r>
+          </a:p>
+        </p:txBody>
+      </p:sp>
+      <p:sp>
+        <p:nvSpPr>
+          <p:cNvPr id="217" name="Oval 216"/>
+          <p:cNvSpPr/>
+          <p:nvPr/>
+        </p:nvSpPr>
+        <p:spPr>
+          <a:xfrm>
+            <a:off x="5010912" y="1417320"/>
+            <a:ext cx="219456" cy="219456"/>
+          </a:xfrm>
+          <a:prstGeom prst="ellipse">
+            <a:avLst/>
+          </a:prstGeom>
+          <a:solidFill>
+            <a:srgbClr val="2E3338"/>
+          </a:solidFill>
+          <a:ln>
+            <a:noFill/>
+          </a:ln>
+          <a:effectLst/>
+        </p:spPr>
+        <p:style>
+          <a:lnRef idx="1">
+            <a:schemeClr val="accent1"/>
+          </a:lnRef>
+          <a:fillRef idx="3">
+            <a:schemeClr val="accent1"/>
+          </a:fillRef>
+          <a:effectRef idx="2">
+            <a:schemeClr val="accent1"/>
+          </a:effectRef>
+          <a:fontRef idx="minor">
+            <a:schemeClr val="lt1"/>
+          </a:fontRef>
+        </p:style>
+        <p:txBody>
+          <a:bodyPr rtlCol="0" anchor="ctr" wrap="square" lIns="73152" rIns="73152"/>
+          <a:lstStyle/>
+          <a:p>
+            <a:pPr algn="ctr"/>
+            <a:r>
+              <a:rPr sz="1400" b="0">
+                <a:solidFill>
+                  <a:srgbClr val="DEE2E6"/>
+                </a:solidFill>
+              </a:rPr>
+              <a:t/>
+            </a:r>
+          </a:p>
+        </p:txBody>
+      </p:sp>
+      <p:sp>
+        <p:nvSpPr>
+          <p:cNvPr id="218" name="Oval 217"/>
+          <p:cNvSpPr/>
+          <p:nvPr/>
+        </p:nvSpPr>
+        <p:spPr>
+          <a:xfrm>
+            <a:off x="5788152" y="1417320"/>
+            <a:ext cx="219456" cy="219456"/>
+          </a:xfrm>
+          <a:prstGeom prst="ellipse">
+            <a:avLst/>
+          </a:prstGeom>
+          <a:solidFill>
+            <a:srgbClr val="2E3338"/>
+          </a:solidFill>
+          <a:ln>
+            <a:noFill/>
+          </a:ln>
+          <a:effectLst/>
+        </p:spPr>
+        <p:style>
+          <a:lnRef idx="1">
+            <a:schemeClr val="accent1"/>
+          </a:lnRef>
+          <a:fillRef idx="3">
+            <a:schemeClr val="accent1"/>
+          </a:fillRef>
+          <a:effectRef idx="2">
+            <a:schemeClr val="accent1"/>
+          </a:effectRef>
+          <a:fontRef idx="minor">
+            <a:schemeClr val="lt1"/>
+          </a:fontRef>
+        </p:style>
+        <p:txBody>
+          <a:bodyPr rtlCol="0" anchor="ctr" wrap="square" lIns="73152" rIns="73152"/>
+          <a:lstStyle/>
+          <a:p>
+            <a:pPr algn="ctr"/>
+            <a:r>
+              <a:rPr sz="1400" b="0">
+                <a:solidFill>
+                  <a:srgbClr val="DEE2E6"/>
+                </a:solidFill>
+              </a:rPr>
+              <a:t/>
+            </a:r>
+          </a:p>
+        </p:txBody>
+      </p:sp>
+      <p:sp>
+        <p:nvSpPr>
+          <p:cNvPr id="219" name="Oval 218"/>
+          <p:cNvSpPr/>
+          <p:nvPr/>
+        </p:nvSpPr>
+        <p:spPr>
+          <a:xfrm>
+            <a:off x="6565392" y="1417320"/>
+            <a:ext cx="219456" cy="219456"/>
+          </a:xfrm>
+          <a:prstGeom prst="ellipse">
+            <a:avLst/>
+          </a:prstGeom>
+          <a:solidFill>
+            <a:srgbClr val="2E3338"/>
+          </a:solidFill>
+          <a:ln>
+            <a:noFill/>
+          </a:ln>
+          <a:effectLst/>
+        </p:spPr>
+        <p:style>
+          <a:lnRef idx="1">
+            <a:schemeClr val="accent1"/>
+          </a:lnRef>
+          <a:fillRef idx="3">
+            <a:schemeClr val="accent1"/>
+          </a:fillRef>
+          <a:effectRef idx="2">
+            <a:schemeClr val="accent1"/>
+          </a:effectRef>
+          <a:fontRef idx="minor">
+            <a:schemeClr val="lt1"/>
+          </a:fontRef>
+        </p:style>
+        <p:txBody>
+          <a:bodyPr rtlCol="0" anchor="ctr" wrap="square" lIns="73152" rIns="73152"/>
+          <a:lstStyle/>
+          <a:p>
+            <a:pPr algn="ctr"/>
+            <a:r>
+              <a:rPr sz="1400" b="0">
+                <a:solidFill>
+                  <a:srgbClr val="DEE2E6"/>
+                </a:solidFill>
+              </a:rPr>
+              <a:t/>
+            </a:r>
+          </a:p>
+        </p:txBody>
+      </p:sp>
+      <p:sp>
+        <p:nvSpPr>
+          <p:cNvPr id="220" name="Oval 219"/>
+          <p:cNvSpPr/>
+          <p:nvPr/>
+        </p:nvSpPr>
+        <p:spPr>
+          <a:xfrm>
+            <a:off x="7342632" y="1417320"/>
+            <a:ext cx="219456" cy="219456"/>
+          </a:xfrm>
+          <a:prstGeom prst="ellipse">
+            <a:avLst/>
+          </a:prstGeom>
+          <a:solidFill>
+            <a:srgbClr val="2E3338"/>
+          </a:solidFill>
+          <a:ln>
+            <a:noFill/>
+          </a:ln>
+          <a:effectLst/>
+        </p:spPr>
+        <p:style>
+          <a:lnRef idx="1">
+            <a:schemeClr val="accent1"/>
+          </a:lnRef>
+          <a:fillRef idx="3">
+            <a:schemeClr val="accent1"/>
+          </a:fillRef>
+          <a:effectRef idx="2">
+            <a:schemeClr val="accent1"/>
+          </a:effectRef>
+          <a:fontRef idx="minor">
+            <a:schemeClr val="lt1"/>
+          </a:fontRef>
+        </p:style>
+        <p:txBody>
+          <a:bodyPr rtlCol="0" anchor="ctr" wrap="square" lIns="73152" rIns="73152"/>
+          <a:lstStyle/>
+          <a:p>
+            <a:pPr algn="ctr"/>
+            <a:r>
+              <a:rPr sz="1400" b="0">
+                <a:solidFill>
+                  <a:srgbClr val="DEE2E6"/>
+                </a:solidFill>
+              </a:rPr>
+              <a:t/>
+            </a:r>
+          </a:p>
+        </p:txBody>
+      </p:sp>
+      <p:sp>
+        <p:nvSpPr>
+          <p:cNvPr id="221" name="Oval 220"/>
+          <p:cNvSpPr/>
+          <p:nvPr/>
+        </p:nvSpPr>
+        <p:spPr>
+          <a:xfrm>
+            <a:off x="8119872" y="1417320"/>
+            <a:ext cx="219456" cy="219456"/>
+          </a:xfrm>
+          <a:prstGeom prst="ellipse">
+            <a:avLst/>
+          </a:prstGeom>
+          <a:solidFill>
+            <a:srgbClr val="D45D35"/>
+          </a:solidFill>
+          <a:ln>
+            <a:noFill/>
+          </a:ln>
+          <a:effectLst/>
+        </p:spPr>
+        <p:style>
+          <a:lnRef idx="1">
+            <a:schemeClr val="accent1"/>
+          </a:lnRef>
+          <a:fillRef idx="3">
+            <a:schemeClr val="accent1"/>
+          </a:fillRef>
+          <a:effectRef idx="2">
+            <a:schemeClr val="accent1"/>
+          </a:effectRef>
+          <a:fontRef idx="minor">
+            <a:schemeClr val="lt1"/>
+          </a:fontRef>
+        </p:style>
+        <p:txBody>
+          <a:bodyPr rtlCol="0" anchor="ctr" wrap="square" lIns="73152" rIns="73152"/>
+          <a:lstStyle/>
+          <a:p>
+            <a:pPr algn="ctr"/>
+            <a:r>
+              <a:rPr sz="1400" b="0">
+                <a:solidFill>
+                  <a:srgbClr val="DEE2E6"/>
+                </a:solidFill>
+              </a:rPr>
+              <a:t/>
+            </a:r>
+          </a:p>
+        </p:txBody>
+      </p:sp>
+      <p:sp>
+        <p:nvSpPr>
+          <p:cNvPr id="222" name="Oval 221"/>
+          <p:cNvSpPr/>
+          <p:nvPr/>
+        </p:nvSpPr>
+        <p:spPr>
+          <a:xfrm>
+            <a:off x="1901952" y="2240280"/>
+            <a:ext cx="219456" cy="219456"/>
+          </a:xfrm>
+          <a:prstGeom prst="ellipse">
+            <a:avLst/>
+          </a:prstGeom>
+          <a:solidFill>
+            <a:srgbClr val="D45D35"/>
+          </a:solidFill>
+          <a:ln>
+            <a:noFill/>
+          </a:ln>
+          <a:effectLst/>
+        </p:spPr>
+        <p:style>
+          <a:lnRef idx="1">
+            <a:schemeClr val="accent1"/>
+          </a:lnRef>
+          <a:fillRef idx="3">
+            <a:schemeClr val="accent1"/>
+          </a:fillRef>
+          <a:effectRef idx="2">
+            <a:schemeClr val="accent1"/>
+          </a:effectRef>
+          <a:fontRef idx="minor">
+            <a:schemeClr val="lt1"/>
+          </a:fontRef>
+        </p:style>
+        <p:txBody>
+          <a:bodyPr rtlCol="0" anchor="ctr" wrap="square" lIns="73152" rIns="73152"/>
+          <a:lstStyle/>
+          <a:p>
+            <a:pPr algn="ctr"/>
+            <a:r>
+              <a:rPr sz="1400" b="0">
+                <a:solidFill>
+                  <a:srgbClr val="DEE2E6"/>
+                </a:solidFill>
+              </a:rPr>
+              <a:t/>
+            </a:r>
+          </a:p>
+        </p:txBody>
+      </p:sp>
+      <p:sp>
+        <p:nvSpPr>
+          <p:cNvPr id="223" name="Oval 222"/>
+          <p:cNvSpPr/>
+          <p:nvPr/>
+        </p:nvSpPr>
+        <p:spPr>
+          <a:xfrm>
+            <a:off x="3359277" y="2240280"/>
+            <a:ext cx="219456" cy="219456"/>
+          </a:xfrm>
+          <a:prstGeom prst="ellipse">
+            <a:avLst/>
+          </a:prstGeom>
+          <a:solidFill>
+            <a:srgbClr val="2E3338"/>
+          </a:solidFill>
+          <a:ln>
+            <a:noFill/>
+          </a:ln>
+          <a:effectLst/>
+        </p:spPr>
+        <p:style>
+          <a:lnRef idx="1">
+            <a:schemeClr val="accent1"/>
+          </a:lnRef>
+          <a:fillRef idx="3">
+            <a:schemeClr val="accent1"/>
+          </a:fillRef>
+          <a:effectRef idx="2">
+            <a:schemeClr val="accent1"/>
+          </a:effectRef>
+          <a:fontRef idx="minor">
+            <a:schemeClr val="lt1"/>
+          </a:fontRef>
+        </p:style>
+        <p:txBody>
+          <a:bodyPr rtlCol="0" anchor="ctr" wrap="square" lIns="73152" rIns="73152"/>
+          <a:lstStyle/>
+          <a:p>
+            <a:pPr algn="ctr"/>
+            <a:r>
+              <a:rPr sz="1400" b="0">
+                <a:solidFill>
+                  <a:srgbClr val="DEE2E6"/>
+                </a:solidFill>
+              </a:rPr>
+              <a:t/>
+            </a:r>
+          </a:p>
+        </p:txBody>
+      </p:sp>
+      <p:sp>
+        <p:nvSpPr>
+          <p:cNvPr id="224" name="Oval 223"/>
+          <p:cNvSpPr/>
+          <p:nvPr/>
+        </p:nvSpPr>
+        <p:spPr>
+          <a:xfrm>
+            <a:off x="4622292" y="2240280"/>
+            <a:ext cx="219456" cy="219456"/>
+          </a:xfrm>
+          <a:prstGeom prst="ellipse">
+            <a:avLst/>
+          </a:prstGeom>
+          <a:solidFill>
+            <a:srgbClr val="2E3338"/>
+          </a:solidFill>
+          <a:ln>
+            <a:noFill/>
+          </a:ln>
+          <a:effectLst/>
+        </p:spPr>
+        <p:style>
+          <a:lnRef idx="1">
+            <a:schemeClr val="accent1"/>
+          </a:lnRef>
+          <a:fillRef idx="3">
+            <a:schemeClr val="accent1"/>
+          </a:fillRef>
+          <a:effectRef idx="2">
+            <a:schemeClr val="accent1"/>
+          </a:effectRef>
+          <a:fontRef idx="minor">
+            <a:schemeClr val="lt1"/>
+          </a:fontRef>
+        </p:style>
+        <p:txBody>
+          <a:bodyPr rtlCol="0" anchor="ctr" wrap="square" lIns="73152" rIns="73152"/>
+          <a:lstStyle/>
+          <a:p>
+            <a:pPr algn="ctr"/>
+            <a:r>
+              <a:rPr sz="1400" b="0">
+                <a:solidFill>
+                  <a:srgbClr val="DEE2E6"/>
+                </a:solidFill>
+              </a:rPr>
+              <a:t/>
+            </a:r>
+          </a:p>
+        </p:txBody>
+      </p:sp>
+      <p:sp>
+        <p:nvSpPr>
+          <p:cNvPr id="225" name="Oval 224"/>
+          <p:cNvSpPr/>
+          <p:nvPr/>
+        </p:nvSpPr>
+        <p:spPr>
+          <a:xfrm>
+            <a:off x="5690997" y="2240280"/>
+            <a:ext cx="219456" cy="219456"/>
+          </a:xfrm>
+          <a:prstGeom prst="ellipse">
+            <a:avLst/>
+          </a:prstGeom>
+          <a:solidFill>
+            <a:srgbClr val="2E3338"/>
+          </a:solidFill>
+          <a:ln>
+            <a:noFill/>
+          </a:ln>
+          <a:effectLst/>
+        </p:spPr>
+        <p:style>
+          <a:lnRef idx="1">
+            <a:schemeClr val="accent1"/>
+          </a:lnRef>
+          <a:fillRef idx="3">
+            <a:schemeClr val="accent1"/>
+          </a:fillRef>
+          <a:effectRef idx="2">
+            <a:schemeClr val="accent1"/>
+          </a:effectRef>
+          <a:fontRef idx="minor">
+            <a:schemeClr val="lt1"/>
+          </a:fontRef>
+        </p:style>
+        <p:txBody>
+          <a:bodyPr rtlCol="0" anchor="ctr" wrap="square" lIns="73152" rIns="73152"/>
+          <a:lstStyle/>
+          <a:p>
+            <a:pPr algn="ctr"/>
+            <a:r>
+              <a:rPr sz="1400" b="0">
+                <a:solidFill>
+                  <a:srgbClr val="DEE2E6"/>
+                </a:solidFill>
+              </a:rPr>
+              <a:t/>
+            </a:r>
+          </a:p>
+        </p:txBody>
+      </p:sp>
+      <p:sp>
+        <p:nvSpPr>
+          <p:cNvPr id="226" name="Oval 225"/>
+          <p:cNvSpPr/>
+          <p:nvPr/>
+        </p:nvSpPr>
+        <p:spPr>
+          <a:xfrm>
+            <a:off x="6565392" y="2240280"/>
+            <a:ext cx="219456" cy="219456"/>
+          </a:xfrm>
+          <a:prstGeom prst="ellipse">
+            <a:avLst/>
+          </a:prstGeom>
+          <a:solidFill>
+            <a:srgbClr val="2E3338"/>
+          </a:solidFill>
+          <a:ln>
+            <a:noFill/>
+          </a:ln>
+          <a:effectLst/>
+        </p:spPr>
+        <p:style>
+          <a:lnRef idx="1">
+            <a:schemeClr val="accent1"/>
+          </a:lnRef>
+          <a:fillRef idx="3">
+            <a:schemeClr val="accent1"/>
+          </a:fillRef>
+          <a:effectRef idx="2">
+            <a:schemeClr val="accent1"/>
+          </a:effectRef>
+          <a:fontRef idx="minor">
+            <a:schemeClr val="lt1"/>
+          </a:fontRef>
+        </p:style>
+        <p:txBody>
+          <a:bodyPr rtlCol="0" anchor="ctr" wrap="square" lIns="73152" rIns="73152"/>
+          <a:lstStyle/>
+          <a:p>
+            <a:pPr algn="ctr"/>
+            <a:r>
+              <a:rPr sz="1400" b="0">
+                <a:solidFill>
+                  <a:srgbClr val="DEE2E6"/>
+                </a:solidFill>
+              </a:rPr>
+              <a:t/>
+            </a:r>
+          </a:p>
+        </p:txBody>
+      </p:sp>
+      <p:sp>
+        <p:nvSpPr>
+          <p:cNvPr id="227" name="Oval 226"/>
+          <p:cNvSpPr/>
+          <p:nvPr/>
+        </p:nvSpPr>
+        <p:spPr>
+          <a:xfrm>
+            <a:off x="7245476" y="2240280"/>
+            <a:ext cx="219456" cy="219456"/>
+          </a:xfrm>
+          <a:prstGeom prst="ellipse">
+            <a:avLst/>
+          </a:prstGeom>
+          <a:solidFill>
+            <a:srgbClr val="2E3338"/>
+          </a:solidFill>
+          <a:ln>
+            <a:noFill/>
+          </a:ln>
+          <a:effectLst/>
+        </p:spPr>
+        <p:style>
+          <a:lnRef idx="1">
+            <a:schemeClr val="accent1"/>
+          </a:lnRef>
+          <a:fillRef idx="3">
+            <a:schemeClr val="accent1"/>
+          </a:fillRef>
+          <a:effectRef idx="2">
+            <a:schemeClr val="accent1"/>
+          </a:effectRef>
+          <a:fontRef idx="minor">
+            <a:schemeClr val="lt1"/>
+          </a:fontRef>
+        </p:style>
+        <p:txBody>
+          <a:bodyPr rtlCol="0" anchor="ctr" wrap="square" lIns="73152" rIns="73152"/>
+          <a:lstStyle/>
+          <a:p>
+            <a:pPr algn="ctr"/>
+            <a:r>
+              <a:rPr sz="1400" b="0">
+                <a:solidFill>
+                  <a:srgbClr val="DEE2E6"/>
+                </a:solidFill>
+              </a:rPr>
+              <a:t/>
+            </a:r>
+          </a:p>
+        </p:txBody>
+      </p:sp>
+      <p:sp>
+        <p:nvSpPr>
+          <p:cNvPr id="228" name="Oval 227"/>
+          <p:cNvSpPr/>
+          <p:nvPr/>
+        </p:nvSpPr>
+        <p:spPr>
+          <a:xfrm>
+            <a:off x="7731252" y="2240280"/>
+            <a:ext cx="219456" cy="219456"/>
+          </a:xfrm>
+          <a:prstGeom prst="ellipse">
+            <a:avLst/>
+          </a:prstGeom>
+          <a:solidFill>
+            <a:srgbClr val="2E3338"/>
+          </a:solidFill>
+          <a:ln>
+            <a:noFill/>
+          </a:ln>
+          <a:effectLst/>
+        </p:spPr>
+        <p:style>
+          <a:lnRef idx="1">
+            <a:schemeClr val="accent1"/>
+          </a:lnRef>
+          <a:fillRef idx="3">
+            <a:schemeClr val="accent1"/>
+          </a:fillRef>
+          <a:effectRef idx="2">
+            <a:schemeClr val="accent1"/>
+          </a:effectRef>
+          <a:fontRef idx="minor">
+            <a:schemeClr val="lt1"/>
+          </a:fontRef>
+        </p:style>
+        <p:txBody>
+          <a:bodyPr rtlCol="0" anchor="ctr" wrap="square" lIns="73152" rIns="73152"/>
+          <a:lstStyle/>
+          <a:p>
+            <a:pPr algn="ctr"/>
+            <a:r>
+              <a:rPr sz="1400" b="0">
+                <a:solidFill>
+                  <a:srgbClr val="DEE2E6"/>
+                </a:solidFill>
+              </a:rPr>
+              <a:t/>
+            </a:r>
+          </a:p>
+        </p:txBody>
+      </p:sp>
+      <p:sp>
+        <p:nvSpPr>
+          <p:cNvPr id="229" name="Oval 228"/>
+          <p:cNvSpPr/>
+          <p:nvPr/>
+        </p:nvSpPr>
+        <p:spPr>
+          <a:xfrm>
+            <a:off x="8022717" y="2240280"/>
+            <a:ext cx="219456" cy="219456"/>
+          </a:xfrm>
+          <a:prstGeom prst="ellipse">
+            <a:avLst/>
+          </a:prstGeom>
+          <a:solidFill>
+            <a:srgbClr val="2E3338"/>
+          </a:solidFill>
+          <a:ln>
+            <a:noFill/>
+          </a:ln>
+          <a:effectLst/>
+        </p:spPr>
+        <p:style>
+          <a:lnRef idx="1">
+            <a:schemeClr val="accent1"/>
+          </a:lnRef>
+          <a:fillRef idx="3">
+            <a:schemeClr val="accent1"/>
+          </a:fillRef>
+          <a:effectRef idx="2">
+            <a:schemeClr val="accent1"/>
+          </a:effectRef>
+          <a:fontRef idx="minor">
+            <a:schemeClr val="lt1"/>
+          </a:fontRef>
+        </p:style>
+        <p:txBody>
+          <a:bodyPr rtlCol="0" anchor="ctr" wrap="square" lIns="73152" rIns="73152"/>
+          <a:lstStyle/>
+          <a:p>
+            <a:pPr algn="ctr"/>
+            <a:r>
+              <a:rPr sz="1400" b="0">
+                <a:solidFill>
+                  <a:srgbClr val="DEE2E6"/>
+                </a:solidFill>
+              </a:rPr>
+              <a:t/>
+            </a:r>
+          </a:p>
+        </p:txBody>
+      </p:sp>
+      <p:sp>
+        <p:nvSpPr>
+          <p:cNvPr id="230" name="Oval 229"/>
+          <p:cNvSpPr/>
+          <p:nvPr/>
+        </p:nvSpPr>
+        <p:spPr>
+          <a:xfrm>
+            <a:off x="8119872" y="2240280"/>
+            <a:ext cx="219456" cy="219456"/>
+          </a:xfrm>
+          <a:prstGeom prst="ellipse">
+            <a:avLst/>
+          </a:prstGeom>
+          <a:solidFill>
+            <a:srgbClr val="D45D35"/>
+          </a:solidFill>
+          <a:ln>
+            <a:noFill/>
+          </a:ln>
+          <a:effectLst/>
+        </p:spPr>
+        <p:style>
+          <a:lnRef idx="1">
+            <a:schemeClr val="accent1"/>
+          </a:lnRef>
+          <a:fillRef idx="3">
+            <a:schemeClr val="accent1"/>
+          </a:fillRef>
+          <a:effectRef idx="2">
+            <a:schemeClr val="accent1"/>
+          </a:effectRef>
+          <a:fontRef idx="minor">
+            <a:schemeClr val="lt1"/>
+          </a:fontRef>
+        </p:style>
+        <p:txBody>
+          <a:bodyPr rtlCol="0" anchor="ctr" wrap="square" lIns="73152" rIns="73152"/>
+          <a:lstStyle/>
+          <a:p>
+            <a:pPr algn="ctr"/>
+            <a:r>
+              <a:rPr sz="1400" b="0">
+                <a:solidFill>
+                  <a:srgbClr val="DEE2E6"/>
+                </a:solidFill>
+              </a:rPr>
+              <a:t/>
+            </a:r>
+          </a:p>
+        </p:txBody>
+      </p:sp>
+      <p:sp>
+        <p:nvSpPr>
+          <p:cNvPr id="231" name="TextBox 230"/>
+          <p:cNvSpPr txBox="1"/>
+          <p:nvPr/>
+        </p:nvSpPr>
+        <p:spPr>
+          <a:xfrm>
+            <a:off x="640080" y="3017520"/>
+            <a:ext cx="7863840" cy="731520"/>
+          </a:xfrm>
+          <a:prstGeom prst="rect">
+            <a:avLst/>
+          </a:prstGeom>
+          <a:noFill/>
+        </p:spPr>
+        <p:txBody>
+          <a:bodyPr wrap="square">
+            <a:spAutoFit/>
+          </a:bodyPr>
+          <a:lstStyle/>
+          <a:p>
+            <a:pPr algn="ctr"/>
+            <a:r>
+              <a:rPr sz="1400" b="0" i="0">
+                <a:solidFill>
+                  <a:srgbClr val="9AA3AB"/>
+                </a:solidFill>
+              </a:rPr>
+              <a:t>The same nine frames. Where the dots bunch up, the value moves slowly.</a:t>
+            </a:r>
+          </a:p>
+          <a:p>
+            <a:pPr algn="ctr"/>
+            <a:r>
+              <a:rPr sz="1400" b="0" i="0">
+                <a:solidFill>
+                  <a:srgbClr val="9AA3AB"/>
+                </a:solidFill>
+              </a:rPr>
+              <a:t>More curves: easings.net</a:t>
+            </a:r>
           </a:p>
         </p:txBody>
       </p:sp>
@@ -17627,7 +18994,7 @@
         <p:spPr>
           <a:xfrm>
             <a:off x="311700" y="885950"/>
-            <a:ext cx="8520600" cy="4023300"/>
+            <a:ext cx="8520600" cy="521208"/>
           </a:xfrm>
           <a:prstGeom prst="rect">
             <a:avLst/>
@@ -17651,162 +19018,299 @@
             </a:pPr>
             <a:r>
               <a:rPr lang="en"/>
-              <a:t>The simplest tween curve - constant speed from A to B</a:t>
+              <a:t>Linear interpolation: the simplest curve.</a:t>
             </a:r>
             <a:endParaRPr/>
           </a:p>
-          <a:p>
-            <a:pPr indent="-330200" lvl="0" marL="457200" rtl="0" algn="l">
-              <a:spcBef>
-                <a:spcPts val="0"/>
-              </a:spcBef>
-              <a:spcAft>
-                <a:spcPts val="0"/>
-              </a:spcAft>
-              <a:buSzPts val="1600"/>
-              <a:buChar char="●"/>
-            </a:pPr>
-            <a:r>
-              <a:rPr lang="en"/>
-              <a:t>lerp(a, b, t) = a + (b - a) * t where t goes from 0 to 1</a:t>
-            </a:r>
-            <a:endParaRPr/>
-          </a:p>
-          <a:p>
-            <a:pPr indent="-317500" lvl="1" marL="914400" rtl="0" algn="l">
-              <a:spcBef>
-                <a:spcPts val="0"/>
-              </a:spcBef>
-              <a:spcAft>
-                <a:spcPts val="0"/>
-              </a:spcAft>
-              <a:buSzPts val="1400"/>
-              <a:buChar char="○"/>
-            </a:pPr>
-            <a:r>
-              <a:rPr lang="en"/>
-              <a:t>t = 0 → result is a</a:t>
-            </a:r>
-            <a:endParaRPr/>
-          </a:p>
-          <a:p>
-            <a:pPr indent="-317500" lvl="1" marL="914400" rtl="0" algn="l">
-              <a:spcBef>
-                <a:spcPts val="0"/>
-              </a:spcBef>
-              <a:spcAft>
-                <a:spcPts val="0"/>
-              </a:spcAft>
-              <a:buSzPts val="1400"/>
-              <a:buChar char="○"/>
-            </a:pPr>
-            <a:r>
-              <a:rPr lang="en"/>
-              <a:t>t = 0.5 → result is exactly halfway</a:t>
-            </a:r>
-            <a:endParaRPr/>
-          </a:p>
-          <a:p>
-            <a:pPr indent="-317500" lvl="1" marL="914400" rtl="0" algn="l">
-              <a:spcBef>
-                <a:spcPts val="0"/>
-              </a:spcBef>
-              <a:spcAft>
-                <a:spcPts val="0"/>
-              </a:spcAft>
-              <a:buSzPts val="1400"/>
-              <a:buChar char="○"/>
-            </a:pPr>
-            <a:r>
-              <a:rPr lang="en"/>
-              <a:t>t = 1 → result is b</a:t>
-            </a:r>
-            <a:endParaRPr/>
-          </a:p>
-          <a:p>
-            <a:pPr indent="-330200" lvl="0" marL="457200" rtl="0" algn="l">
-              <a:spcBef>
-                <a:spcPts val="0"/>
-              </a:spcBef>
-              <a:spcAft>
-                <a:spcPts val="0"/>
-              </a:spcAft>
-              <a:buSzPts val="1600"/>
-              <a:buChar char="●"/>
-            </a:pPr>
-            <a:r>
-              <a:rPr lang="en"/>
-              <a:t>"Linear" means equal steps</a:t>
-            </a:r>
-            <a:endParaRPr/>
-          </a:p>
-          <a:p>
-            <a:pPr indent="-317500" lvl="1" marL="914400" rtl="0" algn="l">
-              <a:spcBef>
-                <a:spcPts val="0"/>
-              </a:spcBef>
-              <a:spcAft>
-                <a:spcPts val="0"/>
-              </a:spcAft>
-              <a:buSzPts val="1400"/>
-              <a:buChar char="○"/>
-            </a:pPr>
-            <a:r>
-              <a:rPr lang="en"/>
-              <a:t>The value moves the same amount every frame</a:t>
-            </a:r>
-            <a:endParaRPr/>
-          </a:p>
-          <a:p>
-            <a:pPr indent="-330200" lvl="0" marL="457200" rtl="0" algn="l">
-              <a:spcBef>
-                <a:spcPts val="0"/>
-              </a:spcBef>
-              <a:spcAft>
-                <a:spcPts val="0"/>
-              </a:spcAft>
-              <a:buSzPts val="1600"/>
-              <a:buChar char="●"/>
-            </a:pPr>
-            <a:r>
-              <a:rPr lang="en"/>
-              <a:t>Works on anything numeric</a:t>
-            </a:r>
-            <a:endParaRPr/>
-          </a:p>
-          <a:p>
-            <a:pPr indent="-317500" lvl="1" marL="914400" rtl="0" algn="l">
-              <a:spcBef>
-                <a:spcPts val="0"/>
-              </a:spcBef>
-              <a:spcAft>
-                <a:spcPts val="0"/>
-              </a:spcAft>
-              <a:buSzPts val="1400"/>
-              <a:buChar char="○"/>
-            </a:pPr>
-            <a:r>
-              <a:rPr lang="en"/>
-              <a:t>floats, positions, colours, even angles</a:t>
-            </a:r>
-            <a:endParaRPr/>
-          </a:p>
-          <a:p>
-            <a:pPr indent="-330200" lvl="0" marL="457200" rtl="0" algn="l">
-              <a:spcBef>
-                <a:spcPts val="0"/>
-              </a:spcBef>
-              <a:spcAft>
-                <a:spcPts val="0"/>
-              </a:spcAft>
-              <a:buSzPts val="1600"/>
-              <a:buChar char="●"/>
-            </a:pPr>
-            <a:r>
-              <a:rPr lang="en"/>
-              <a:t>Non-linear curves (ease-in, ease-out) feel more natural but lerp is a good starting point</a:t>
-            </a:r>
-            <a:endParaRPr/>
+        </p:txBody>
+      </p:sp>
+      <p:sp>
+        <p:nvSpPr>
+          <p:cNvPr id="217" name="Rectangle 216"/>
+          <p:cNvSpPr/>
+          <p:nvPr/>
+        </p:nvSpPr>
+        <p:spPr>
+          <a:xfrm>
+            <a:off x="1371600" y="1417320"/>
+            <a:ext cx="6400800" cy="640080"/>
+          </a:xfrm>
+          <a:prstGeom prst="rect">
+            <a:avLst/>
+          </a:prstGeom>
+          <a:solidFill>
+            <a:srgbClr val="17191C"/>
+          </a:solidFill>
+          <a:ln>
+            <a:noFill/>
+          </a:ln>
+          <a:effectLst/>
+        </p:spPr>
+        <p:style>
+          <a:lnRef idx="1">
+            <a:schemeClr val="accent1"/>
+          </a:lnRef>
+          <a:fillRef idx="3">
+            <a:schemeClr val="accent1"/>
+          </a:fillRef>
+          <a:effectRef idx="2">
+            <a:schemeClr val="accent1"/>
+          </a:effectRef>
+          <a:fontRef idx="minor">
+            <a:schemeClr val="lt1"/>
+          </a:fontRef>
+        </p:style>
+        <p:txBody>
+          <a:bodyPr rtlCol="0" anchor="ctr" wrap="square" lIns="164592" rIns="73152"/>
+          <a:lstStyle/>
+          <a:p>
+            <a:pPr algn="l"/>
+            <a:r>
+              <a:rPr sz="1400" b="0">
+                <a:solidFill>
+                  <a:srgbClr val="DEE2E6"/>
+                </a:solidFill>
+              </a:rPr>
+              <a:t/>
+            </a:r>
+            <a:r>
+              <a:rPr sz="1500">
+                <a:solidFill>
+                  <a:srgbClr val="DEE2E6"/>
+                </a:solidFill>
+                <a:latin typeface="Consolas"/>
+              </a:rPr>
+              <a:t>lerp(a, b, t) = a + (b - a) * t        // t from 0 to 1</a:t>
+            </a:r>
+          </a:p>
+        </p:txBody>
+      </p:sp>
+      <p:sp>
+        <p:nvSpPr>
+          <p:cNvPr id="218" name="Rounded Rectangle 217"/>
+          <p:cNvSpPr/>
+          <p:nvPr/>
+        </p:nvSpPr>
+        <p:spPr>
+          <a:xfrm>
+            <a:off x="1371600" y="2377440"/>
+            <a:ext cx="1920240" cy="685800"/>
+          </a:xfrm>
+          <a:prstGeom prst="roundRect">
+            <a:avLst>
+              <a:gd name="adj" fmla="val 12000"/>
+            </a:avLst>
+          </a:prstGeom>
+          <a:solidFill>
+            <a:srgbClr val="2E3338"/>
+          </a:solidFill>
+          <a:ln>
+            <a:noFill/>
+          </a:ln>
+          <a:effectLst/>
+        </p:spPr>
+        <p:style>
+          <a:lnRef idx="1">
+            <a:schemeClr val="accent1"/>
+          </a:lnRef>
+          <a:fillRef idx="3">
+            <a:schemeClr val="accent1"/>
+          </a:fillRef>
+          <a:effectRef idx="2">
+            <a:schemeClr val="accent1"/>
+          </a:effectRef>
+          <a:fontRef idx="minor">
+            <a:schemeClr val="lt1"/>
+          </a:fontRef>
+        </p:style>
+        <p:txBody>
+          <a:bodyPr rtlCol="0" anchor="ctr" wrap="square" lIns="73152" rIns="73152"/>
+          <a:lstStyle/>
+          <a:p>
+            <a:pPr algn="ctr"/>
+            <a:r>
+              <a:rPr sz="1600" b="1">
+                <a:solidFill>
+                  <a:srgbClr val="DEE2E6"/>
+                </a:solidFill>
+              </a:rPr>
+              <a:t>t = 0</a:t>
+            </a:r>
+          </a:p>
+          <a:p>
+            <a:pPr algn="ctr"/>
+            <a:r>
+              <a:rPr sz="1400" b="0">
+                <a:solidFill>
+                  <a:srgbClr val="9AA3AB"/>
+                </a:solidFill>
+              </a:rPr>
+              <a:t>a</a:t>
+            </a:r>
+          </a:p>
+        </p:txBody>
+      </p:sp>
+      <p:sp>
+        <p:nvSpPr>
+          <p:cNvPr id="219" name="Rounded Rectangle 218"/>
+          <p:cNvSpPr/>
+          <p:nvPr/>
+        </p:nvSpPr>
+        <p:spPr>
+          <a:xfrm>
+            <a:off x="3611880" y="2377440"/>
+            <a:ext cx="1920240" cy="685800"/>
+          </a:xfrm>
+          <a:prstGeom prst="roundRect">
+            <a:avLst>
+              <a:gd name="adj" fmla="val 12000"/>
+            </a:avLst>
+          </a:prstGeom>
+          <a:solidFill>
+            <a:srgbClr val="2E3338"/>
+          </a:solidFill>
+          <a:ln>
+            <a:noFill/>
+          </a:ln>
+          <a:effectLst/>
+        </p:spPr>
+        <p:style>
+          <a:lnRef idx="1">
+            <a:schemeClr val="accent1"/>
+          </a:lnRef>
+          <a:fillRef idx="3">
+            <a:schemeClr val="accent1"/>
+          </a:fillRef>
+          <a:effectRef idx="2">
+            <a:schemeClr val="accent1"/>
+          </a:effectRef>
+          <a:fontRef idx="minor">
+            <a:schemeClr val="lt1"/>
+          </a:fontRef>
+        </p:style>
+        <p:txBody>
+          <a:bodyPr rtlCol="0" anchor="ctr" wrap="square" lIns="73152" rIns="73152"/>
+          <a:lstStyle/>
+          <a:p>
+            <a:pPr algn="ctr"/>
+            <a:r>
+              <a:rPr sz="1600" b="1">
+                <a:solidFill>
+                  <a:srgbClr val="DEE2E6"/>
+                </a:solidFill>
+              </a:rPr>
+              <a:t>t = 0.5</a:t>
+            </a:r>
+          </a:p>
+          <a:p>
+            <a:pPr algn="ctr"/>
+            <a:r>
+              <a:rPr sz="1400" b="0">
+                <a:solidFill>
+                  <a:srgbClr val="9AA3AB"/>
+                </a:solidFill>
+              </a:rPr>
+              <a:t>halfway</a:t>
+            </a:r>
+          </a:p>
+        </p:txBody>
+      </p:sp>
+      <p:sp>
+        <p:nvSpPr>
+          <p:cNvPr id="220" name="Rounded Rectangle 219"/>
+          <p:cNvSpPr/>
+          <p:nvPr/>
+        </p:nvSpPr>
+        <p:spPr>
+          <a:xfrm>
+            <a:off x="5852160" y="2377440"/>
+            <a:ext cx="1920240" cy="685800"/>
+          </a:xfrm>
+          <a:prstGeom prst="roundRect">
+            <a:avLst>
+              <a:gd name="adj" fmla="val 12000"/>
+            </a:avLst>
+          </a:prstGeom>
+          <a:solidFill>
+            <a:srgbClr val="2E3338"/>
+          </a:solidFill>
+          <a:ln>
+            <a:noFill/>
+          </a:ln>
+          <a:effectLst/>
+        </p:spPr>
+        <p:style>
+          <a:lnRef idx="1">
+            <a:schemeClr val="accent1"/>
+          </a:lnRef>
+          <a:fillRef idx="3">
+            <a:schemeClr val="accent1"/>
+          </a:fillRef>
+          <a:effectRef idx="2">
+            <a:schemeClr val="accent1"/>
+          </a:effectRef>
+          <a:fontRef idx="minor">
+            <a:schemeClr val="lt1"/>
+          </a:fontRef>
+        </p:style>
+        <p:txBody>
+          <a:bodyPr rtlCol="0" anchor="ctr" wrap="square" lIns="73152" rIns="73152"/>
+          <a:lstStyle/>
+          <a:p>
+            <a:pPr algn="ctr"/>
+            <a:r>
+              <a:rPr sz="1600" b="1">
+                <a:solidFill>
+                  <a:srgbClr val="DEE2E6"/>
+                </a:solidFill>
+              </a:rPr>
+              <a:t>t = 1</a:t>
+            </a:r>
+          </a:p>
+          <a:p>
+            <a:pPr algn="ctr"/>
+            <a:r>
+              <a:rPr sz="1400" b="0">
+                <a:solidFill>
+                  <a:srgbClr val="9AA3AB"/>
+                </a:solidFill>
+              </a:rPr>
+              <a:t>b</a:t>
+            </a:r>
+          </a:p>
+        </p:txBody>
+      </p:sp>
+      <p:sp>
+        <p:nvSpPr>
+          <p:cNvPr id="221" name="TextBox 220"/>
+          <p:cNvSpPr txBox="1"/>
+          <p:nvPr/>
+        </p:nvSpPr>
+        <p:spPr>
+          <a:xfrm>
+            <a:off x="1371600" y="3291840"/>
+            <a:ext cx="6400800" cy="365760"/>
+          </a:xfrm>
+          <a:prstGeom prst="rect">
+            <a:avLst/>
+          </a:prstGeom>
+          <a:noFill/>
+        </p:spPr>
+        <p:txBody>
+          <a:bodyPr wrap="square">
+            <a:spAutoFit/>
+          </a:bodyPr>
+          <a:lstStyle/>
+          <a:p>
+            <a:pPr algn="ctr"/>
+            <a:r>
+              <a:rPr sz="1400" b="0" i="0">
+                <a:solidFill>
+                  <a:srgbClr val="9AA3AB"/>
+                </a:solidFill>
+              </a:rPr>
+              <a:t>Works on anything numeric: positions, colours, angles.</a:t>
+            </a:r>
           </a:p>
         </p:txBody>
       </p:sp>
@@ -18406,7 +19910,7 @@
         <p:spPr>
           <a:xfrm>
             <a:off x="311700" y="885950"/>
-            <a:ext cx="8520600" cy="2889000"/>
+            <a:ext cx="8520600" cy="521208"/>
           </a:xfrm>
           <a:prstGeom prst="rect">
             <a:avLst/>
@@ -18430,160 +19934,7 @@
             </a:pPr>
             <a:r>
               <a:rPr lang="en"/>
-              <a:t>When the player walks through a door, two things tween simultaneously</a:t>
-            </a:r>
-            <a:endParaRPr/>
-          </a:p>
-          <a:p>
-            <a:pPr indent="-317500" lvl="1" marL="914400" rtl="0" algn="l">
-              <a:spcBef>
-                <a:spcPts val="0"/>
-              </a:spcBef>
-              <a:spcAft>
-                <a:spcPts val="0"/>
-              </a:spcAft>
-              <a:buSzPts val="1400"/>
-              <a:buChar char="○"/>
-            </a:pPr>
-            <a:r>
-              <a:rPr lang="en"/>
-              <a:t>The camera - from (0, 0) to _shiftTarget (one screen width/height away)</a:t>
-            </a:r>
-            <a:endParaRPr/>
-          </a:p>
-          <a:p>
-            <a:pPr indent="-317500" lvl="1" marL="914400" rtl="0" algn="l">
-              <a:spcBef>
-                <a:spcPts val="0"/>
-              </a:spcBef>
-              <a:spcAft>
-                <a:spcPts val="0"/>
-              </a:spcAft>
-              <a:buSzPts val="1400"/>
-              <a:buChar char="○"/>
-            </a:pPr>
-            <a:r>
-              <a:rPr lang="en"/>
-              <a:t>The player - from the exit doorway to the matching entry point in the new room</a:t>
-            </a:r>
-            <a:endParaRPr/>
-          </a:p>
-          <a:p>
-            <a:pPr indent="-330200" lvl="0" marL="457200" rtl="0" algn="l">
-              <a:spcBef>
-                <a:spcPts val="0"/>
-              </a:spcBef>
-              <a:spcAft>
-                <a:spcPts val="0"/>
-              </a:spcAft>
-              <a:buSzPts val="1600"/>
-              <a:buChar char="●"/>
-            </a:pPr>
-            <a:r>
-              <a:rPr lang="en"/>
-              <a:t>The new room is placed at _shiftTarget and never moves</a:t>
-            </a:r>
-            <a:endParaRPr/>
-          </a:p>
-          <a:p>
-            <a:pPr indent="-317500" lvl="1" marL="914400" rtl="0" algn="l">
-              <a:spcBef>
-                <a:spcPts val="0"/>
-              </a:spcBef>
-              <a:spcAft>
-                <a:spcPts val="0"/>
-              </a:spcAft>
-              <a:buSzPts val="1400"/>
-              <a:buChar char="○"/>
-            </a:pPr>
-            <a:r>
-              <a:rPr lang="en"/>
-              <a:t>The camera travelling toward it is what creates the scroll effect</a:t>
-            </a:r>
-            <a:endParaRPr/>
-          </a:p>
-          <a:p>
-            <a:pPr indent="-330200" lvl="0" marL="457200" rtl="0" algn="l">
-              <a:spcBef>
-                <a:spcPts val="0"/>
-              </a:spcBef>
-              <a:spcAft>
-                <a:spcPts val="0"/>
-              </a:spcAft>
-              <a:buSzPts val="1600"/>
-              <a:buChar char="●"/>
-            </a:pPr>
-            <a:r>
-              <a:rPr lang="en"/>
-              <a:t>All objects render through the same camera.Transform * screenScaleMatrix</a:t>
-            </a:r>
-            <a:endParaRPr/>
-          </a:p>
-          <a:p>
-            <a:pPr indent="-317500" lvl="1" marL="914400" rtl="0" algn="l">
-              <a:spcBef>
-                <a:spcPts val="0"/>
-              </a:spcBef>
-              <a:spcAft>
-                <a:spcPts val="0"/>
-              </a:spcAft>
-              <a:buSzPts val="1400"/>
-              <a:buChar char="○"/>
-            </a:pPr>
-            <a:r>
-              <a:rPr lang="en"/>
-              <a:t>The whole scene shifts together</a:t>
-            </a:r>
-            <a:endParaRPr/>
-          </a:p>
-          <a:p>
-            <a:pPr indent="-330200" lvl="0" marL="457200" rtl="0" algn="l">
-              <a:spcBef>
-                <a:spcPts val="0"/>
-              </a:spcBef>
-              <a:spcAft>
-                <a:spcPts val="0"/>
-              </a:spcAft>
-              <a:buSzPts val="1600"/>
-              <a:buChar char="●"/>
-            </a:pPr>
-            <a:r>
-              <a:rPr lang="en"/>
-              <a:t>When the tween finishes, FinishShift makes the new room current</a:t>
-            </a:r>
-            <a:endParaRPr/>
-          </a:p>
-          <a:p>
-            <a:pPr indent="-317500" lvl="1" marL="914400" rtl="0" algn="l">
-              <a:spcBef>
-                <a:spcPts val="0"/>
-              </a:spcBef>
-              <a:spcAft>
-                <a:spcPts val="0"/>
-              </a:spcAft>
-              <a:buSzPts val="1400"/>
-              <a:buChar char="○"/>
-            </a:pPr>
-            <a:r>
-              <a:rPr lang="en"/>
-              <a:t>Camera &amp; Player position is then reset</a:t>
-            </a:r>
-            <a:endParaRPr/>
-          </a:p>
-          <a:p>
-            <a:pPr indent="-317500" lvl="1" marL="914400" rtl="0" algn="l">
-              <a:spcBef>
-                <a:spcPts val="0"/>
-              </a:spcBef>
-              <a:spcAft>
-                <a:spcPts val="0"/>
-              </a:spcAft>
-              <a:buSzPts val="1400"/>
-              <a:buChar char="○"/>
-            </a:pPr>
-            <a:r>
-              <a:rPr lang="en"/>
-              <a:t>Gameplay resumes (Room.Update is now called again)</a:t>
+              <a:t>The next room waits one screen away. The camera moves, and the player walks with it.</a:t>
             </a:r>
             <a:endParaRPr/>
           </a:p>
@@ -18591,233 +19942,334 @@
       </p:sp>
       <p:sp>
         <p:nvSpPr>
-          <p:cNvPr id="223" name="Google Shape;223;p36"/>
-          <p:cNvSpPr txBox="1"/>
-          <p:nvPr>
-            <p:ph idx="1" type="body"/>
-          </p:nvPr>
+          <p:cNvPr id="223" name="Rectangle 222"/>
+          <p:cNvSpPr/>
+          <p:nvPr/>
         </p:nvSpPr>
         <p:spPr>
           <a:xfrm>
-            <a:off x="1908900" y="3807823"/>
-            <a:ext cx="5326200" cy="1092162"/>
+            <a:off x="548640" y="1463040"/>
+            <a:ext cx="3291840" cy="1463040"/>
           </a:xfrm>
           <a:prstGeom prst="rect">
             <a:avLst/>
           </a:prstGeom>
           <a:solidFill>
-            <a:schemeClr val="dk2"/>
+            <a:srgbClr val="2E3338"/>
           </a:solidFill>
+          <a:ln>
+            <a:noFill/>
+          </a:ln>
+          <a:effectLst/>
+        </p:spPr>
+        <p:style>
+          <a:lnRef idx="1">
+            <a:schemeClr val="accent1"/>
+          </a:lnRef>
+          <a:fillRef idx="3">
+            <a:schemeClr val="accent1"/>
+          </a:fillRef>
+          <a:effectRef idx="2">
+            <a:schemeClr val="accent1"/>
+          </a:effectRef>
+          <a:fontRef idx="minor">
+            <a:schemeClr val="lt1"/>
+          </a:fontRef>
+        </p:style>
+        <p:txBody>
+          <a:bodyPr rtlCol="0" anchor="ctr" wrap="square" lIns="73152" rIns="73152"/>
+          <a:lstStyle/>
+          <a:p>
+            <a:pPr algn="ctr"/>
+            <a:r>
+              <a:rPr sz="1600" b="1">
+                <a:solidFill>
+                  <a:srgbClr val="DEE2E6"/>
+                </a:solidFill>
+              </a:rPr>
+              <a:t>This room</a:t>
+            </a:r>
+          </a:p>
+        </p:txBody>
+      </p:sp>
+      <p:sp>
+        <p:nvSpPr>
+          <p:cNvPr id="224" name="Rectangle 223"/>
+          <p:cNvSpPr/>
+          <p:nvPr/>
+        </p:nvSpPr>
+        <p:spPr>
+          <a:xfrm>
+            <a:off x="4937760" y="1463040"/>
+            <a:ext cx="3291840" cy="1463040"/>
+          </a:xfrm>
+          <a:prstGeom prst="rect">
+            <a:avLst/>
+          </a:prstGeom>
+          <a:solidFill>
+            <a:srgbClr val="2E3338"/>
+          </a:solidFill>
+          <a:ln>
+            <a:noFill/>
+          </a:ln>
+          <a:effectLst/>
+        </p:spPr>
+        <p:style>
+          <a:lnRef idx="1">
+            <a:schemeClr val="accent1"/>
+          </a:lnRef>
+          <a:fillRef idx="3">
+            <a:schemeClr val="accent1"/>
+          </a:fillRef>
+          <a:effectRef idx="2">
+            <a:schemeClr val="accent1"/>
+          </a:effectRef>
+          <a:fontRef idx="minor">
+            <a:schemeClr val="lt1"/>
+          </a:fontRef>
+        </p:style>
+        <p:txBody>
+          <a:bodyPr rtlCol="0" anchor="ctr" wrap="square" lIns="73152" rIns="73152"/>
+          <a:lstStyle/>
+          <a:p>
+            <a:pPr algn="ctr"/>
+            <a:r>
+              <a:rPr sz="1600" b="1">
+                <a:solidFill>
+                  <a:srgbClr val="DEE2E6"/>
+                </a:solidFill>
+              </a:rPr>
+              <a:t>The next room</a:t>
+            </a:r>
+          </a:p>
+          <a:p>
+            <a:pPr algn="ctr"/>
+            <a:r>
+              <a:rPr sz="1400" b="0">
+                <a:solidFill>
+                  <a:srgbClr val="9AA3AB"/>
+                </a:solidFill>
+              </a:rPr>
+              <a:t>placed one screen away,</a:t>
+            </a:r>
+          </a:p>
+          <a:p>
+            <a:pPr algn="ctr"/>
+            <a:r>
+              <a:rPr sz="1400" b="0">
+                <a:solidFill>
+                  <a:srgbClr val="9AA3AB"/>
+                </a:solidFill>
+              </a:rPr>
+              <a:t>never moves</a:t>
+            </a:r>
+          </a:p>
+        </p:txBody>
+      </p:sp>
+      <p:sp>
+        <p:nvSpPr>
+          <p:cNvPr id="225" name="Rectangle 224"/>
+          <p:cNvSpPr/>
+          <p:nvPr/>
+        </p:nvSpPr>
+        <p:spPr>
+          <a:xfrm>
+            <a:off x="457200" y="1371600"/>
+            <a:ext cx="3474720" cy="1645920"/>
+          </a:xfrm>
+          <a:prstGeom prst="rect">
+            <a:avLst/>
+          </a:prstGeom>
+          <a:noFill/>
+          <a:ln w="25400">
+            <a:solidFill>
+              <a:srgbClr val="D45D35"/>
+            </a:solidFill>
+          </a:ln>
+          <a:effectLst/>
+        </p:spPr>
+        <p:style>
+          <a:lnRef idx="1">
+            <a:schemeClr val="accent1"/>
+          </a:lnRef>
+          <a:fillRef idx="3">
+            <a:schemeClr val="accent1"/>
+          </a:fillRef>
+          <a:effectRef idx="2">
+            <a:schemeClr val="accent1"/>
+          </a:effectRef>
+          <a:fontRef idx="minor">
+            <a:schemeClr val="lt1"/>
+          </a:fontRef>
+        </p:style>
+        <p:txBody>
+          <a:bodyPr rtlCol="0" anchor="ctr" wrap="square" lIns="73152" rIns="73152"/>
+          <a:lstStyle/>
+          <a:p>
+            <a:pPr algn="ctr"/>
+            <a:r>
+              <a:rPr sz="1400" b="0">
+                <a:solidFill>
+                  <a:srgbClr val="DEE2E6"/>
+                </a:solidFill>
+              </a:rPr>
+              <a:t/>
+            </a:r>
+          </a:p>
+        </p:txBody>
+      </p:sp>
+      <p:cxnSp>
+        <p:nvCxnSpPr>
+          <p:cNvPr id="226" name="Connector 225"/>
+          <p:cNvCxnSpPr/>
+          <p:nvPr/>
+        </p:nvCxnSpPr>
+        <p:spPr>
+          <a:xfrm>
+            <a:off x="3977639" y="2194560"/>
+            <a:ext cx="868681" cy="0"/>
+          </a:xfrm>
+          <a:prstGeom prst="line">
+            <a:avLst/>
+          </a:prstGeom>
+          <a:ln w="25400">
+            <a:solidFill>
+              <a:srgbClr val="D45D35"/>
+            </a:solidFill>
+            <a:tailEnd type="triangle"/>
+          </a:ln>
+        </p:spPr>
+        <p:style>
+          <a:lnRef idx="2">
+            <a:schemeClr val="accent1"/>
+          </a:lnRef>
+          <a:fillRef idx="0">
+            <a:schemeClr val="accent1"/>
+          </a:fillRef>
+          <a:effectRef idx="1">
+            <a:schemeClr val="accent1"/>
+          </a:effectRef>
+          <a:fontRef idx="minor">
+            <a:schemeClr val="tx1"/>
+          </a:fontRef>
+        </p:style>
+      </p:cxnSp>
+      <p:sp>
+        <p:nvSpPr>
+          <p:cNvPr id="227" name="TextBox 226"/>
+          <p:cNvSpPr txBox="1"/>
+          <p:nvPr/>
+        </p:nvSpPr>
+        <p:spPr>
+          <a:xfrm>
+            <a:off x="3794759" y="1901952"/>
+            <a:ext cx="1234440" cy="274320"/>
+          </a:xfrm>
+          <a:prstGeom prst="rect">
+            <a:avLst/>
+          </a:prstGeom>
+          <a:noFill/>
         </p:spPr>
         <p:txBody>
-          <a:bodyPr anchorCtr="0" anchor="t" bIns="91425" lIns="91425" spcFirstLastPara="1" rIns="91425" wrap="square" tIns="91425">
-            <a:normAutofit fontScale="85000" lnSpcReduction="20000"/>
+          <a:bodyPr wrap="square">
+            <a:spAutoFit/>
           </a:bodyPr>
           <a:lstStyle/>
           <a:p>
-            <a:pPr indent="0" lvl="0" marL="0" rtl="0" algn="l">
-              <a:lnSpc>
-                <a:spcPct val="157500"/>
-              </a:lnSpc>
-              <a:spcBef>
-                <a:spcPts val="0"/>
-              </a:spcBef>
-              <a:spcAft>
-                <a:spcPts val="0"/>
-              </a:spcAft>
-              <a:buNone/>
-            </a:pPr>
-            <a:r>
-              <a:rPr lang="en" sz="1000">
-                <a:solidFill>
-                  <a:srgbClr val="6A9955"/>
-                </a:solidFill>
-                <a:highlight>
-                  <a:srgbClr val="1F1F1F"/>
-                </a:highlight>
+            <a:pPr algn="ctr"/>
+            <a:r>
+              <a:rPr sz="1100" b="0" i="0">
+                <a:solidFill>
+                  <a:srgbClr val="9AA3AB"/>
+                </a:solidFill>
+              </a:rPr>
+              <a:t>camera</a:t>
+            </a:r>
+          </a:p>
+        </p:txBody>
+      </p:sp>
+      <p:sp>
+        <p:nvSpPr>
+          <p:cNvPr id="228" name="Rectangle 227"/>
+          <p:cNvSpPr/>
+          <p:nvPr/>
+        </p:nvSpPr>
+        <p:spPr>
+          <a:xfrm>
+            <a:off x="548640" y="3246120"/>
+            <a:ext cx="7680960" cy="914400"/>
+          </a:xfrm>
+          <a:prstGeom prst="rect">
+            <a:avLst/>
+          </a:prstGeom>
+          <a:solidFill>
+            <a:srgbClr val="17191C"/>
+          </a:solidFill>
+          <a:ln>
+            <a:noFill/>
+          </a:ln>
+          <a:effectLst/>
+        </p:spPr>
+        <p:style>
+          <a:lnRef idx="1">
+            <a:schemeClr val="accent1"/>
+          </a:lnRef>
+          <a:fillRef idx="3">
+            <a:schemeClr val="accent1"/>
+          </a:fillRef>
+          <a:effectRef idx="2">
+            <a:schemeClr val="accent1"/>
+          </a:effectRef>
+          <a:fontRef idx="minor">
+            <a:schemeClr val="lt1"/>
+          </a:fontRef>
+        </p:style>
+        <p:txBody>
+          <a:bodyPr rtlCol="0" anchor="ctr" wrap="square" lIns="164592" rIns="73152"/>
+          <a:lstStyle/>
+          <a:p>
+            <a:pPr algn="l"/>
+            <a:r>
+              <a:rPr sz="1400" b="0">
+                <a:solidFill>
+                  <a:srgbClr val="DEE2E6"/>
+                </a:solidFill>
+              </a:rPr>
+              <a:t/>
+            </a:r>
+            <a:r>
+              <a:rPr sz="1200">
+                <a:solidFill>
+                  <a:srgbClr val="DEE2E6"/>
+                </a:solidFill>
                 <a:latin typeface="Consolas"/>
-                <a:ea typeface="Consolas"/>
-                <a:cs typeface="Consolas"/>
-                <a:sym typeface="Consolas"/>
-              </a:rPr>
-              <a:t>// Dungeon.cs, BeginShift</a:t>
-            </a:r>
-            <a:endParaRPr sz="1000">
-              <a:solidFill>
-                <a:srgbClr val="6A9955"/>
-              </a:solidFill>
-              <a:highlight>
-                <a:srgbClr val="1F1F1F"/>
-              </a:highlight>
-              <a:latin typeface="Consolas"/>
-              <a:ea typeface="Consolas"/>
-              <a:cs typeface="Consolas"/>
-              <a:sym typeface="Consolas"/>
-            </a:endParaRPr>
-          </a:p>
-          <a:p>
-            <a:pPr indent="0" lvl="0" marL="0" rtl="0" algn="l">
-              <a:lnSpc>
-                <a:spcPct val="157500"/>
-              </a:lnSpc>
-              <a:spcBef>
-                <a:spcPts val="0"/>
-              </a:spcBef>
-              <a:spcAft>
-                <a:spcPts val="0"/>
-              </a:spcAft>
-              <a:buNone/>
-            </a:pPr>
-            <a:r>
-              <a:rPr lang="en" sz="1000">
-                <a:solidFill>
-                  <a:srgbClr val="9CDCFE"/>
-                </a:solidFill>
-                <a:highlight>
-                  <a:srgbClr val="1F1F1F"/>
-                </a:highlight>
+              </a:rPr>
+              <a:t>_tweens.Tween(GameSettings.RoomShiftDuration)</a:t>
+            </a:r>
+          </a:p>
+          <a:p>
+            <a:pPr algn="l"/>
+            <a:r>
+              <a:rPr sz="1200">
+                <a:solidFill>
+                  <a:srgbClr val="DEE2E6"/>
+                </a:solidFill>
                 <a:latin typeface="Consolas"/>
-                <a:ea typeface="Consolas"/>
-                <a:cs typeface="Consolas"/>
-                <a:sym typeface="Consolas"/>
-              </a:rPr>
-              <a:t>_tweens.Tween(GameSettings.RoomShiftDuration)</a:t>
-            </a:r>
-            <a:endParaRPr sz="1000">
-              <a:solidFill>
-                <a:srgbClr val="CCCCCC"/>
-              </a:solidFill>
-              <a:highlight>
-                <a:srgbClr val="1F1F1F"/>
-              </a:highlight>
-              <a:latin typeface="Consolas"/>
-              <a:ea typeface="Consolas"/>
-              <a:cs typeface="Consolas"/>
-              <a:sym typeface="Consolas"/>
-            </a:endParaRPr>
-          </a:p>
-          <a:p>
-            <a:pPr indent="0" lvl="0" marL="0" rtl="0" algn="l">
-              <a:lnSpc>
-                <a:spcPct val="157500"/>
-              </a:lnSpc>
-              <a:spcBef>
-                <a:spcPts val="0"/>
-              </a:spcBef>
-              <a:spcAft>
-                <a:spcPts val="0"/>
-              </a:spcAft>
-              <a:buNone/>
-            </a:pPr>
-            <a:r>
-              <a:rPr lang="en" sz="1000">
-                <a:solidFill>
-                  <a:srgbClr val="9CDCFE"/>
-                </a:solidFill>
-                <a:highlight>
-                  <a:srgbClr val="1F1F1F"/>
-                </a:highlight>
+              </a:rPr>
+              <a:t>    .Add(t =&gt; /* move the camera */, 0f, 1f).Add(t =&gt; /* walk the player */, 0f, 1f)</a:t>
+            </a:r>
+          </a:p>
+          <a:p>
+            <a:pPr algn="l"/>
+            <a:r>
+              <a:rPr sz="1200">
+                <a:solidFill>
+                  <a:srgbClr val="DEE2E6"/>
+                </a:solidFill>
                 <a:latin typeface="Consolas"/>
-                <a:ea typeface="Consolas"/>
-                <a:cs typeface="Consolas"/>
-                <a:sym typeface="Consolas"/>
-              </a:rPr>
-              <a:t>    .Add(t =&gt; /* move the camera */, 0f, 1f)</a:t>
-            </a:r>
-            <a:endParaRPr sz="1000">
-              <a:solidFill>
-                <a:srgbClr val="CCCCCC"/>
-              </a:solidFill>
-              <a:highlight>
-                <a:srgbClr val="1F1F1F"/>
-              </a:highlight>
-              <a:latin typeface="Consolas"/>
-              <a:ea typeface="Consolas"/>
-              <a:cs typeface="Consolas"/>
-              <a:sym typeface="Consolas"/>
-            </a:endParaRPr>
-          </a:p>
-          <a:p>
-            <a:pPr indent="0" lvl="0" marL="0" rtl="0" algn="l">
-              <a:lnSpc>
-                <a:spcPct val="157500"/>
-              </a:lnSpc>
-              <a:spcBef>
-                <a:spcPts val="0"/>
-              </a:spcBef>
-              <a:spcAft>
-                <a:spcPts val="0"/>
-              </a:spcAft>
-              <a:buNone/>
-            </a:pPr>
-            <a:r>
-              <a:rPr lang="en" sz="1000">
-                <a:solidFill>
-                  <a:srgbClr val="9CDCFE"/>
-                </a:solidFill>
-                <a:highlight>
-                  <a:srgbClr val="1F1F1F"/>
-                </a:highlight>
-                <a:latin typeface="Consolas"/>
-                <a:ea typeface="Consolas"/>
-                <a:cs typeface="Consolas"/>
-                <a:sym typeface="Consolas"/>
-              </a:rPr>
-              <a:t>    .Add(t =&gt; /* walk the player */, 0f, 1f)</a:t>
-            </a:r>
-            <a:endParaRPr sz="1000">
-              <a:solidFill>
-                <a:srgbClr val="9CDCFE"/>
-              </a:solidFill>
-              <a:highlight>
-                <a:srgbClr val="1F1F1F"/>
-              </a:highlight>
-              <a:latin typeface="Consolas"/>
-              <a:ea typeface="Consolas"/>
-              <a:cs typeface="Consolas"/>
-              <a:sym typeface="Consolas"/>
-            </a:endParaRPr>
-          </a:p>
-          <a:p>
-            <a:pPr indent="0" lvl="0" marL="0" rtl="0" algn="l">
-              <a:lnSpc>
-                <a:spcPct val="157500"/>
-              </a:lnSpc>
-              <a:spcBef>
-                <a:spcPts val="0"/>
-              </a:spcBef>
-              <a:spcAft>
-                <a:spcPts val="0"/>
-              </a:spcAft>
-              <a:buNone/>
-            </a:pPr>
-            <a:r>
-              <a:rPr lang="en" sz="1000">
-                <a:solidFill>
-                  <a:srgbClr val="9CDCFE"/>
-                </a:solidFill>
-                <a:highlight>
-                  <a:srgbClr val="1F1F1F"/>
-                </a:highlight>
-                <a:latin typeface="Consolas"/>
-                <a:ea typeface="Consolas"/>
-                <a:cs typeface="Consolas"/>
-                <a:sym typeface="Consolas"/>
-              </a:rPr>
-              <a:t>    .Finish(FinishShift);</a:t>
-            </a:r>
-            <a:endParaRPr sz="1000">
-              <a:solidFill>
-                <a:srgbClr val="9CDCFE"/>
-              </a:solidFill>
-              <a:highlight>
-                <a:srgbClr val="1F1F1F"/>
-              </a:highlight>
-              <a:latin typeface="Consolas"/>
-              <a:ea typeface="Consolas"/>
-              <a:cs typeface="Consolas"/>
-              <a:sym typeface="Consolas"/>
-            </a:endParaRPr>
+              </a:rPr>
+              <a:t>    .Finish(FinishShift);   // the next room becomes the current one</a:t>
+            </a:r>
           </a:p>
         </p:txBody>
       </p:sp>
@@ -20157,7 +21609,7 @@
         <p:spPr>
           <a:xfrm>
             <a:off x="311700" y="885950"/>
-            <a:ext cx="8520600" cy="4023300"/>
+            <a:ext cx="8520600" cy="521208"/>
           </a:xfrm>
           <a:prstGeom prst="rect">
             <a:avLst/>
@@ -20169,23 +21621,19 @@
           </a:bodyPr>
           <a:lstStyle/>
           <a:p>
-            <a:pPr indent="0" lvl="0" marL="0" rtl="0" algn="l">
-              <a:spcBef>
-                <a:spcPts val="0"/>
-              </a:spcBef>
-              <a:spcAft>
-                <a:spcPts val="1200"/>
-              </a:spcAft>
-              <a:buNone/>
+            <a:pPr indent="-330200" lvl="0" marL="457200" rtl="0" algn="l">
+              <a:spcBef>
+                <a:spcPts val="0"/>
+              </a:spcBef>
+              <a:spcAft>
+                <a:spcPts val="0"/>
+              </a:spcAft>
+              <a:buSzPts val="1600"/>
+              <a:buChar char="●"/>
             </a:pPr>
             <a:r>
-              <a:rPr lang="en" u="sng">
-                <a:solidFill>
-                  <a:schemeClr val="hlink"/>
-                </a:solidFill>
-                <a:hlinkClick r:id="rId3"/>
-              </a:rPr>
-              <a:t>Stencil buffer</a:t>
+              <a:rPr lang="en"/>
+              <a:t>Walking through a door, the player should go under the arch, not over it.</a:t>
             </a:r>
             <a:endParaRPr/>
           </a:p>
@@ -20207,8 +21655,8 @@
         </p:blipFill>
         <p:spPr>
           <a:xfrm>
-            <a:off x="2752000" y="1920300"/>
-            <a:ext cx="3640000" cy="2319500"/>
+            <a:off x="5760720" y="1463040"/>
+            <a:ext cx="2926080" cy="1864572"/>
           </a:xfrm>
           <a:prstGeom prst="rect">
             <a:avLst/>
@@ -20219,6 +21667,203 @@
           </a:ln>
         </p:spPr>
       </p:pic>
+      <p:sp>
+        <p:nvSpPr>
+          <p:cNvPr id="231" name="Rounded Rectangle 230"/>
+          <p:cNvSpPr/>
+          <p:nvPr/>
+        </p:nvSpPr>
+        <p:spPr>
+          <a:xfrm>
+            <a:off x="457200" y="1417320"/>
+            <a:ext cx="4937760" cy="731520"/>
+          </a:xfrm>
+          <a:prstGeom prst="roundRect">
+            <a:avLst>
+              <a:gd name="adj" fmla="val 12000"/>
+            </a:avLst>
+          </a:prstGeom>
+          <a:solidFill>
+            <a:srgbClr val="2E3338"/>
+          </a:solidFill>
+          <a:ln>
+            <a:noFill/>
+          </a:ln>
+          <a:effectLst/>
+        </p:spPr>
+        <p:style>
+          <a:lnRef idx="1">
+            <a:schemeClr val="accent1"/>
+          </a:lnRef>
+          <a:fillRef idx="3">
+            <a:schemeClr val="accent1"/>
+          </a:fillRef>
+          <a:effectRef idx="2">
+            <a:schemeClr val="accent1"/>
+          </a:effectRef>
+          <a:fontRef idx="minor">
+            <a:schemeClr val="lt1"/>
+          </a:fontRef>
+        </p:style>
+        <p:txBody>
+          <a:bodyPr rtlCol="0" anchor="ctr" wrap="square" lIns="73152" rIns="73152"/>
+          <a:lstStyle/>
+          <a:p>
+            <a:pPr algn="l"/>
+            <a:r>
+              <a:rPr sz="1500" b="1">
+                <a:solidFill>
+                  <a:srgbClr val="DEE2E6"/>
+                </a:solidFill>
+              </a:rPr>
+              <a:t>Pass 1: draw the rooms</a:t>
+            </a:r>
+          </a:p>
+          <a:p>
+            <a:pPr algn="l"/>
+            <a:r>
+              <a:rPr sz="1300" b="0">
+                <a:solidFill>
+                  <a:srgbClr val="9AA3AB"/>
+                </a:solidFill>
+              </a:rPr>
+              <a:t>as usual</a:t>
+            </a:r>
+          </a:p>
+        </p:txBody>
+      </p:sp>
+      <p:sp>
+        <p:nvSpPr>
+          <p:cNvPr id="232" name="Rounded Rectangle 231"/>
+          <p:cNvSpPr/>
+          <p:nvPr/>
+        </p:nvSpPr>
+        <p:spPr>
+          <a:xfrm>
+            <a:off x="457200" y="2286000"/>
+            <a:ext cx="4937760" cy="731520"/>
+          </a:xfrm>
+          <a:prstGeom prst="roundRect">
+            <a:avLst>
+              <a:gd name="adj" fmla="val 12000"/>
+            </a:avLst>
+          </a:prstGeom>
+          <a:solidFill>
+            <a:srgbClr val="2E3338"/>
+          </a:solidFill>
+          <a:ln w="25400">
+            <a:solidFill>
+              <a:srgbClr val="D45D35"/>
+            </a:solidFill>
+          </a:ln>
+          <a:effectLst/>
+        </p:spPr>
+        <p:style>
+          <a:lnRef idx="1">
+            <a:schemeClr val="accent1"/>
+          </a:lnRef>
+          <a:fillRef idx="3">
+            <a:schemeClr val="accent1"/>
+          </a:fillRef>
+          <a:effectRef idx="2">
+            <a:schemeClr val="accent1"/>
+          </a:effectRef>
+          <a:fontRef idx="minor">
+            <a:schemeClr val="lt1"/>
+          </a:fontRef>
+        </p:style>
+        <p:txBody>
+          <a:bodyPr rtlCol="0" anchor="ctr" wrap="square" lIns="73152" rIns="73152"/>
+          <a:lstStyle/>
+          <a:p>
+            <a:pPr algn="l"/>
+            <a:r>
+              <a:rPr sz="1500" b="1">
+                <a:solidFill>
+                  <a:srgbClr val="DEE2E6"/>
+                </a:solidFill>
+              </a:rPr>
+              <a:t>Pass 2: mark the arches</a:t>
+            </a:r>
+          </a:p>
+          <a:p>
+            <a:pPr algn="l"/>
+            <a:r>
+              <a:rPr sz="1300" b="0">
+                <a:solidFill>
+                  <a:srgbClr val="9AA3AB"/>
+                </a:solidFill>
+              </a:rPr>
+              <a:t>in the stencil buffer, with no colour</a:t>
+            </a:r>
+          </a:p>
+        </p:txBody>
+      </p:sp>
+      <p:sp>
+        <p:nvSpPr>
+          <p:cNvPr id="233" name="Rounded Rectangle 232"/>
+          <p:cNvSpPr/>
+          <p:nvPr/>
+        </p:nvSpPr>
+        <p:spPr>
+          <a:xfrm>
+            <a:off x="457200" y="3154680"/>
+            <a:ext cx="4937760" cy="731520"/>
+          </a:xfrm>
+          <a:prstGeom prst="roundRect">
+            <a:avLst>
+              <a:gd name="adj" fmla="val 12000"/>
+            </a:avLst>
+          </a:prstGeom>
+          <a:solidFill>
+            <a:srgbClr val="2E3338"/>
+          </a:solidFill>
+          <a:ln>
+            <a:noFill/>
+          </a:ln>
+          <a:effectLst/>
+        </p:spPr>
+        <p:style>
+          <a:lnRef idx="1">
+            <a:schemeClr val="accent1"/>
+          </a:lnRef>
+          <a:fillRef idx="3">
+            <a:schemeClr val="accent1"/>
+          </a:fillRef>
+          <a:effectRef idx="2">
+            <a:schemeClr val="accent1"/>
+          </a:effectRef>
+          <a:fontRef idx="minor">
+            <a:schemeClr val="lt1"/>
+          </a:fontRef>
+        </p:style>
+        <p:txBody>
+          <a:bodyPr rtlCol="0" anchor="ctr" wrap="square" lIns="73152" rIns="73152"/>
+          <a:lstStyle/>
+          <a:p>
+            <a:pPr algn="l"/>
+            <a:r>
+              <a:rPr sz="1500" b="1">
+                <a:solidFill>
+                  <a:srgbClr val="DEE2E6"/>
+                </a:solidFill>
+              </a:rPr>
+              <a:t>Pass 3: draw the player again</a:t>
+            </a:r>
+          </a:p>
+          <a:p>
+            <a:pPr algn="l"/>
+            <a:r>
+              <a:rPr sz="1300" b="0">
+                <a:solidFill>
+                  <a:srgbClr val="9AA3AB"/>
+                </a:solidFill>
+              </a:rPr>
+              <a:t>only where nothing is marked</a:t>
+            </a:r>
+          </a:p>
+        </p:txBody>
+      </p:sp>
     </p:spTree>
   </p:cSld>
   <p:clrMapOvr>
@@ -20295,7 +21940,7 @@
         <p:spPr>
           <a:xfrm>
             <a:off x="311700" y="885950"/>
-            <a:ext cx="8520600" cy="2358000"/>
+            <a:ext cx="8520600" cy="521208"/>
           </a:xfrm>
           <a:prstGeom prst="rect">
             <a:avLst/>
@@ -20319,126 +21964,7 @@
             </a:pPr>
             <a:r>
               <a:rPr lang="en"/>
-              <a:t>Content lives in config files, behaviour lives in C#</a:t>
-            </a:r>
-            <a:endParaRPr/>
-          </a:p>
-          <a:p>
-            <a:pPr indent="-317500" lvl="1" marL="914400" rtl="0" algn="l">
-              <a:spcBef>
-                <a:spcPts val="0"/>
-              </a:spcBef>
-              <a:spcAft>
-                <a:spcPts val="0"/>
-              </a:spcAft>
-              <a:buSzPts val="1400"/>
-              <a:buChar char="○"/>
-            </a:pPr>
-            <a:r>
-              <a:rPr lang="en"/>
-              <a:t>This project uses XML — alternatives: JSON, YAML, TOML, Lua</a:t>
-            </a:r>
-            <a:endParaRPr/>
-          </a:p>
-          <a:p>
-            <a:pPr indent="-330200" lvl="0" marL="457200" rtl="0" algn="l">
-              <a:spcBef>
-                <a:spcPts val="0"/>
-              </a:spcBef>
-              <a:spcAft>
-                <a:spcPts val="0"/>
-              </a:spcAft>
-              <a:buSzPts val="1600"/>
-              <a:buChar char="●"/>
-            </a:pPr>
-            <a:r>
-              <a:rPr lang="en"/>
-              <a:t>Definition classes parse the files once at startup into dictionaries</a:t>
-            </a:r>
-            <a:endParaRPr/>
-          </a:p>
-          <a:p>
-            <a:pPr indent="-317500" lvl="1" marL="914400" rtl="0" algn="l">
-              <a:spcBef>
-                <a:spcPts val="0"/>
-              </a:spcBef>
-              <a:spcAft>
-                <a:spcPts val="0"/>
-              </a:spcAft>
-              <a:buSzPts val="1400"/>
-              <a:buChar char="○"/>
-            </a:pPr>
-            <a:r>
-              <a:rPr lang="en"/>
-              <a:t>The rest of the code never touches XML</a:t>
-            </a:r>
-            <a:endParaRPr/>
-          </a:p>
-          <a:p>
-            <a:pPr indent="-330200" lvl="0" marL="457200" rtl="0" algn="l">
-              <a:spcBef>
-                <a:spcPts val="0"/>
-              </a:spcBef>
-              <a:spcAft>
-                <a:spcPts val="0"/>
-              </a:spcAft>
-              <a:buSzPts val="1600"/>
-              <a:buChar char="●"/>
-            </a:pPr>
-            <a:r>
-              <a:rPr lang="en"/>
-              <a:t>Adding a new enemy type = one &lt;Enemy&gt; block in XML + a spritesheet row</a:t>
-            </a:r>
-            <a:endParaRPr/>
-          </a:p>
-          <a:p>
-            <a:pPr indent="-317500" lvl="1" marL="914400" rtl="0" algn="l">
-              <a:spcBef>
-                <a:spcPts val="0"/>
-              </a:spcBef>
-              <a:spcAft>
-                <a:spcPts val="0"/>
-              </a:spcAft>
-              <a:buSzPts val="1400"/>
-              <a:buChar char="○"/>
-            </a:pPr>
-            <a:r>
-              <a:rPr lang="en"/>
-              <a:t>No C# changes, no recompile</a:t>
-            </a:r>
-            <a:endParaRPr/>
-          </a:p>
-          <a:p>
-            <a:pPr indent="-330200" lvl="0" marL="457200" rtl="0" algn="l">
-              <a:spcBef>
-                <a:spcPts val="0"/>
-              </a:spcBef>
-              <a:spcAft>
-                <a:spcPts val="0"/>
-              </a:spcAft>
-              <a:buSzPts val="1600"/>
-              <a:buChar char="●"/>
-            </a:pPr>
-            <a:r>
-              <a:rPr lang="en"/>
-              <a:t>GameObject has no if (type == "switch") anywhere</a:t>
-            </a:r>
-            <a:endParaRPr/>
-          </a:p>
-          <a:p>
-            <a:pPr indent="-317500" lvl="1" marL="914400" rtl="0" algn="l">
-              <a:spcBef>
-                <a:spcPts val="0"/>
-              </a:spcBef>
-              <a:spcAft>
-                <a:spcPts val="0"/>
-              </a:spcAft>
-              <a:buSzPts val="1400"/>
-              <a:buChar char="○"/>
-            </a:pPr>
-            <a:r>
-              <a:rPr lang="en"/>
-              <a:t>the XML defines valid states, the C# just looks up the current state name at draw time</a:t>
+              <a:t>Content in data, behaviour in C#: a new enemy is one XML block and a row of sprites.</a:t>
             </a:r>
             <a:endParaRPr/>
           </a:p>
@@ -20446,1077 +21972,177 @@
       </p:sp>
       <p:sp>
         <p:nvSpPr>
-          <p:cNvPr id="237" name="Google Shape;237;p38"/>
-          <p:cNvSpPr txBox="1"/>
-          <p:nvPr>
-            <p:ph idx="1" type="body"/>
-          </p:nvPr>
+          <p:cNvPr id="237" name="Rectangle 236"/>
+          <p:cNvSpPr/>
+          <p:nvPr/>
         </p:nvSpPr>
         <p:spPr>
           <a:xfrm>
-            <a:off x="311700" y="3244025"/>
-            <a:ext cx="8520600" cy="1099500"/>
+            <a:off x="457200" y="1417320"/>
+            <a:ext cx="8229600" cy="1097280"/>
           </a:xfrm>
           <a:prstGeom prst="rect">
             <a:avLst/>
           </a:prstGeom>
           <a:solidFill>
-            <a:schemeClr val="dk2"/>
+            <a:srgbClr val="17191C"/>
           </a:solidFill>
+          <a:ln>
+            <a:noFill/>
+          </a:ln>
+          <a:effectLst/>
         </p:spPr>
+        <p:style>
+          <a:lnRef idx="1">
+            <a:schemeClr val="accent1"/>
+          </a:lnRef>
+          <a:fillRef idx="3">
+            <a:schemeClr val="accent1"/>
+          </a:fillRef>
+          <a:effectRef idx="2">
+            <a:schemeClr val="accent1"/>
+          </a:effectRef>
+          <a:fontRef idx="minor">
+            <a:schemeClr val="lt1"/>
+          </a:fontRef>
+        </p:style>
         <p:txBody>
-          <a:bodyPr anchorCtr="0" anchor="t" bIns="91425" lIns="91425" spcFirstLastPara="1" rIns="91425" wrap="square" tIns="91425">
-            <a:normAutofit/>
-          </a:bodyPr>
+          <a:bodyPr rtlCol="0" anchor="ctr" wrap="square" lIns="164592" rIns="73152"/>
           <a:lstStyle/>
           <a:p>
-            <a:pPr indent="0" lvl="0" marL="0" rtl="0" algn="l">
-              <a:lnSpc>
-                <a:spcPct val="157500"/>
-              </a:lnSpc>
-              <a:spcBef>
-                <a:spcPts val="0"/>
-              </a:spcBef>
-              <a:spcAft>
-                <a:spcPts val="0"/>
-              </a:spcAft>
-              <a:buNone/>
-            </a:pPr>
-            <a:r>
-              <a:rPr lang="en" sz="1000">
-                <a:solidFill>
-                  <a:srgbClr val="808080"/>
-                </a:solidFill>
-                <a:highlight>
-                  <a:srgbClr val="1F1F1F"/>
-                </a:highlight>
+            <a:pPr algn="l"/>
+            <a:r>
+              <a:rPr sz="1400" b="0">
+                <a:solidFill>
+                  <a:srgbClr val="DEE2E6"/>
+                </a:solidFill>
+              </a:rPr>
+              <a:t/>
+            </a:r>
+            <a:r>
+              <a:rPr sz="1200">
+                <a:solidFill>
+                  <a:srgbClr val="DEE2E6"/>
+                </a:solidFill>
                 <a:latin typeface="Consolas"/>
-                <a:ea typeface="Consolas"/>
-                <a:cs typeface="Consolas"/>
-                <a:sym typeface="Consolas"/>
-              </a:rPr>
-              <a:t>&lt;</a:t>
-            </a:r>
-            <a:r>
-              <a:rPr lang="en" sz="1000">
-                <a:solidFill>
-                  <a:srgbClr val="569CD6"/>
-                </a:solidFill>
-                <a:highlight>
-                  <a:srgbClr val="1F1F1F"/>
-                </a:highlight>
+              </a:rPr>
+              <a:t>&lt;Enemy type="skeleton" width="16" height="16" walkSpeed="20" health="1"&gt;</a:t>
+            </a:r>
+          </a:p>
+          <a:p>
+            <a:pPr algn="l"/>
+            <a:r>
+              <a:rPr sz="1200">
+                <a:solidFill>
+                  <a:srgbClr val="DEE2E6"/>
+                </a:solidFill>
                 <a:latin typeface="Consolas"/>
-                <a:ea typeface="Consolas"/>
-                <a:cs typeface="Consolas"/>
-                <a:sym typeface="Consolas"/>
-              </a:rPr>
-              <a:t>Enemy</a:t>
-            </a:r>
-            <a:r>
-              <a:rPr lang="en" sz="1000">
-                <a:solidFill>
-                  <a:srgbClr val="CCCCCC"/>
-                </a:solidFill>
-                <a:highlight>
-                  <a:srgbClr val="1F1F1F"/>
-                </a:highlight>
+              </a:rPr>
+              <a:t>  &lt;Animation name="walk-down" frames="9,10,11,10" interval="0.2" /&gt;</a:t>
+            </a:r>
+          </a:p>
+          <a:p>
+            <a:pPr algn="l"/>
+            <a:r>
+              <a:rPr sz="1200">
+                <a:solidFill>
+                  <a:srgbClr val="DEE2E6"/>
+                </a:solidFill>
                 <a:latin typeface="Consolas"/>
-                <a:ea typeface="Consolas"/>
-                <a:cs typeface="Consolas"/>
-                <a:sym typeface="Consolas"/>
-              </a:rPr>
-              <a:t> </a:t>
-            </a:r>
-            <a:r>
-              <a:rPr lang="en" sz="1000">
-                <a:solidFill>
-                  <a:srgbClr val="9CDCFE"/>
-                </a:solidFill>
-                <a:highlight>
-                  <a:srgbClr val="1F1F1F"/>
-                </a:highlight>
+              </a:rPr>
+              <a:t>  &lt;Animation name="idle-down" frames="10"         interval="0.2" /&gt;</a:t>
+            </a:r>
+          </a:p>
+          <a:p>
+            <a:pPr algn="l"/>
+            <a:r>
+              <a:rPr sz="1200">
+                <a:solidFill>
+                  <a:srgbClr val="DEE2E6"/>
+                </a:solidFill>
                 <a:latin typeface="Consolas"/>
-                <a:ea typeface="Consolas"/>
-                <a:cs typeface="Consolas"/>
-                <a:sym typeface="Consolas"/>
-              </a:rPr>
-              <a:t>type</a:t>
-            </a:r>
-            <a:r>
-              <a:rPr lang="en" sz="1000">
-                <a:solidFill>
-                  <a:srgbClr val="CCCCCC"/>
-                </a:solidFill>
-                <a:highlight>
-                  <a:srgbClr val="1F1F1F"/>
-                </a:highlight>
-                <a:latin typeface="Consolas"/>
-                <a:ea typeface="Consolas"/>
-                <a:cs typeface="Consolas"/>
-                <a:sym typeface="Consolas"/>
-              </a:rPr>
-              <a:t>=</a:t>
-            </a:r>
-            <a:r>
-              <a:rPr lang="en" sz="1000">
-                <a:solidFill>
-                  <a:srgbClr val="CE9178"/>
-                </a:solidFill>
-                <a:highlight>
-                  <a:srgbClr val="1F1F1F"/>
-                </a:highlight>
-                <a:latin typeface="Consolas"/>
-                <a:ea typeface="Consolas"/>
-                <a:cs typeface="Consolas"/>
-                <a:sym typeface="Consolas"/>
-              </a:rPr>
-              <a:t>"skeleton"</a:t>
-            </a:r>
-            <a:r>
-              <a:rPr lang="en" sz="1000">
-                <a:solidFill>
-                  <a:srgbClr val="CCCCCC"/>
-                </a:solidFill>
-                <a:highlight>
-                  <a:srgbClr val="1F1F1F"/>
-                </a:highlight>
-                <a:latin typeface="Consolas"/>
-                <a:ea typeface="Consolas"/>
-                <a:cs typeface="Consolas"/>
-                <a:sym typeface="Consolas"/>
-              </a:rPr>
-              <a:t> </a:t>
-            </a:r>
-            <a:r>
-              <a:rPr lang="en" sz="1000">
-                <a:solidFill>
-                  <a:srgbClr val="9CDCFE"/>
-                </a:solidFill>
-                <a:highlight>
-                  <a:srgbClr val="1F1F1F"/>
-                </a:highlight>
-                <a:latin typeface="Consolas"/>
-                <a:ea typeface="Consolas"/>
-                <a:cs typeface="Consolas"/>
-                <a:sym typeface="Consolas"/>
-              </a:rPr>
-              <a:t>width</a:t>
-            </a:r>
-            <a:r>
-              <a:rPr lang="en" sz="1000">
-                <a:solidFill>
-                  <a:srgbClr val="CCCCCC"/>
-                </a:solidFill>
-                <a:highlight>
-                  <a:srgbClr val="1F1F1F"/>
-                </a:highlight>
-                <a:latin typeface="Consolas"/>
-                <a:ea typeface="Consolas"/>
-                <a:cs typeface="Consolas"/>
-                <a:sym typeface="Consolas"/>
-              </a:rPr>
-              <a:t>=</a:t>
-            </a:r>
-            <a:r>
-              <a:rPr lang="en" sz="1000">
-                <a:solidFill>
-                  <a:srgbClr val="CE9178"/>
-                </a:solidFill>
-                <a:highlight>
-                  <a:srgbClr val="1F1F1F"/>
-                </a:highlight>
-                <a:latin typeface="Consolas"/>
-                <a:ea typeface="Consolas"/>
-                <a:cs typeface="Consolas"/>
-                <a:sym typeface="Consolas"/>
-              </a:rPr>
-              <a:t>"16"</a:t>
-            </a:r>
-            <a:r>
-              <a:rPr lang="en" sz="1000">
-                <a:solidFill>
-                  <a:srgbClr val="CCCCCC"/>
-                </a:solidFill>
-                <a:highlight>
-                  <a:srgbClr val="1F1F1F"/>
-                </a:highlight>
-                <a:latin typeface="Consolas"/>
-                <a:ea typeface="Consolas"/>
-                <a:cs typeface="Consolas"/>
-                <a:sym typeface="Consolas"/>
-              </a:rPr>
-              <a:t> </a:t>
-            </a:r>
-            <a:r>
-              <a:rPr lang="en" sz="1000">
-                <a:solidFill>
-                  <a:srgbClr val="9CDCFE"/>
-                </a:solidFill>
-                <a:highlight>
-                  <a:srgbClr val="1F1F1F"/>
-                </a:highlight>
-                <a:latin typeface="Consolas"/>
-                <a:ea typeface="Consolas"/>
-                <a:cs typeface="Consolas"/>
-                <a:sym typeface="Consolas"/>
-              </a:rPr>
-              <a:t>height</a:t>
-            </a:r>
-            <a:r>
-              <a:rPr lang="en" sz="1000">
-                <a:solidFill>
-                  <a:srgbClr val="CCCCCC"/>
-                </a:solidFill>
-                <a:highlight>
-                  <a:srgbClr val="1F1F1F"/>
-                </a:highlight>
-                <a:latin typeface="Consolas"/>
-                <a:ea typeface="Consolas"/>
-                <a:cs typeface="Consolas"/>
-                <a:sym typeface="Consolas"/>
-              </a:rPr>
-              <a:t>=</a:t>
-            </a:r>
-            <a:r>
-              <a:rPr lang="en" sz="1000">
-                <a:solidFill>
-                  <a:srgbClr val="CE9178"/>
-                </a:solidFill>
-                <a:highlight>
-                  <a:srgbClr val="1F1F1F"/>
-                </a:highlight>
-                <a:latin typeface="Consolas"/>
-                <a:ea typeface="Consolas"/>
-                <a:cs typeface="Consolas"/>
-                <a:sym typeface="Consolas"/>
-              </a:rPr>
-              <a:t>"16"</a:t>
-            </a:r>
-            <a:r>
-              <a:rPr lang="en" sz="1000">
-                <a:solidFill>
-                  <a:srgbClr val="CCCCCC"/>
-                </a:solidFill>
-                <a:highlight>
-                  <a:srgbClr val="1F1F1F"/>
-                </a:highlight>
-                <a:latin typeface="Consolas"/>
-                <a:ea typeface="Consolas"/>
-                <a:cs typeface="Consolas"/>
-                <a:sym typeface="Consolas"/>
-              </a:rPr>
-              <a:t> </a:t>
-            </a:r>
-            <a:r>
-              <a:rPr lang="en" sz="1000">
-                <a:solidFill>
-                  <a:srgbClr val="9CDCFE"/>
-                </a:solidFill>
-                <a:highlight>
-                  <a:srgbClr val="1F1F1F"/>
-                </a:highlight>
-                <a:latin typeface="Consolas"/>
-                <a:ea typeface="Consolas"/>
-                <a:cs typeface="Consolas"/>
-                <a:sym typeface="Consolas"/>
-              </a:rPr>
-              <a:t>walkSpeed</a:t>
-            </a:r>
-            <a:r>
-              <a:rPr lang="en" sz="1000">
-                <a:solidFill>
-                  <a:srgbClr val="CCCCCC"/>
-                </a:solidFill>
-                <a:highlight>
-                  <a:srgbClr val="1F1F1F"/>
-                </a:highlight>
-                <a:latin typeface="Consolas"/>
-                <a:ea typeface="Consolas"/>
-                <a:cs typeface="Consolas"/>
-                <a:sym typeface="Consolas"/>
-              </a:rPr>
-              <a:t>=</a:t>
-            </a:r>
-            <a:r>
-              <a:rPr lang="en" sz="1000">
-                <a:solidFill>
-                  <a:srgbClr val="CE9178"/>
-                </a:solidFill>
-                <a:highlight>
-                  <a:srgbClr val="1F1F1F"/>
-                </a:highlight>
-                <a:latin typeface="Consolas"/>
-                <a:ea typeface="Consolas"/>
-                <a:cs typeface="Consolas"/>
-                <a:sym typeface="Consolas"/>
-              </a:rPr>
-              <a:t>"20"</a:t>
-            </a:r>
-            <a:r>
-              <a:rPr lang="en" sz="1000">
-                <a:solidFill>
-                  <a:srgbClr val="CCCCCC"/>
-                </a:solidFill>
-                <a:highlight>
-                  <a:srgbClr val="1F1F1F"/>
-                </a:highlight>
-                <a:latin typeface="Consolas"/>
-                <a:ea typeface="Consolas"/>
-                <a:cs typeface="Consolas"/>
-                <a:sym typeface="Consolas"/>
-              </a:rPr>
-              <a:t> </a:t>
-            </a:r>
-            <a:r>
-              <a:rPr lang="en" sz="1000">
-                <a:solidFill>
-                  <a:srgbClr val="9CDCFE"/>
-                </a:solidFill>
-                <a:highlight>
-                  <a:srgbClr val="1F1F1F"/>
-                </a:highlight>
-                <a:latin typeface="Consolas"/>
-                <a:ea typeface="Consolas"/>
-                <a:cs typeface="Consolas"/>
-                <a:sym typeface="Consolas"/>
-              </a:rPr>
-              <a:t>health</a:t>
-            </a:r>
-            <a:r>
-              <a:rPr lang="en" sz="1000">
-                <a:solidFill>
-                  <a:srgbClr val="CCCCCC"/>
-                </a:solidFill>
-                <a:highlight>
-                  <a:srgbClr val="1F1F1F"/>
-                </a:highlight>
-                <a:latin typeface="Consolas"/>
-                <a:ea typeface="Consolas"/>
-                <a:cs typeface="Consolas"/>
-                <a:sym typeface="Consolas"/>
-              </a:rPr>
-              <a:t>=</a:t>
-            </a:r>
-            <a:r>
-              <a:rPr lang="en" sz="1000">
-                <a:solidFill>
-                  <a:srgbClr val="CE9178"/>
-                </a:solidFill>
-                <a:highlight>
-                  <a:srgbClr val="1F1F1F"/>
-                </a:highlight>
-                <a:latin typeface="Consolas"/>
-                <a:ea typeface="Consolas"/>
-                <a:cs typeface="Consolas"/>
-                <a:sym typeface="Consolas"/>
-              </a:rPr>
-              <a:t>"1"</a:t>
-            </a:r>
-            <a:r>
-              <a:rPr lang="en" sz="1000">
-                <a:solidFill>
-                  <a:srgbClr val="808080"/>
-                </a:solidFill>
-                <a:highlight>
-                  <a:srgbClr val="1F1F1F"/>
-                </a:highlight>
-                <a:latin typeface="Consolas"/>
-                <a:ea typeface="Consolas"/>
-                <a:cs typeface="Consolas"/>
-                <a:sym typeface="Consolas"/>
-              </a:rPr>
-              <a:t>&gt;</a:t>
-            </a:r>
-            <a:endParaRPr sz="1000">
-              <a:solidFill>
-                <a:srgbClr val="808080"/>
-              </a:solidFill>
-              <a:highlight>
-                <a:srgbClr val="1F1F1F"/>
-              </a:highlight>
-              <a:latin typeface="Consolas"/>
-              <a:ea typeface="Consolas"/>
-              <a:cs typeface="Consolas"/>
-              <a:sym typeface="Consolas"/>
-            </a:endParaRPr>
-          </a:p>
-          <a:p>
-            <a:pPr indent="0" lvl="0" marL="0" rtl="0" algn="l">
-              <a:lnSpc>
-                <a:spcPct val="157500"/>
-              </a:lnSpc>
-              <a:spcBef>
-                <a:spcPts val="0"/>
-              </a:spcBef>
-              <a:spcAft>
-                <a:spcPts val="0"/>
-              </a:spcAft>
-              <a:buNone/>
-            </a:pPr>
-            <a:r>
-              <a:rPr lang="en" sz="1000">
-                <a:solidFill>
-                  <a:srgbClr val="CCCCCC"/>
-                </a:solidFill>
-                <a:highlight>
-                  <a:srgbClr val="1F1F1F"/>
-                </a:highlight>
-                <a:latin typeface="Consolas"/>
-                <a:ea typeface="Consolas"/>
-                <a:cs typeface="Consolas"/>
-                <a:sym typeface="Consolas"/>
-              </a:rPr>
-              <a:t>  </a:t>
-            </a:r>
-            <a:r>
-              <a:rPr lang="en" sz="1000">
-                <a:solidFill>
-                  <a:srgbClr val="808080"/>
-                </a:solidFill>
-                <a:highlight>
-                  <a:srgbClr val="1F1F1F"/>
-                </a:highlight>
-                <a:latin typeface="Consolas"/>
-                <a:ea typeface="Consolas"/>
-                <a:cs typeface="Consolas"/>
-                <a:sym typeface="Consolas"/>
-              </a:rPr>
-              <a:t>&lt;</a:t>
-            </a:r>
-            <a:r>
-              <a:rPr lang="en" sz="1000">
-                <a:solidFill>
-                  <a:srgbClr val="569CD6"/>
-                </a:solidFill>
-                <a:highlight>
-                  <a:srgbClr val="1F1F1F"/>
-                </a:highlight>
-                <a:latin typeface="Consolas"/>
-                <a:ea typeface="Consolas"/>
-                <a:cs typeface="Consolas"/>
-                <a:sym typeface="Consolas"/>
-              </a:rPr>
-              <a:t>Animation</a:t>
-            </a:r>
-            <a:r>
-              <a:rPr lang="en" sz="1000">
-                <a:solidFill>
-                  <a:srgbClr val="CCCCCC"/>
-                </a:solidFill>
-                <a:highlight>
-                  <a:srgbClr val="1F1F1F"/>
-                </a:highlight>
-                <a:latin typeface="Consolas"/>
-                <a:ea typeface="Consolas"/>
-                <a:cs typeface="Consolas"/>
-                <a:sym typeface="Consolas"/>
-              </a:rPr>
-              <a:t> </a:t>
-            </a:r>
-            <a:r>
-              <a:rPr lang="en" sz="1000">
-                <a:solidFill>
-                  <a:srgbClr val="9CDCFE"/>
-                </a:solidFill>
-                <a:highlight>
-                  <a:srgbClr val="1F1F1F"/>
-                </a:highlight>
-                <a:latin typeface="Consolas"/>
-                <a:ea typeface="Consolas"/>
-                <a:cs typeface="Consolas"/>
-                <a:sym typeface="Consolas"/>
-              </a:rPr>
-              <a:t>name</a:t>
-            </a:r>
-            <a:r>
-              <a:rPr lang="en" sz="1000">
-                <a:solidFill>
-                  <a:srgbClr val="CCCCCC"/>
-                </a:solidFill>
-                <a:highlight>
-                  <a:srgbClr val="1F1F1F"/>
-                </a:highlight>
-                <a:latin typeface="Consolas"/>
-                <a:ea typeface="Consolas"/>
-                <a:cs typeface="Consolas"/>
-                <a:sym typeface="Consolas"/>
-              </a:rPr>
-              <a:t>=</a:t>
-            </a:r>
-            <a:r>
-              <a:rPr lang="en" sz="1000">
-                <a:solidFill>
-                  <a:srgbClr val="CE9178"/>
-                </a:solidFill>
-                <a:highlight>
-                  <a:srgbClr val="1F1F1F"/>
-                </a:highlight>
-                <a:latin typeface="Consolas"/>
-                <a:ea typeface="Consolas"/>
-                <a:cs typeface="Consolas"/>
-                <a:sym typeface="Consolas"/>
-              </a:rPr>
-              <a:t>"walk-down"</a:t>
-            </a:r>
-            <a:r>
-              <a:rPr lang="en" sz="1000">
-                <a:solidFill>
-                  <a:srgbClr val="CCCCCC"/>
-                </a:solidFill>
-                <a:highlight>
-                  <a:srgbClr val="1F1F1F"/>
-                </a:highlight>
-                <a:latin typeface="Consolas"/>
-                <a:ea typeface="Consolas"/>
-                <a:cs typeface="Consolas"/>
-                <a:sym typeface="Consolas"/>
-              </a:rPr>
-              <a:t>  </a:t>
-            </a:r>
-            <a:r>
-              <a:rPr lang="en" sz="1000">
-                <a:solidFill>
-                  <a:srgbClr val="9CDCFE"/>
-                </a:solidFill>
-                <a:highlight>
-                  <a:srgbClr val="1F1F1F"/>
-                </a:highlight>
-                <a:latin typeface="Consolas"/>
-                <a:ea typeface="Consolas"/>
-                <a:cs typeface="Consolas"/>
-                <a:sym typeface="Consolas"/>
-              </a:rPr>
-              <a:t>frames</a:t>
-            </a:r>
-            <a:r>
-              <a:rPr lang="en" sz="1000">
-                <a:solidFill>
-                  <a:srgbClr val="CCCCCC"/>
-                </a:solidFill>
-                <a:highlight>
-                  <a:srgbClr val="1F1F1F"/>
-                </a:highlight>
-                <a:latin typeface="Consolas"/>
-                <a:ea typeface="Consolas"/>
-                <a:cs typeface="Consolas"/>
-                <a:sym typeface="Consolas"/>
-              </a:rPr>
-              <a:t>=</a:t>
-            </a:r>
-            <a:r>
-              <a:rPr lang="en" sz="1000">
-                <a:solidFill>
-                  <a:srgbClr val="CE9178"/>
-                </a:solidFill>
-                <a:highlight>
-                  <a:srgbClr val="1F1F1F"/>
-                </a:highlight>
-                <a:latin typeface="Consolas"/>
-                <a:ea typeface="Consolas"/>
-                <a:cs typeface="Consolas"/>
-                <a:sym typeface="Consolas"/>
-              </a:rPr>
-              <a:t>"9,10,11,10"</a:t>
-            </a:r>
-            <a:r>
-              <a:rPr lang="en" sz="1000">
-                <a:solidFill>
-                  <a:srgbClr val="CCCCCC"/>
-                </a:solidFill>
-                <a:highlight>
-                  <a:srgbClr val="1F1F1F"/>
-                </a:highlight>
-                <a:latin typeface="Consolas"/>
-                <a:ea typeface="Consolas"/>
-                <a:cs typeface="Consolas"/>
-                <a:sym typeface="Consolas"/>
-              </a:rPr>
-              <a:t>   </a:t>
-            </a:r>
-            <a:r>
-              <a:rPr lang="en" sz="1000">
-                <a:solidFill>
-                  <a:srgbClr val="9CDCFE"/>
-                </a:solidFill>
-                <a:highlight>
-                  <a:srgbClr val="1F1F1F"/>
-                </a:highlight>
-                <a:latin typeface="Consolas"/>
-                <a:ea typeface="Consolas"/>
-                <a:cs typeface="Consolas"/>
-                <a:sym typeface="Consolas"/>
-              </a:rPr>
-              <a:t>interval</a:t>
-            </a:r>
-            <a:r>
-              <a:rPr lang="en" sz="1000">
-                <a:solidFill>
-                  <a:srgbClr val="CCCCCC"/>
-                </a:solidFill>
-                <a:highlight>
-                  <a:srgbClr val="1F1F1F"/>
-                </a:highlight>
-                <a:latin typeface="Consolas"/>
-                <a:ea typeface="Consolas"/>
-                <a:cs typeface="Consolas"/>
-                <a:sym typeface="Consolas"/>
-              </a:rPr>
-              <a:t>=</a:t>
-            </a:r>
-            <a:r>
-              <a:rPr lang="en" sz="1000">
-                <a:solidFill>
-                  <a:srgbClr val="CE9178"/>
-                </a:solidFill>
-                <a:highlight>
-                  <a:srgbClr val="1F1F1F"/>
-                </a:highlight>
-                <a:latin typeface="Consolas"/>
-                <a:ea typeface="Consolas"/>
-                <a:cs typeface="Consolas"/>
-                <a:sym typeface="Consolas"/>
-              </a:rPr>
-              <a:t>"0.2"</a:t>
-            </a:r>
-            <a:r>
-              <a:rPr lang="en" sz="1000">
-                <a:solidFill>
-                  <a:srgbClr val="CCCCCC"/>
-                </a:solidFill>
-                <a:highlight>
-                  <a:srgbClr val="1F1F1F"/>
-                </a:highlight>
-                <a:latin typeface="Consolas"/>
-                <a:ea typeface="Consolas"/>
-                <a:cs typeface="Consolas"/>
-                <a:sym typeface="Consolas"/>
-              </a:rPr>
-              <a:t> </a:t>
-            </a:r>
-            <a:r>
-              <a:rPr lang="en" sz="1000">
-                <a:solidFill>
-                  <a:srgbClr val="808080"/>
-                </a:solidFill>
-                <a:highlight>
-                  <a:srgbClr val="1F1F1F"/>
-                </a:highlight>
-                <a:latin typeface="Consolas"/>
-                <a:ea typeface="Consolas"/>
-                <a:cs typeface="Consolas"/>
-                <a:sym typeface="Consolas"/>
-              </a:rPr>
-              <a:t>/&gt;</a:t>
-            </a:r>
-            <a:endParaRPr sz="1000">
-              <a:solidFill>
-                <a:srgbClr val="808080"/>
-              </a:solidFill>
-              <a:highlight>
-                <a:srgbClr val="1F1F1F"/>
-              </a:highlight>
-              <a:latin typeface="Consolas"/>
-              <a:ea typeface="Consolas"/>
-              <a:cs typeface="Consolas"/>
-              <a:sym typeface="Consolas"/>
-            </a:endParaRPr>
-          </a:p>
-          <a:p>
-            <a:pPr indent="0" lvl="0" marL="0" rtl="0" algn="l">
-              <a:lnSpc>
-                <a:spcPct val="157500"/>
-              </a:lnSpc>
-              <a:spcBef>
-                <a:spcPts val="0"/>
-              </a:spcBef>
-              <a:spcAft>
-                <a:spcPts val="0"/>
-              </a:spcAft>
-              <a:buNone/>
-            </a:pPr>
-            <a:r>
-              <a:rPr lang="en" sz="1000">
-                <a:solidFill>
-                  <a:srgbClr val="CCCCCC"/>
-                </a:solidFill>
-                <a:highlight>
-                  <a:srgbClr val="1F1F1F"/>
-                </a:highlight>
-                <a:latin typeface="Consolas"/>
-                <a:ea typeface="Consolas"/>
-                <a:cs typeface="Consolas"/>
-                <a:sym typeface="Consolas"/>
-              </a:rPr>
-              <a:t>  </a:t>
-            </a:r>
-            <a:r>
-              <a:rPr lang="en" sz="1000">
-                <a:solidFill>
-                  <a:srgbClr val="808080"/>
-                </a:solidFill>
-                <a:highlight>
-                  <a:srgbClr val="1F1F1F"/>
-                </a:highlight>
-                <a:latin typeface="Consolas"/>
-                <a:ea typeface="Consolas"/>
-                <a:cs typeface="Consolas"/>
-                <a:sym typeface="Consolas"/>
-              </a:rPr>
-              <a:t>&lt;</a:t>
-            </a:r>
-            <a:r>
-              <a:rPr lang="en" sz="1000">
-                <a:solidFill>
-                  <a:srgbClr val="569CD6"/>
-                </a:solidFill>
-                <a:highlight>
-                  <a:srgbClr val="1F1F1F"/>
-                </a:highlight>
-                <a:latin typeface="Consolas"/>
-                <a:ea typeface="Consolas"/>
-                <a:cs typeface="Consolas"/>
-                <a:sym typeface="Consolas"/>
-              </a:rPr>
-              <a:t>Animation</a:t>
-            </a:r>
-            <a:r>
-              <a:rPr lang="en" sz="1000">
-                <a:solidFill>
-                  <a:srgbClr val="CCCCCC"/>
-                </a:solidFill>
-                <a:highlight>
-                  <a:srgbClr val="1F1F1F"/>
-                </a:highlight>
-                <a:latin typeface="Consolas"/>
-                <a:ea typeface="Consolas"/>
-                <a:cs typeface="Consolas"/>
-                <a:sym typeface="Consolas"/>
-              </a:rPr>
-              <a:t> </a:t>
-            </a:r>
-            <a:r>
-              <a:rPr lang="en" sz="1000">
-                <a:solidFill>
-                  <a:srgbClr val="9CDCFE"/>
-                </a:solidFill>
-                <a:highlight>
-                  <a:srgbClr val="1F1F1F"/>
-                </a:highlight>
-                <a:latin typeface="Consolas"/>
-                <a:ea typeface="Consolas"/>
-                <a:cs typeface="Consolas"/>
-                <a:sym typeface="Consolas"/>
-              </a:rPr>
-              <a:t>name</a:t>
-            </a:r>
-            <a:r>
-              <a:rPr lang="en" sz="1000">
-                <a:solidFill>
-                  <a:srgbClr val="CCCCCC"/>
-                </a:solidFill>
-                <a:highlight>
-                  <a:srgbClr val="1F1F1F"/>
-                </a:highlight>
-                <a:latin typeface="Consolas"/>
-                <a:ea typeface="Consolas"/>
-                <a:cs typeface="Consolas"/>
-                <a:sym typeface="Consolas"/>
-              </a:rPr>
-              <a:t>=</a:t>
-            </a:r>
-            <a:r>
-              <a:rPr lang="en" sz="1000">
-                <a:solidFill>
-                  <a:srgbClr val="CE9178"/>
-                </a:solidFill>
-                <a:highlight>
-                  <a:srgbClr val="1F1F1F"/>
-                </a:highlight>
-                <a:latin typeface="Consolas"/>
-                <a:ea typeface="Consolas"/>
-                <a:cs typeface="Consolas"/>
-                <a:sym typeface="Consolas"/>
-              </a:rPr>
-              <a:t>"idle-down"</a:t>
-            </a:r>
-            <a:r>
-              <a:rPr lang="en" sz="1000">
-                <a:solidFill>
-                  <a:srgbClr val="CCCCCC"/>
-                </a:solidFill>
-                <a:highlight>
-                  <a:srgbClr val="1F1F1F"/>
-                </a:highlight>
-                <a:latin typeface="Consolas"/>
-                <a:ea typeface="Consolas"/>
-                <a:cs typeface="Consolas"/>
-                <a:sym typeface="Consolas"/>
-              </a:rPr>
-              <a:t>  </a:t>
-            </a:r>
-            <a:r>
-              <a:rPr lang="en" sz="1000">
-                <a:solidFill>
-                  <a:srgbClr val="9CDCFE"/>
-                </a:solidFill>
-                <a:highlight>
-                  <a:srgbClr val="1F1F1F"/>
-                </a:highlight>
-                <a:latin typeface="Consolas"/>
-                <a:ea typeface="Consolas"/>
-                <a:cs typeface="Consolas"/>
-                <a:sym typeface="Consolas"/>
-              </a:rPr>
-              <a:t>frames</a:t>
-            </a:r>
-            <a:r>
-              <a:rPr lang="en" sz="1000">
-                <a:solidFill>
-                  <a:srgbClr val="CCCCCC"/>
-                </a:solidFill>
-                <a:highlight>
-                  <a:srgbClr val="1F1F1F"/>
-                </a:highlight>
-                <a:latin typeface="Consolas"/>
-                <a:ea typeface="Consolas"/>
-                <a:cs typeface="Consolas"/>
-                <a:sym typeface="Consolas"/>
-              </a:rPr>
-              <a:t>=</a:t>
-            </a:r>
-            <a:r>
-              <a:rPr lang="en" sz="1000">
-                <a:solidFill>
-                  <a:srgbClr val="CE9178"/>
-                </a:solidFill>
-                <a:highlight>
-                  <a:srgbClr val="1F1F1F"/>
-                </a:highlight>
-                <a:latin typeface="Consolas"/>
-                <a:ea typeface="Consolas"/>
-                <a:cs typeface="Consolas"/>
-                <a:sym typeface="Consolas"/>
-              </a:rPr>
-              <a:t>"10"</a:t>
-            </a:r>
-            <a:r>
-              <a:rPr lang="en" sz="1000">
-                <a:solidFill>
-                  <a:srgbClr val="CCCCCC"/>
-                </a:solidFill>
-                <a:highlight>
-                  <a:srgbClr val="1F1F1F"/>
-                </a:highlight>
-                <a:latin typeface="Consolas"/>
-                <a:ea typeface="Consolas"/>
-                <a:cs typeface="Consolas"/>
-                <a:sym typeface="Consolas"/>
-              </a:rPr>
-              <a:t>           </a:t>
-            </a:r>
-            <a:r>
-              <a:rPr lang="en" sz="1000">
-                <a:solidFill>
-                  <a:srgbClr val="9CDCFE"/>
-                </a:solidFill>
-                <a:highlight>
-                  <a:srgbClr val="1F1F1F"/>
-                </a:highlight>
-                <a:latin typeface="Consolas"/>
-                <a:ea typeface="Consolas"/>
-                <a:cs typeface="Consolas"/>
-                <a:sym typeface="Consolas"/>
-              </a:rPr>
-              <a:t>interval</a:t>
-            </a:r>
-            <a:r>
-              <a:rPr lang="en" sz="1000">
-                <a:solidFill>
-                  <a:srgbClr val="CCCCCC"/>
-                </a:solidFill>
-                <a:highlight>
-                  <a:srgbClr val="1F1F1F"/>
-                </a:highlight>
-                <a:latin typeface="Consolas"/>
-                <a:ea typeface="Consolas"/>
-                <a:cs typeface="Consolas"/>
-                <a:sym typeface="Consolas"/>
-              </a:rPr>
-              <a:t>=</a:t>
-            </a:r>
-            <a:r>
-              <a:rPr lang="en" sz="1000">
-                <a:solidFill>
-                  <a:srgbClr val="CE9178"/>
-                </a:solidFill>
-                <a:highlight>
-                  <a:srgbClr val="1F1F1F"/>
-                </a:highlight>
-                <a:latin typeface="Consolas"/>
-                <a:ea typeface="Consolas"/>
-                <a:cs typeface="Consolas"/>
-                <a:sym typeface="Consolas"/>
-              </a:rPr>
-              <a:t>"0.2"</a:t>
-            </a:r>
-            <a:r>
-              <a:rPr lang="en" sz="1000">
-                <a:solidFill>
-                  <a:srgbClr val="CCCCCC"/>
-                </a:solidFill>
-                <a:highlight>
-                  <a:srgbClr val="1F1F1F"/>
-                </a:highlight>
-                <a:latin typeface="Consolas"/>
-                <a:ea typeface="Consolas"/>
-                <a:cs typeface="Consolas"/>
-                <a:sym typeface="Consolas"/>
-              </a:rPr>
-              <a:t> </a:t>
-            </a:r>
-            <a:r>
-              <a:rPr lang="en" sz="1000">
-                <a:solidFill>
-                  <a:srgbClr val="808080"/>
-                </a:solidFill>
-                <a:highlight>
-                  <a:srgbClr val="1F1F1F"/>
-                </a:highlight>
-                <a:latin typeface="Consolas"/>
-                <a:ea typeface="Consolas"/>
-                <a:cs typeface="Consolas"/>
-                <a:sym typeface="Consolas"/>
-              </a:rPr>
-              <a:t>/&gt;</a:t>
-            </a:r>
-            <a:endParaRPr sz="1000">
-              <a:solidFill>
-                <a:srgbClr val="808080"/>
-              </a:solidFill>
-              <a:highlight>
-                <a:srgbClr val="1F1F1F"/>
-              </a:highlight>
-              <a:latin typeface="Consolas"/>
-              <a:ea typeface="Consolas"/>
-              <a:cs typeface="Consolas"/>
-              <a:sym typeface="Consolas"/>
-            </a:endParaRPr>
-          </a:p>
-          <a:p>
-            <a:pPr indent="0" lvl="0" marL="0" rtl="0" algn="l">
-              <a:lnSpc>
-                <a:spcPct val="157500"/>
-              </a:lnSpc>
-              <a:spcBef>
-                <a:spcPts val="0"/>
-              </a:spcBef>
-              <a:spcAft>
-                <a:spcPts val="0"/>
-              </a:spcAft>
-              <a:buNone/>
-            </a:pPr>
-            <a:r>
-              <a:rPr lang="en" sz="1000">
-                <a:solidFill>
-                  <a:srgbClr val="808080"/>
-                </a:solidFill>
-                <a:highlight>
-                  <a:srgbClr val="1F1F1F"/>
-                </a:highlight>
-                <a:latin typeface="Consolas"/>
-                <a:ea typeface="Consolas"/>
-                <a:cs typeface="Consolas"/>
-                <a:sym typeface="Consolas"/>
-              </a:rPr>
-              <a:t>&lt;/</a:t>
-            </a:r>
-            <a:r>
-              <a:rPr lang="en" sz="1000">
-                <a:solidFill>
-                  <a:srgbClr val="569CD6"/>
-                </a:solidFill>
-                <a:highlight>
-                  <a:srgbClr val="1F1F1F"/>
-                </a:highlight>
-                <a:latin typeface="Consolas"/>
-                <a:ea typeface="Consolas"/>
-                <a:cs typeface="Consolas"/>
-                <a:sym typeface="Consolas"/>
-              </a:rPr>
-              <a:t>Enemy</a:t>
-            </a:r>
-            <a:r>
-              <a:rPr lang="en" sz="1000">
-                <a:solidFill>
-                  <a:srgbClr val="808080"/>
-                </a:solidFill>
-                <a:highlight>
-                  <a:srgbClr val="1F1F1F"/>
-                </a:highlight>
-                <a:latin typeface="Consolas"/>
-                <a:ea typeface="Consolas"/>
-                <a:cs typeface="Consolas"/>
-                <a:sym typeface="Consolas"/>
-              </a:rPr>
-              <a:t>&gt;</a:t>
-            </a:r>
-            <a:endParaRPr/>
+              </a:rPr>
+              <a:t>&lt;/Enemy&gt;</a:t>
+            </a:r>
           </a:p>
         </p:txBody>
       </p:sp>
       <p:sp>
         <p:nvSpPr>
-          <p:cNvPr id="238" name="Google Shape;238;p38"/>
+          <p:cNvPr id="238" name="TextBox 237"/>
           <p:cNvSpPr txBox="1"/>
-          <p:nvPr>
-            <p:ph idx="1" type="body"/>
-          </p:nvPr>
+          <p:nvPr/>
         </p:nvSpPr>
         <p:spPr>
           <a:xfrm>
-            <a:off x="311700" y="4321525"/>
-            <a:ext cx="8520600" cy="572700"/>
+            <a:off x="457200" y="2697480"/>
+            <a:ext cx="8229600" cy="548640"/>
           </a:xfrm>
           <a:prstGeom prst="rect">
             <a:avLst/>
           </a:prstGeom>
+          <a:noFill/>
         </p:spPr>
         <p:txBody>
-          <a:bodyPr anchorCtr="0" anchor="t" bIns="91425" lIns="91425" spcFirstLastPara="1" rIns="91425" wrap="square" tIns="91425">
-            <a:normAutofit fontScale="85000"/>
+          <a:bodyPr wrap="square">
+            <a:spAutoFit/>
           </a:bodyPr>
           <a:lstStyle/>
           <a:p>
-            <a:pPr indent="0" lvl="0" marL="0" rtl="0" algn="l">
-              <a:spcBef>
-                <a:spcPts val="0"/>
-              </a:spcBef>
-              <a:spcAft>
-                <a:spcPts val="1200"/>
-              </a:spcAft>
-              <a:buNone/>
-            </a:pPr>
-            <a:r>
-              <a:rPr lang="en">
-                <a:solidFill>
-                  <a:schemeClr val="lt1"/>
-                </a:solidFill>
-              </a:rPr>
-              <a:t>T</a:t>
-            </a:r>
-            <a:r>
-              <a:rPr lang="en" sz="1600">
-                <a:solidFill>
-                  <a:schemeClr val="lt1"/>
-                </a:solidFill>
-              </a:rPr>
-              <a:t>radeoff: typos in XML become runtime errors, not compile errors — the compiler can't catch type="skelton"</a:t>
-            </a:r>
-            <a:endParaRPr>
-              <a:solidFill>
-                <a:schemeClr val="lt1"/>
-              </a:solidFill>
-            </a:endParaRPr>
+            <a:pPr algn="ctr"/>
+            <a:r>
+              <a:rPr sz="1400" b="0" i="0">
+                <a:solidFill>
+                  <a:srgbClr val="9AA3AB"/>
+                </a:solidFill>
+              </a:rPr>
+              <a:t>The definition classes read the XML once; the rest of the code never sees it.</a:t>
+            </a:r>
+          </a:p>
+          <a:p>
+            <a:pPr algn="ctr"/>
+            <a:r>
+              <a:rPr sz="1400" b="0" i="0">
+                <a:solidFill>
+                  <a:srgbClr val="9AA3AB"/>
+                </a:solidFill>
+              </a:rPr>
+              <a:t>GameObject has no if (type == "switch") anywhere.</a:t>
+            </a:r>
+          </a:p>
+        </p:txBody>
+      </p:sp>
+      <p:sp>
+        <p:nvSpPr>
+          <p:cNvPr id="239" name="TextBox 238"/>
+          <p:cNvSpPr txBox="1"/>
+          <p:nvPr/>
+        </p:nvSpPr>
+        <p:spPr>
+          <a:xfrm>
+            <a:off x="457200" y="3429000"/>
+            <a:ext cx="8229600" cy="731520"/>
+          </a:xfrm>
+          <a:prstGeom prst="rect">
+            <a:avLst/>
+          </a:prstGeom>
+          <a:noFill/>
+        </p:spPr>
+        <p:txBody>
+          <a:bodyPr wrap="square">
+            <a:spAutoFit/>
+          </a:bodyPr>
+          <a:lstStyle/>
+          <a:p>
+            <a:pPr algn="ctr"/>
+            <a:r>
+              <a:rPr sz="1700" b="1" i="0">
+                <a:solidFill>
+                  <a:srgbClr val="DEE2E6"/>
+                </a:solidFill>
+              </a:rPr>
+              <a:t>Someone writes type="skelton". When do you find out?</a:t>
+            </a:r>
           </a:p>
         </p:txBody>
       </p:sp>
@@ -22116,7 +22742,7 @@
         <p:spPr>
           <a:xfrm>
             <a:off x="311700" y="885950"/>
-            <a:ext cx="8520600" cy="4023300"/>
+            <a:ext cx="8520600" cy="1673352"/>
           </a:xfrm>
           <a:prstGeom prst="rect">
             <a:avLst/>
@@ -22140,7 +22766,7 @@
             </a:pPr>
             <a:r>
               <a:rPr lang="en"/>
-              <a:t>Start from Zelda7, the finished game</a:t>
+              <a:t>Start from Zelda7. Full instructions are on the course site.</a:t>
             </a:r>
             <a:endParaRPr/>
           </a:p>
@@ -22157,24 +22783,7 @@
             </a:pPr>
             <a:r>
               <a:rPr lang="en"/>
-              <a:t>Make some enemies drop hearts randomly, which heal the player for 2 damage</a:t>
-            </a:r>
-            <a:endParaRPr/>
-          </a:p>
-          <a:p>
-            <a:pPr indent="-317500" lvl="1" marL="914400" rtl="0" algn="l">
-              <a:spcBef>
-                <a:spcPts val="0"/>
-              </a:spcBef>
-              <a:spcAft>
-                <a:spcPts val="0"/>
-              </a:spcAft>
-              <a:buSzPts val="1400"/>
-              <a:buChar char="○"/>
-            </a:pPr>
-            <a:r>
-              <a:rPr lang="en"/>
-              <a:t>I.e. one whole heart</a:t>
+              <a:t>Enemies sometimes drop a heart that heals one whole heart</a:t>
             </a:r>
             <a:endParaRPr/>
           </a:p>
@@ -22191,47 +22800,9 @@
             </a:pPr>
             <a:r>
               <a:rPr lang="en"/>
-              <a:t>Allow the player to lift pots</a:t>
+              <a:t>The player lifts pots (the animations are in the sheet), and carries them</a:t>
             </a:r>
             <a:endParaRPr/>
-          </a:p>
-          <a:p>
-            <a:pPr indent="-317500" lvl="1" marL="914400" rtl="0" algn="l">
-              <a:spcBef>
-                <a:spcPts val="0"/>
-              </a:spcBef>
-              <a:spcAft>
-                <a:spcPts val="0"/>
-              </a:spcAft>
-              <a:buSzPts val="1400"/>
-              <a:buChar char="○"/>
-            </a:pPr>
-            <a:r>
-              <a:rPr lang="en"/>
-              <a:t>Using the animations included in the sp</a:t>
-            </a:r>
-            <a:r>
-              <a:rPr lang="en">
-                <a:solidFill>
-                  <a:schemeClr val="lt1"/>
-                </a:solidFill>
-              </a:rPr>
-              <a:t>rite sheets </a:t>
-            </a:r>
-            <a:r>
-              <a:rPr lang="en" u="sng">
-                <a:solidFill>
-                  <a:schemeClr val="hlink"/>
-                </a:solidFill>
-                <a:hlinkClick r:id="rId3"/>
-              </a:rPr>
-              <a:t>here</a:t>
-            </a:r>
-            <a:endParaRPr>
-              <a:solidFill>
-                <a:schemeClr val="lt1"/>
-              </a:solidFill>
-            </a:endParaRPr>
           </a:p>
           <a:p>
             <a:pPr indent="-330200" lvl="0" marL="457200" rtl="0" algn="l">
@@ -22246,58 +22817,7 @@
             </a:pPr>
             <a:r>
               <a:rPr lang="en"/>
-              <a:t>Pots should stick to the player while they are carrying them</a:t>
-            </a:r>
-            <a:endParaRPr/>
-          </a:p>
-          <a:p>
-            <a:pPr indent="-317500" lvl="1" marL="914400" rtl="0" algn="l">
-              <a:spcBef>
-                <a:spcPts val="0"/>
-              </a:spcBef>
-              <a:spcAft>
-                <a:spcPts val="0"/>
-              </a:spcAft>
-              <a:buSzPts val="1400"/>
-              <a:buChar char="○"/>
-            </a:pPr>
-            <a:r>
-              <a:rPr lang="en"/>
-              <a:t>The pot needs to track player position</a:t>
-            </a:r>
-            <a:endParaRPr/>
-          </a:p>
-          <a:p>
-            <a:pPr indent="-330200" lvl="0" marL="457200" rtl="0" algn="l">
-              <a:spcBef>
-                <a:spcPts val="0"/>
-              </a:spcBef>
-              <a:spcAft>
-                <a:spcPts val="0"/>
-              </a:spcAft>
-              <a:buSzPts val="1600"/>
-              <a:buChar char="●"/>
-            </a:pPr>
-            <a:r>
-              <a:rPr lang="en"/>
-              <a:t>Allow the player to throw pots and damage enemies</a:t>
-            </a:r>
-            <a:endParaRPr/>
-          </a:p>
-          <a:p>
-            <a:pPr indent="-317500" lvl="1" marL="914400" rtl="0" algn="l">
-              <a:spcBef>
-                <a:spcPts val="0"/>
-              </a:spcBef>
-              <a:spcAft>
-                <a:spcPts val="0"/>
-              </a:spcAft>
-              <a:buSzPts val="1400"/>
-              <a:buChar char="○"/>
-            </a:pPr>
-            <a:r>
-              <a:rPr lang="en"/>
-              <a:t>If it hits a wall, an enemy, or travels farther than four tiles, destroy it.</a:t>
+              <a:t>Thrown pots damage enemies, and break on walls, enemies or after four tiles</a:t>
             </a:r>
             <a:endParaRPr/>
           </a:p>
@@ -23724,6 +24244,179 @@
 </p:sld>
 </file>
 
+<file path=ppt/slides/slide39.xml><?xml version="1.0" encoding="utf-8"?>
+<p:sld xmlns:a="http://schemas.openxmlformats.org/drawingml/2006/main" xmlns:p="http://schemas.openxmlformats.org/presentationml/2006/main" xmlns:r="http://schemas.openxmlformats.org/officeDocument/2006/relationships">
+  <p:cSld>
+    <p:spTree>
+      <p:nvGrpSpPr>
+        <p:cNvPr id="1" name=""/>
+        <p:cNvGrpSpPr/>
+        <p:nvPr/>
+      </p:nvGrpSpPr>
+      <p:grpSpPr/>
+      <p:sp>
+        <p:nvSpPr>
+          <p:cNvPr id="2" name="Title 1"/>
+          <p:cNvSpPr>
+            <a:spLocks noGrp="1"/>
+          </p:cNvSpPr>
+          <p:nvPr>
+            <p:ph type="title"/>
+          </p:nvPr>
+        </p:nvSpPr>
+        <p:spPr/>
+        <p:txBody>
+          <a:bodyPr/>
+          <a:lstStyle/>
+          <a:p>
+            <a:pPr indent="0" lvl="0" marL="0" rtl="0" algn="l">
+              <a:spcBef>
+                <a:spcPts val="0"/>
+              </a:spcBef>
+              <a:spcAft>
+                <a:spcPts val="0"/>
+              </a:spcAft>
+              <a:buNone/>
+            </a:pPr>
+            <a:r>
+              <a:rPr lang="en"/>
+              <a:t>Check Yourself</a:t>
+            </a:r>
+            <a:endParaRPr/>
+          </a:p>
+        </p:txBody>
+      </p:sp>
+      <p:sp>
+        <p:nvSpPr>
+          <p:cNvPr id="3" name="Text Placeholder 2"/>
+          <p:cNvSpPr>
+            <a:spLocks noGrp="1"/>
+          </p:cNvSpPr>
+          <p:nvPr>
+            <p:ph type="body" idx="1"/>
+          </p:nvPr>
+        </p:nvSpPr>
+        <p:spPr>
+          <a:xfrm>
+            <a:off x="311700" y="885950"/>
+            <a:ext cx="8520600" cy="1719072"/>
+          </a:xfrm>
+        </p:spPr>
+        <p:txBody>
+          <a:bodyPr/>
+          <a:lstStyle/>
+          <a:p>
+            <a:pPr indent="-330200" lvl="0" marL="457200" rtl="0" algn="l">
+              <a:spcBef>
+                <a:spcPts val="0"/>
+              </a:spcBef>
+              <a:spcAft>
+                <a:spcPts val="0"/>
+              </a:spcAft>
+              <a:buSzPts val="1600"/>
+              <a:buChar char="●"/>
+            </a:pPr>
+            <a:r>
+              <a:rPr lang="en"/>
+              <a:t>When does inheritance fit, and when is composition better?</a:t>
+            </a:r>
+            <a:endParaRPr/>
+          </a:p>
+          <a:p>
+            <a:pPr indent="-330200" lvl="0" marL="457200" rtl="0" algn="l">
+              <a:spcBef>
+                <a:spcPts val="0"/>
+              </a:spcBef>
+              <a:spcAft>
+                <a:spcPts val="0"/>
+              </a:spcAft>
+              <a:buSzPts val="1600"/>
+              <a:buChar char="●"/>
+            </a:pPr>
+            <a:r>
+              <a:rPr lang="en"/>
+              <a:t>Why does Observer suit UI code particularly well?</a:t>
+            </a:r>
+            <a:endParaRPr/>
+          </a:p>
+          <a:p>
+            <a:pPr indent="-330200" lvl="0" marL="457200" rtl="0" algn="l">
+              <a:spcBef>
+                <a:spcPts val="0"/>
+              </a:spcBef>
+              <a:spcAft>
+                <a:spcPts val="0"/>
+              </a:spcAft>
+              <a:buSzPts val="1600"/>
+              <a:buChar char="●"/>
+            </a:pPr>
+            <a:r>
+              <a:rPr lang="en"/>
+              <a:t>What is the difference between a delegate and an event in C#?</a:t>
+            </a:r>
+            <a:endParaRPr/>
+          </a:p>
+          <a:p>
+            <a:pPr indent="-330200" lvl="0" marL="457200" rtl="0" algn="l">
+              <a:spcBef>
+                <a:spcPts val="0"/>
+              </a:spcBef>
+              <a:spcAft>
+                <a:spcPts val="0"/>
+              </a:spcAft>
+              <a:buSzPts val="1600"/>
+              <a:buChar char="●"/>
+            </a:pPr>
+            <a:r>
+              <a:rPr lang="en"/>
+              <a:t>What is the cost of data-driven design?</a:t>
+            </a:r>
+            <a:endParaRPr/>
+          </a:p>
+        </p:txBody>
+      </p:sp>
+      <p:sp>
+        <p:nvSpPr>
+          <p:cNvPr id="4" name="TextBox 3"/>
+          <p:cNvSpPr txBox="1"/>
+          <p:nvPr/>
+        </p:nvSpPr>
+        <p:spPr>
+          <a:xfrm>
+            <a:off x="457200" y="3182112"/>
+            <a:ext cx="8229600" cy="457200"/>
+          </a:xfrm>
+          <a:prstGeom prst="rect">
+            <a:avLst/>
+          </a:prstGeom>
+          <a:noFill/>
+        </p:spPr>
+        <p:txBody>
+          <a:bodyPr wrap="square">
+            <a:spAutoFit/>
+          </a:bodyPr>
+          <a:lstStyle/>
+          <a:p>
+            <a:pPr algn="ctr"/>
+            <a:r>
+              <a:rPr sz="1400" b="0" i="0">
+                <a:solidFill>
+                  <a:srgbClr val="9AA3AB"/>
+                </a:solidFill>
+              </a:rPr>
+              <a:t>The answers, and more questions, are on the course site.</a:t>
+            </a:r>
+          </a:p>
+        </p:txBody>
+      </p:sp>
+    </p:spTree>
+  </p:cSld>
+  <p:clrMapOvr>
+    <a:masterClrMapping/>
+  </p:clrMapOvr>
+</p:sld>
+</file>
+
 <file path=ppt/slides/slide4.xml><?xml version="1.0" encoding="utf-8"?>
 <p:sld xmlns:a="http://schemas.openxmlformats.org/drawingml/2006/main" xmlns:r="http://schemas.openxmlformats.org/officeDocument/2006/relationships" xmlns:mc="http://schemas.openxmlformats.org/markup-compatibility/2006" xmlns:mv="urn:schemas-microsoft-com:mac:vml" xmlns:p="http://schemas.openxmlformats.org/presentationml/2006/main" xmlns:c="http://schemas.openxmlformats.org/drawingml/2006/chart" xmlns:dgm="http://schemas.openxmlformats.org/drawingml/2006/diagram" xmlns:o="urn:schemas-microsoft-com:office:office" xmlns:v="urn:schemas-microsoft-com:vml" xmlns:pvml="urn:schemas-microsoft-com:office:powerpoint" xmlns:com="http://schemas.openxmlformats.org/drawingml/2006/compatibility" xmlns:p14="http://schemas.microsoft.com/office/powerpoint/2010/main" xmlns:p15="http://schemas.microsoft.com/office/powerpoint/2012/main" xmlns:ahyp="http://schemas.microsoft.com/office/drawing/2018/hyperlinkcolor">
   <p:cSld>
@@ -24307,7 +25000,7 @@
         <p:spPr>
           <a:xfrm>
             <a:off x="311700" y="885950"/>
-            <a:ext cx="8520600" cy="4023300"/>
+            <a:ext cx="8520600" cy="1289304"/>
           </a:xfrm>
           <a:prstGeom prst="rect">
             <a:avLst/>
@@ -24331,29 +25024,7 @@
             </a:pPr>
             <a:r>
               <a:rPr lang="en"/>
-              <a:t>All Source code for today’s game can be found here:</a:t>
-            </a:r>
-            <a:endParaRPr/>
-          </a:p>
-          <a:p>
-            <a:pPr indent="-317500" lvl="1" marL="914400" rtl="0" algn="l">
-              <a:spcBef>
-                <a:spcPts val="0"/>
-              </a:spcBef>
-              <a:spcAft>
-                <a:spcPts val="0"/>
-              </a:spcAft>
-              <a:buSzPts val="1400"/>
-              <a:buChar char="○"/>
-            </a:pPr>
-            <a:r>
-              <a:rPr lang="en" u="sng">
-                <a:solidFill>
-                  <a:schemeClr val="hlink"/>
-                </a:solidFill>
-                <a:hlinkClick r:id="rId3"/>
-              </a:rPr>
-              <a:t>github.com/Metamate/gar-games (folder 08-zelda)</a:t>
+              <a:t>github.com/Metamate/gar-games, folder 08-zelda</a:t>
             </a:r>
             <a:endParaRPr/>
           </a:p>
@@ -24370,7 +25041,7 @@
             </a:pPr>
             <a:r>
               <a:rPr lang="en"/>
-              <a:t>Walkthrough in README.md</a:t>
+              <a:t>Its README: the steps (Zelda0 to Zelda7), a map of the code, how to run it</a:t>
             </a:r>
             <a:endParaRPr/>
           </a:p>
@@ -24387,58 +25058,7 @@
             </a:pPr>
             <a:r>
               <a:rPr lang="en"/>
-              <a:t>The game is built up in steps: Zelda0 → Zelda7</a:t>
-            </a:r>
-            <a:endParaRPr/>
-          </a:p>
-          <a:p>
-            <a:pPr indent="-317500" lvl="1" marL="914400" rtl="0" algn="l">
-              <a:spcBef>
-                <a:spcPts val="0"/>
-              </a:spcBef>
-              <a:spcAft>
-                <a:spcPts val="0"/>
-              </a:spcAft>
-              <a:buSzPts val="1400"/>
-              <a:buChar char="○"/>
-            </a:pPr>
-            <a:r>
-              <a:rPr lang="en"/>
-              <a:t>Each step is a separate project that adds one concept</a:t>
-            </a:r>
-            <a:endParaRPr/>
-          </a:p>
-          <a:p>
-            <a:pPr indent="-317500" lvl="1" marL="914400" rtl="0" algn="l">
-              <a:spcBef>
-                <a:spcPts val="0"/>
-              </a:spcBef>
-              <a:spcAft>
-                <a:spcPts val="0"/>
-              </a:spcAft>
-              <a:buSzPts val="1400"/>
-              <a:buChar char="○"/>
-            </a:pPr>
-            <a:r>
-              <a:rPr lang="en"/>
-              <a:t>Compare neighbouring steps to see exactly what changed</a:t>
-            </a:r>
-            <a:endParaRPr/>
-          </a:p>
-          <a:p>
-            <a:pPr indent="-330200" lvl="0" marL="457200" rtl="0" algn="l">
-              <a:spcBef>
-                <a:spcPts val="0"/>
-              </a:spcBef>
-              <a:spcAft>
-                <a:spcPts val="0"/>
-              </a:spcAft>
-              <a:buSzPts val="1600"/>
-              <a:buChar char="●"/>
-            </a:pPr>
-            <a:r>
-              <a:rPr lang="en"/>
-              <a:t>Zelda7 is the finished game: explore it, and start the exercises from it</a:t>
+              <a:t>The course site: today’s concepts in full, the exercises, and questions to check yourself</a:t>
             </a:r>
             <a:endParaRPr/>
           </a:p>
@@ -25781,7 +26401,7 @@
         <p:spPr>
           <a:xfrm>
             <a:off x="311700" y="885950"/>
-            <a:ext cx="8520600" cy="4023300"/>
+            <a:ext cx="8520600" cy="521208"/>
           </a:xfrm>
           <a:prstGeom prst="rect">
             <a:avLst/>
@@ -25805,94 +26425,513 @@
             </a:pPr>
             <a:r>
               <a:rPr lang="en"/>
-              <a:t>The player and the enemies share an abstract Entity base class</a:t>
+              <a:t>An enemy that flies, one that shoots, one that does both. Where do they go?</a:t>
             </a:r>
             <a:endParaRPr/>
           </a:p>
-          <a:p>
-            <a:pPr indent="-317500" lvl="1" marL="914400" rtl="0" algn="l">
-              <a:spcBef>
-                <a:spcPts val="0"/>
-              </a:spcBef>
-              <a:spcAft>
-                <a:spcPts val="0"/>
-              </a:spcAft>
-              <a:buSzPts val="1400"/>
-              <a:buChar char="○"/>
-            </a:pPr>
-            <a:r>
-              <a:rPr lang="en"/>
-              <a:t>Position, collision box, animations, health, invulnerability, a current state</a:t>
-            </a:r>
-            <a:endParaRPr/>
-          </a:p>
-          <a:p>
-            <a:pPr indent="-330200" lvl="0" marL="457200" rtl="0" algn="l">
-              <a:spcBef>
-                <a:spcPts val="0"/>
-              </a:spcBef>
-              <a:spcAft>
-                <a:spcPts val="0"/>
-              </a:spcAft>
-              <a:buSzPts val="1600"/>
-              <a:buChar char="●"/>
-            </a:pPr>
-            <a:r>
-              <a:rPr lang="en"/>
-              <a:t>Inheritance works while there is one axis of variation</a:t>
-            </a:r>
-            <a:endParaRPr/>
-          </a:p>
-          <a:p>
-            <a:pPr indent="-317500" lvl="1" marL="914400" rtl="0" algn="l">
-              <a:spcBef>
-                <a:spcPts val="0"/>
-              </a:spcBef>
-              <a:spcAft>
-                <a:spcPts val="0"/>
-              </a:spcAft>
-              <a:buSzPts val="1400"/>
-              <a:buChar char="○"/>
-            </a:pPr>
-            <a:r>
-              <a:rPr lang="en"/>
-              <a:t>But an enemy that shoots and flies and explodes?</a:t>
-            </a:r>
-            <a:endParaRPr/>
-          </a:p>
-          <a:p>
-            <a:pPr indent="-330200" lvl="0" marL="457200" rtl="0" algn="l">
-              <a:spcBef>
-                <a:spcPts val="0"/>
-              </a:spcBef>
-              <a:spcAft>
-                <a:spcPts val="0"/>
-              </a:spcAft>
-              <a:buSzPts val="1600"/>
-              <a:buChar char="●"/>
-            </a:pPr>
-            <a:r>
-              <a:rPr lang="en"/>
-              <a:t>Deep hierarchies lead to duplicated code, or a bloated base class</a:t>
-            </a:r>
-            <a:endParaRPr/>
-          </a:p>
-          <a:p>
-            <a:pPr indent="-330200" lvl="0" marL="457200" rtl="0" algn="l">
-              <a:spcBef>
-                <a:spcPts val="0"/>
-              </a:spcBef>
-              <a:spcAft>
-                <a:spcPts val="0"/>
-              </a:spcAft>
-              <a:buSzPts val="1600"/>
-              <a:buChar char="●"/>
-            </a:pPr>
-            <a:r>
-              <a:rPr lang="en"/>
-              <a:t>“Favor object composition over class inheritance” (Gang of Four)</a:t>
-            </a:r>
-            <a:endParaRPr/>
+        </p:txBody>
+      </p:sp>
+      <p:sp>
+        <p:nvSpPr>
+          <p:cNvPr id="251" name="Rounded Rectangle 250"/>
+          <p:cNvSpPr/>
+          <p:nvPr/>
+        </p:nvSpPr>
+        <p:spPr>
+          <a:xfrm>
+            <a:off x="3566160" y="1325880"/>
+            <a:ext cx="2011680" cy="502920"/>
+          </a:xfrm>
+          <a:prstGeom prst="roundRect">
+            <a:avLst>
+              <a:gd name="adj" fmla="val 12000"/>
+            </a:avLst>
+          </a:prstGeom>
+          <a:solidFill>
+            <a:srgbClr val="2E3338"/>
+          </a:solidFill>
+          <a:ln>
+            <a:noFill/>
+          </a:ln>
+          <a:effectLst/>
+        </p:spPr>
+        <p:style>
+          <a:lnRef idx="1">
+            <a:schemeClr val="accent1"/>
+          </a:lnRef>
+          <a:fillRef idx="3">
+            <a:schemeClr val="accent1"/>
+          </a:fillRef>
+          <a:effectRef idx="2">
+            <a:schemeClr val="accent1"/>
+          </a:effectRef>
+          <a:fontRef idx="minor">
+            <a:schemeClr val="lt1"/>
+          </a:fontRef>
+        </p:style>
+        <p:txBody>
+          <a:bodyPr rtlCol="0" anchor="ctr" wrap="square" lIns="73152" rIns="73152"/>
+          <a:lstStyle/>
+          <a:p>
+            <a:pPr algn="ctr"/>
+            <a:r>
+              <a:rPr sz="1500" b="1">
+                <a:solidFill>
+                  <a:srgbClr val="DEE2E6"/>
+                </a:solidFill>
+              </a:rPr>
+              <a:t>Entity</a:t>
+            </a:r>
+          </a:p>
+        </p:txBody>
+      </p:sp>
+      <p:sp>
+        <p:nvSpPr>
+          <p:cNvPr id="252" name="Rounded Rectangle 251"/>
+          <p:cNvSpPr/>
+          <p:nvPr/>
+        </p:nvSpPr>
+        <p:spPr>
+          <a:xfrm>
+            <a:off x="3566160" y="2057400"/>
+            <a:ext cx="2011680" cy="502920"/>
+          </a:xfrm>
+          <a:prstGeom prst="roundRect">
+            <a:avLst>
+              <a:gd name="adj" fmla="val 12000"/>
+            </a:avLst>
+          </a:prstGeom>
+          <a:solidFill>
+            <a:srgbClr val="2E3338"/>
+          </a:solidFill>
+          <a:ln>
+            <a:noFill/>
+          </a:ln>
+          <a:effectLst/>
+        </p:spPr>
+        <p:style>
+          <a:lnRef idx="1">
+            <a:schemeClr val="accent1"/>
+          </a:lnRef>
+          <a:fillRef idx="3">
+            <a:schemeClr val="accent1"/>
+          </a:fillRef>
+          <a:effectRef idx="2">
+            <a:schemeClr val="accent1"/>
+          </a:effectRef>
+          <a:fontRef idx="minor">
+            <a:schemeClr val="lt1"/>
+          </a:fontRef>
+        </p:style>
+        <p:txBody>
+          <a:bodyPr rtlCol="0" anchor="ctr" wrap="square" lIns="73152" rIns="73152"/>
+          <a:lstStyle/>
+          <a:p>
+            <a:pPr algn="ctr"/>
+            <a:r>
+              <a:rPr sz="1500" b="1">
+                <a:solidFill>
+                  <a:srgbClr val="DEE2E6"/>
+                </a:solidFill>
+              </a:rPr>
+              <a:t>Enemy</a:t>
+            </a:r>
+          </a:p>
+        </p:txBody>
+      </p:sp>
+      <p:cxnSp>
+        <p:nvCxnSpPr>
+          <p:cNvPr id="253" name="Connector 252"/>
+          <p:cNvCxnSpPr/>
+          <p:nvPr/>
+        </p:nvCxnSpPr>
+        <p:spPr>
+          <a:xfrm flipV="1">
+            <a:off x="4572000" y="1847088"/>
+            <a:ext cx="0" cy="192024"/>
+          </a:xfrm>
+          <a:prstGeom prst="line">
+            <a:avLst/>
+          </a:prstGeom>
+          <a:ln w="25400">
+            <a:solidFill>
+              <a:srgbClr val="9AA3AB"/>
+            </a:solidFill>
+            <a:tailEnd type="triangle"/>
+          </a:ln>
+        </p:spPr>
+        <p:style>
+          <a:lnRef idx="2">
+            <a:schemeClr val="accent1"/>
+          </a:lnRef>
+          <a:fillRef idx="0">
+            <a:schemeClr val="accent1"/>
+          </a:fillRef>
+          <a:effectRef idx="1">
+            <a:schemeClr val="accent1"/>
+          </a:effectRef>
+          <a:fontRef idx="minor">
+            <a:schemeClr val="tx1"/>
+          </a:fontRef>
+        </p:style>
+      </p:cxnSp>
+      <p:sp>
+        <p:nvSpPr>
+          <p:cNvPr id="254" name="Rounded Rectangle 253"/>
+          <p:cNvSpPr/>
+          <p:nvPr/>
+        </p:nvSpPr>
+        <p:spPr>
+          <a:xfrm>
+            <a:off x="1097280" y="2788920"/>
+            <a:ext cx="2103120" cy="502920"/>
+          </a:xfrm>
+          <a:prstGeom prst="roundRect">
+            <a:avLst>
+              <a:gd name="adj" fmla="val 12000"/>
+            </a:avLst>
+          </a:prstGeom>
+          <a:solidFill>
+            <a:srgbClr val="2E3338"/>
+          </a:solidFill>
+          <a:ln>
+            <a:noFill/>
+          </a:ln>
+          <a:effectLst/>
+        </p:spPr>
+        <p:style>
+          <a:lnRef idx="1">
+            <a:schemeClr val="accent1"/>
+          </a:lnRef>
+          <a:fillRef idx="3">
+            <a:schemeClr val="accent1"/>
+          </a:fillRef>
+          <a:effectRef idx="2">
+            <a:schemeClr val="accent1"/>
+          </a:effectRef>
+          <a:fontRef idx="minor">
+            <a:schemeClr val="lt1"/>
+          </a:fontRef>
+        </p:style>
+        <p:txBody>
+          <a:bodyPr rtlCol="0" anchor="ctr" wrap="square" lIns="73152" rIns="73152"/>
+          <a:lstStyle/>
+          <a:p>
+            <a:pPr algn="ctr"/>
+            <a:r>
+              <a:rPr sz="1400" b="1">
+                <a:solidFill>
+                  <a:srgbClr val="DEE2E6"/>
+                </a:solidFill>
+              </a:rPr>
+              <a:t>FlyingEnemy</a:t>
+            </a:r>
+          </a:p>
+        </p:txBody>
+      </p:sp>
+      <p:cxnSp>
+        <p:nvCxnSpPr>
+          <p:cNvPr id="255" name="Connector 254"/>
+          <p:cNvCxnSpPr/>
+          <p:nvPr/>
+        </p:nvCxnSpPr>
+        <p:spPr>
+          <a:xfrm flipV="1">
+            <a:off x="2148840" y="2578608"/>
+            <a:ext cx="2423160" cy="192024"/>
+          </a:xfrm>
+          <a:prstGeom prst="line">
+            <a:avLst/>
+          </a:prstGeom>
+          <a:ln w="25400">
+            <a:solidFill>
+              <a:srgbClr val="9AA3AB"/>
+            </a:solidFill>
+            <a:tailEnd type="triangle"/>
+          </a:ln>
+        </p:spPr>
+        <p:style>
+          <a:lnRef idx="2">
+            <a:schemeClr val="accent1"/>
+          </a:lnRef>
+          <a:fillRef idx="0">
+            <a:schemeClr val="accent1"/>
+          </a:fillRef>
+          <a:effectRef idx="1">
+            <a:schemeClr val="accent1"/>
+          </a:effectRef>
+          <a:fontRef idx="minor">
+            <a:schemeClr val="tx1"/>
+          </a:fontRef>
+        </p:style>
+      </p:cxnSp>
+      <p:sp>
+        <p:nvSpPr>
+          <p:cNvPr id="256" name="Rounded Rectangle 255"/>
+          <p:cNvSpPr/>
+          <p:nvPr/>
+        </p:nvSpPr>
+        <p:spPr>
+          <a:xfrm>
+            <a:off x="3474720" y="2788920"/>
+            <a:ext cx="2103120" cy="502920"/>
+          </a:xfrm>
+          <a:prstGeom prst="roundRect">
+            <a:avLst>
+              <a:gd name="adj" fmla="val 12000"/>
+            </a:avLst>
+          </a:prstGeom>
+          <a:solidFill>
+            <a:srgbClr val="2E3338"/>
+          </a:solidFill>
+          <a:ln>
+            <a:noFill/>
+          </a:ln>
+          <a:effectLst/>
+        </p:spPr>
+        <p:style>
+          <a:lnRef idx="1">
+            <a:schemeClr val="accent1"/>
+          </a:lnRef>
+          <a:fillRef idx="3">
+            <a:schemeClr val="accent1"/>
+          </a:fillRef>
+          <a:effectRef idx="2">
+            <a:schemeClr val="accent1"/>
+          </a:effectRef>
+          <a:fontRef idx="minor">
+            <a:schemeClr val="lt1"/>
+          </a:fontRef>
+        </p:style>
+        <p:txBody>
+          <a:bodyPr rtlCol="0" anchor="ctr" wrap="square" lIns="73152" rIns="73152"/>
+          <a:lstStyle/>
+          <a:p>
+            <a:pPr algn="ctr"/>
+            <a:r>
+              <a:rPr sz="1400" b="1">
+                <a:solidFill>
+                  <a:srgbClr val="DEE2E6"/>
+                </a:solidFill>
+              </a:rPr>
+              <a:t>ShootingEnemy</a:t>
+            </a:r>
+          </a:p>
+        </p:txBody>
+      </p:sp>
+      <p:cxnSp>
+        <p:nvCxnSpPr>
+          <p:cNvPr id="257" name="Connector 256"/>
+          <p:cNvCxnSpPr/>
+          <p:nvPr/>
+        </p:nvCxnSpPr>
+        <p:spPr>
+          <a:xfrm flipV="1">
+            <a:off x="4526280" y="2578608"/>
+            <a:ext cx="45720" cy="192024"/>
+          </a:xfrm>
+          <a:prstGeom prst="line">
+            <a:avLst/>
+          </a:prstGeom>
+          <a:ln w="25400">
+            <a:solidFill>
+              <a:srgbClr val="9AA3AB"/>
+            </a:solidFill>
+            <a:tailEnd type="triangle"/>
+          </a:ln>
+        </p:spPr>
+        <p:style>
+          <a:lnRef idx="2">
+            <a:schemeClr val="accent1"/>
+          </a:lnRef>
+          <a:fillRef idx="0">
+            <a:schemeClr val="accent1"/>
+          </a:fillRef>
+          <a:effectRef idx="1">
+            <a:schemeClr val="accent1"/>
+          </a:effectRef>
+          <a:fontRef idx="minor">
+            <a:schemeClr val="tx1"/>
+          </a:fontRef>
+        </p:style>
+      </p:cxnSp>
+      <p:sp>
+        <p:nvSpPr>
+          <p:cNvPr id="258" name="Rounded Rectangle 257"/>
+          <p:cNvSpPr/>
+          <p:nvPr/>
+        </p:nvSpPr>
+        <p:spPr>
+          <a:xfrm>
+            <a:off x="5852160" y="2788920"/>
+            <a:ext cx="2103120" cy="502920"/>
+          </a:xfrm>
+          <a:prstGeom prst="roundRect">
+            <a:avLst>
+              <a:gd name="adj" fmla="val 12000"/>
+            </a:avLst>
+          </a:prstGeom>
+          <a:solidFill>
+            <a:srgbClr val="2E3338"/>
+          </a:solidFill>
+          <a:ln>
+            <a:noFill/>
+          </a:ln>
+          <a:effectLst/>
+        </p:spPr>
+        <p:style>
+          <a:lnRef idx="1">
+            <a:schemeClr val="accent1"/>
+          </a:lnRef>
+          <a:fillRef idx="3">
+            <a:schemeClr val="accent1"/>
+          </a:fillRef>
+          <a:effectRef idx="2">
+            <a:schemeClr val="accent1"/>
+          </a:effectRef>
+          <a:fontRef idx="minor">
+            <a:schemeClr val="lt1"/>
+          </a:fontRef>
+        </p:style>
+        <p:txBody>
+          <a:bodyPr rtlCol="0" anchor="ctr" wrap="square" lIns="73152" rIns="73152"/>
+          <a:lstStyle/>
+          <a:p>
+            <a:pPr algn="ctr"/>
+            <a:r>
+              <a:rPr sz="1400" b="1">
+                <a:solidFill>
+                  <a:srgbClr val="DEE2E6"/>
+                </a:solidFill>
+              </a:rPr>
+              <a:t>ExplodingEnemy</a:t>
+            </a:r>
+          </a:p>
+        </p:txBody>
+      </p:sp>
+      <p:cxnSp>
+        <p:nvCxnSpPr>
+          <p:cNvPr id="259" name="Connector 258"/>
+          <p:cNvCxnSpPr/>
+          <p:nvPr/>
+        </p:nvCxnSpPr>
+        <p:spPr>
+          <a:xfrm flipH="1" flipV="1">
+            <a:off x="4572000" y="2578608"/>
+            <a:ext cx="2331720" cy="192024"/>
+          </a:xfrm>
+          <a:prstGeom prst="line">
+            <a:avLst/>
+          </a:prstGeom>
+          <a:ln w="25400">
+            <a:solidFill>
+              <a:srgbClr val="9AA3AB"/>
+            </a:solidFill>
+            <a:tailEnd type="triangle"/>
+          </a:ln>
+        </p:spPr>
+        <p:style>
+          <a:lnRef idx="2">
+            <a:schemeClr val="accent1"/>
+          </a:lnRef>
+          <a:fillRef idx="0">
+            <a:schemeClr val="accent1"/>
+          </a:fillRef>
+          <a:effectRef idx="1">
+            <a:schemeClr val="accent1"/>
+          </a:effectRef>
+          <a:fontRef idx="minor">
+            <a:schemeClr val="tx1"/>
+          </a:fontRef>
+        </p:style>
+      </p:cxnSp>
+      <p:sp>
+        <p:nvSpPr>
+          <p:cNvPr id="260" name="Rounded Rectangle 259"/>
+          <p:cNvSpPr/>
+          <p:nvPr/>
+        </p:nvSpPr>
+        <p:spPr>
+          <a:xfrm>
+            <a:off x="2286000" y="3566160"/>
+            <a:ext cx="4572000" cy="502920"/>
+          </a:xfrm>
+          <a:prstGeom prst="roundRect">
+            <a:avLst>
+              <a:gd name="adj" fmla="val 12000"/>
+            </a:avLst>
+          </a:prstGeom>
+          <a:solidFill>
+            <a:srgbClr val="2E3338"/>
+          </a:solidFill>
+          <a:ln w="25400">
+            <a:solidFill>
+              <a:srgbClr val="D45D35"/>
+            </a:solidFill>
+          </a:ln>
+          <a:effectLst/>
+        </p:spPr>
+        <p:style>
+          <a:lnRef idx="1">
+            <a:schemeClr val="accent1"/>
+          </a:lnRef>
+          <a:fillRef idx="3">
+            <a:schemeClr val="accent1"/>
+          </a:fillRef>
+          <a:effectRef idx="2">
+            <a:schemeClr val="accent1"/>
+          </a:effectRef>
+          <a:fontRef idx="minor">
+            <a:schemeClr val="lt1"/>
+          </a:fontRef>
+        </p:style>
+        <p:txBody>
+          <a:bodyPr rtlCol="0" anchor="ctr" wrap="square" lIns="73152" rIns="73152"/>
+          <a:lstStyle/>
+          <a:p>
+            <a:pPr algn="ctr"/>
+            <a:r>
+              <a:rPr sz="1400" b="1">
+                <a:solidFill>
+                  <a:srgbClr val="DEE2E6"/>
+                </a:solidFill>
+              </a:rPr>
+              <a:t>FlyingShootingEnemy? copy code, or move it all up?</a:t>
+            </a:r>
+          </a:p>
+        </p:txBody>
+      </p:sp>
+      <p:sp>
+        <p:nvSpPr>
+          <p:cNvPr id="261" name="TextBox 260"/>
+          <p:cNvSpPr txBox="1"/>
+          <p:nvPr/>
+        </p:nvSpPr>
+        <p:spPr>
+          <a:xfrm>
+            <a:off x="365760" y="4160520"/>
+            <a:ext cx="8412480" cy="365760"/>
+          </a:xfrm>
+          <a:prstGeom prst="rect">
+            <a:avLst/>
+          </a:prstGeom>
+          <a:noFill/>
+        </p:spPr>
+        <p:txBody>
+          <a:bodyPr wrap="square">
+            <a:spAutoFit/>
+          </a:bodyPr>
+          <a:lstStyle/>
+          <a:p>
+            <a:pPr algn="ctr"/>
+            <a:r>
+              <a:rPr sz="1300" b="0" i="0">
+                <a:solidFill>
+                  <a:srgbClr val="9AA3AB"/>
+                </a:solidFill>
+              </a:rPr>
+              <a:t>“Favor object composition over class inheritance.” Gang of Four</a:t>
+            </a:r>
           </a:p>
         </p:txBody>
       </p:sp>

--- a/slides/08 The Legend of Zelda.pptx
+++ b/slides/08 The Legend of Zelda.pptx
@@ -819,19 +819,14 @@
           </a:bodyPr>
           <a:lstStyle/>
           <a:p>
-            <a:pPr indent="0" lvl="0" marL="0" rtl="0" algn="l">
-              <a:spcBef>
-                <a:spcPts val="0"/>
-              </a:spcBef>
-              <a:spcAft>
-                <a:spcPts val="0"/>
-              </a:spcAft>
-              <a:buNone/>
-            </a:pPr>
-            <a:r>
-              <a:t/>
-            </a:r>
-            <a:endParaRPr/>
+            <a:r>
+              <a:t>Welcome. Today we build The Legend of Zelda. The main topic: composition vs. inheritance.</a:t>
+            </a:r>
+          </a:p>
+          <a:p>
+            <a:r>
+              <a:t>Start by playing the finished game, Zelda7, before any code.</a:t>
+            </a:r>
           </a:p>
         </p:txBody>
       </p:sp>
@@ -918,36 +913,9 @@
           </a:bodyPr>
           <a:lstStyle/>
           <a:p>
-            <a:pPr indent="0" lvl="0" marL="0" rtl="0" algn="l">
-              <a:spcBef>
-                <a:spcPts val="0"/>
-              </a:spcBef>
-              <a:spcAft>
-                <a:spcPts val="0"/>
-              </a:spcAft>
-              <a:buNone/>
-            </a:pPr>
-            <a:r>
-              <a:rPr lang="en"/>
-              <a:t>Player art shifted perspective</a:t>
-            </a:r>
-            <a:endParaRPr/>
-          </a:p>
-          <a:p>
-            <a:pPr indent="0" lvl="0" marL="0" rtl="0" algn="l">
-              <a:spcBef>
-                <a:spcPts val="0"/>
-              </a:spcBef>
-              <a:spcAft>
-                <a:spcPts val="0"/>
-              </a:spcAft>
-              <a:buNone/>
-            </a:pPr>
-            <a:r>
-              <a:rPr lang="en"/>
-              <a:t>Notice collider correction to “fake perspective”</a:t>
-            </a:r>
-            <a:endParaRPr/>
+            <a:r>
+              <a:t>The sprite is drawn higher than its collision box, so characters stand on the floor. Point at the player’s feet.</a:t>
+            </a:r>
           </a:p>
         </p:txBody>
       </p:sp>
@@ -1034,20 +1002,9 @@
           </a:bodyPr>
           <a:lstStyle/>
           <a:p>
-            <a:pPr indent="0" lvl="0" marL="0" rtl="0" algn="l">
-              <a:spcBef>
-                <a:spcPts val="0"/>
-              </a:spcBef>
-              <a:spcAft>
-                <a:spcPts val="0"/>
-              </a:spcAft>
-              <a:buNone/>
-            </a:pPr>
-            <a:r>
-              <a:rPr lang="en"/>
-              <a:t>Infinite dungeon generation</a:t>
-            </a:r>
-            <a:endParaRPr/>
+            <a:r>
+              <a:t>Real dungeon maps: rooms connected by doors. Ours is simpler: an endless series of rooms.</a:t>
+            </a:r>
           </a:p>
         </p:txBody>
       </p:sp>
@@ -1134,19 +1091,9 @@
           </a:bodyPr>
           <a:lstStyle/>
           <a:p>
-            <a:pPr indent="0" lvl="0" marL="0" rtl="0" algn="l">
-              <a:spcBef>
-                <a:spcPts val="0"/>
-              </a:spcBef>
-              <a:spcAft>
-                <a:spcPts val="0"/>
-              </a:spcAft>
-              <a:buNone/>
-            </a:pPr>
-            <a:r>
-              <a:t/>
-            </a:r>
-            <a:endParaRPr/>
+            <a:r>
+              <a:t>Each room is generated when entered: walls, a random floor, enemies, a switch and doors.</a:t>
+            </a:r>
           </a:p>
         </p:txBody>
       </p:sp>
@@ -1233,20 +1180,14 @@
           </a:bodyPr>
           <a:lstStyle/>
           <a:p>
-            <a:pPr indent="0" lvl="0" marL="0" rtl="0" algn="l">
-              <a:spcBef>
-                <a:spcPts val="0"/>
-              </a:spcBef>
-              <a:spcAft>
-                <a:spcPts val="0"/>
-              </a:spcAft>
-              <a:buNone/>
-            </a:pPr>
-            <a:r>
-              <a:rPr lang="en"/>
-              <a:t>Show example of Debug.Draw</a:t>
-            </a:r>
-            <a:endParaRPr/>
+            <a:r>
+              <a:t>A hitbox deals damage (the sword), a hurtbox receives it (the body). Separate, so reach and body don’t have to match the sprite.</a:t>
+            </a:r>
+          </a:p>
+          <a:p>
+            <a:r>
+              <a:t>Show F1 debug drawing in the game.</a:t>
+            </a:r>
           </a:p>
         </p:txBody>
       </p:sp>
@@ -1333,102 +1274,14 @@
           </a:bodyPr>
           <a:lstStyle/>
           <a:p>
-            <a:pPr indent="0" lvl="0" marL="0" rtl="0" algn="l">
-              <a:spcBef>
-                <a:spcPts val="0"/>
-              </a:spcBef>
-              <a:spcAft>
-                <a:spcPts val="0"/>
-              </a:spcAft>
-              <a:buNone/>
-            </a:pPr>
-            <a:r>
-              <a:rPr lang="en"/>
-              <a:t>The domain maps cleanly to the concept. Games are naturally event-driven — something happens (player takes damage, enemy dies, room clears) and multiple systems need to react.</a:t>
-            </a:r>
-            <a:endParaRPr/>
-          </a:p>
-          <a:p>
-            <a:pPr indent="0" lvl="0" marL="0" rtl="0" algn="l">
-              <a:spcBef>
-                <a:spcPts val="0"/>
-              </a:spcBef>
-              <a:spcAft>
-                <a:spcPts val="0"/>
-              </a:spcAft>
-              <a:buNone/>
-            </a:pPr>
-            <a:r>
-              <a:t/>
-            </a:r>
-            <a:endParaRPr/>
-          </a:p>
-          <a:p>
-            <a:pPr indent="0" lvl="0" marL="0" rtl="0" algn="l">
-              <a:spcBef>
-                <a:spcPts val="0"/>
-              </a:spcBef>
-              <a:spcAft>
-                <a:spcPts val="0"/>
-              </a:spcAft>
-              <a:buNone/>
-            </a:pPr>
-            <a:r>
-              <a:rPr lang="en">
-                <a:solidFill>
-                  <a:schemeClr val="dk1"/>
-                </a:solidFill>
-              </a:rPr>
-              <a:t>Notice that the trigger (sword hits enemy) and the reactions (damage, sound, particles) are completely unrelated concerns - events keep them from getting tangled together - This also makes the reactions easy to add or remove later without touching the trigger code.</a:t>
-            </a:r>
-            <a:endParaRPr>
-              <a:solidFill>
-                <a:schemeClr val="dk1"/>
-              </a:solidFill>
-            </a:endParaRPr>
-          </a:p>
-          <a:p>
-            <a:pPr indent="0" lvl="0" marL="0" rtl="0" algn="l">
-              <a:spcBef>
-                <a:spcPts val="0"/>
-              </a:spcBef>
-              <a:spcAft>
-                <a:spcPts val="0"/>
-              </a:spcAft>
-              <a:buNone/>
-            </a:pPr>
-            <a:r>
-              <a:t/>
-            </a:r>
-            <a:endParaRPr>
-              <a:solidFill>
-                <a:schemeClr val="dk1"/>
-              </a:solidFill>
-            </a:endParaRPr>
-          </a:p>
-          <a:p>
-            <a:pPr indent="0" lvl="0" marL="0" rtl="0" algn="l">
-              <a:spcBef>
-                <a:spcPts val="0"/>
-              </a:spcBef>
-              <a:spcAft>
-                <a:spcPts val="0"/>
-              </a:spcAft>
-              <a:buNone/>
-            </a:pPr>
-            <a:r>
-              <a:rPr lang="en">
-                <a:solidFill>
-                  <a:schemeClr val="dk1"/>
-                </a:solidFill>
-              </a:rPr>
-              <a:t>Keep in mind, not all of these need to be event-based</a:t>
-            </a:r>
-            <a:endParaRPr>
-              <a:solidFill>
-                <a:schemeClr val="dk1"/>
-              </a:solidFill>
-            </a:endParaRPr>
+            <a:r>
+              <a:t>Something happens, and other things need to react. The thing that happened shouldn’t need to know them.</a:t>
+            </a:r>
+          </a:p>
+          <a:p>
+            <a:r>
+              <a:t>Ask: list moments in a game like this. Health changes, an enemy dies, a room clears, the sword swings.</a:t>
+            </a:r>
           </a:p>
         </p:txBody>
       </p:sp>
@@ -1515,20 +1368,9 @@
           </a:bodyPr>
           <a:lstStyle/>
           <a:p>
-            <a:pPr indent="0" lvl="0" marL="0" rtl="0" algn="l">
-              <a:spcBef>
-                <a:spcPts val="0"/>
-              </a:spcBef>
-              <a:spcAft>
-                <a:spcPts val="0"/>
-              </a:spcAft>
-              <a:buNone/>
-            </a:pPr>
-            <a:r>
-              <a:rPr lang="en"/>
-              <a:t>decoupling</a:t>
-            </a:r>
-            <a:endParaRPr/>
+            <a:r>
+              <a:t>The subject announces; observers subscribe. The dependency is flipped: the subject doesn’t know who listens.</a:t>
+            </a:r>
           </a:p>
         </p:txBody>
       </p:sp>
@@ -1615,20 +1457,9 @@
           </a:bodyPr>
           <a:lstStyle/>
           <a:p>
-            <a:pPr indent="0" lvl="0" marL="0" rtl="0" algn="l">
-              <a:spcBef>
-                <a:spcPts val="0"/>
-              </a:spcBef>
-              <a:spcAft>
-                <a:spcPts val="0"/>
-              </a:spcAft>
-              <a:buNone/>
-            </a:pPr>
-            <a:r>
-              <a:rPr lang="en"/>
-              <a:t>decoupling</a:t>
-            </a:r>
-            <a:endParaRPr/>
+            <a:r>
+              <a:t>The structure: a list of observers, and notify calls each.</a:t>
+            </a:r>
           </a:p>
         </p:txBody>
       </p:sp>
@@ -1715,19 +1546,9 @@
           </a:bodyPr>
           <a:lstStyle/>
           <a:p>
-            <a:pPr indent="0" lvl="0" marL="0" rtl="0" algn="l">
-              <a:spcBef>
-                <a:spcPts val="0"/>
-              </a:spcBef>
-              <a:spcAft>
-                <a:spcPts val="0"/>
-              </a:spcAft>
-              <a:buNone/>
-            </a:pPr>
-            <a:r>
-              <a:t/>
-            </a:r>
-            <a:endParaRPr/>
+            <a:r>
+              <a:t>Two names for the same idea. Publisher-subscriber usually means there’s something in between.</a:t>
+            </a:r>
           </a:p>
         </p:txBody>
       </p:sp>
@@ -1814,19 +1635,9 @@
           </a:bodyPr>
           <a:lstStyle/>
           <a:p>
-            <a:pPr indent="0" lvl="0" marL="0" rtl="0" algn="l">
-              <a:spcBef>
-                <a:spcPts val="0"/>
-              </a:spcBef>
-              <a:spcAft>
-                <a:spcPts val="0"/>
-              </a:spcAft>
-              <a:buNone/>
-            </a:pPr>
-            <a:r>
-              <a:t/>
-            </a:r>
-            <a:endParaRPr/>
+            <a:r>
+              <a:t>In C# we don’t write the pattern ourselves: delegates and events are part of the language.</a:t>
+            </a:r>
           </a:p>
         </p:txBody>
       </p:sp>
@@ -1913,19 +1724,9 @@
           </a:bodyPr>
           <a:lstStyle/>
           <a:p>
-            <a:pPr indent="0" lvl="0" marL="0" rtl="0" algn="l">
-              <a:spcBef>
-                <a:spcPts val="0"/>
-              </a:spcBef>
-              <a:spcAft>
-                <a:spcPts val="0"/>
-              </a:spcAft>
-              <a:buNone/>
-            </a:pPr>
-            <a:r>
-              <a:t/>
-            </a:r>
-            <a:endParaRPr/>
+            <a:r>
+              <a:t>The same Observer structure, with C# events instead of an interface.</a:t>
+            </a:r>
           </a:p>
         </p:txBody>
       </p:sp>
@@ -2012,19 +1813,9 @@
           </a:bodyPr>
           <a:lstStyle/>
           <a:p>
-            <a:pPr indent="0" lvl="0" marL="0" rtl="0" algn="l">
-              <a:spcBef>
-                <a:spcPts val="0"/>
-              </a:spcBef>
-              <a:spcAft>
-                <a:spcPts val="0"/>
-              </a:spcAft>
-              <a:buNone/>
-            </a:pPr>
-            <a:r>
-              <a:t/>
-            </a:r>
-            <a:endParaRPr/>
+            <a:r>
+              <a:t>The 1986 original: top-down, room by room. Ask who has played a Zelda.</a:t>
+            </a:r>
           </a:p>
         </p:txBody>
       </p:sp>
@@ -2111,113 +1902,14 @@
           </a:bodyPr>
           <a:lstStyle/>
           <a:p>
-            <a:pPr indent="0" lvl="0" marL="0" rtl="0" algn="l">
-              <a:spcBef>
-                <a:spcPts val="0"/>
-              </a:spcBef>
-              <a:spcAft>
-                <a:spcPts val="0"/>
-              </a:spcAft>
-              <a:buNone/>
-            </a:pPr>
-            <a:r>
-              <a:rPr lang="en"/>
-              <a:t>C# way of doing callbacks</a:t>
-            </a:r>
-            <a:endParaRPr/>
-          </a:p>
-          <a:p>
-            <a:pPr indent="0" lvl="0" marL="0" rtl="0" algn="l">
-              <a:spcBef>
-                <a:spcPts val="0"/>
-              </a:spcBef>
-              <a:spcAft>
-                <a:spcPts val="0"/>
-              </a:spcAft>
-              <a:buNone/>
-            </a:pPr>
-            <a:r>
-              <a:t/>
-            </a:r>
-            <a:endParaRPr/>
-          </a:p>
-          <a:p>
-            <a:pPr indent="0" lvl="0" marL="0" rtl="0" algn="l">
-              <a:spcBef>
-                <a:spcPts val="0"/>
-              </a:spcBef>
-              <a:spcAft>
-                <a:spcPts val="0"/>
-              </a:spcAft>
-              <a:buNone/>
-            </a:pPr>
-            <a:r>
-              <a:rPr lang="en"/>
-              <a:t>A callback in C# refers to a function or method that is passed as an argument to another method, allowing the receiving method to invoke it at a later time</a:t>
-            </a:r>
-            <a:endParaRPr/>
-          </a:p>
-          <a:p>
-            <a:pPr indent="0" lvl="0" marL="0" rtl="0" algn="l">
-              <a:spcBef>
-                <a:spcPts val="0"/>
-              </a:spcBef>
-              <a:spcAft>
-                <a:spcPts val="0"/>
-              </a:spcAft>
-              <a:buNone/>
-            </a:pPr>
-            <a:r>
-              <a:t/>
-            </a:r>
-            <a:endParaRPr/>
-          </a:p>
-          <a:p>
-            <a:pPr indent="0" lvl="0" marL="0" rtl="0" algn="l">
-              <a:spcBef>
-                <a:spcPts val="0"/>
-              </a:spcBef>
-              <a:spcAft>
-                <a:spcPts val="0"/>
-              </a:spcAft>
-              <a:buNone/>
-            </a:pPr>
-            <a:r>
-              <a:rPr lang="en"/>
-              <a:t>This is commonly used in scenarios where you want to execute a specific action after a task is completed, such as in asynchronous programming or event-driven systems.</a:t>
-            </a:r>
-            <a:endParaRPr/>
-          </a:p>
-          <a:p>
-            <a:pPr indent="0" lvl="0" marL="0" rtl="0" algn="l">
-              <a:spcBef>
-                <a:spcPts val="0"/>
-              </a:spcBef>
-              <a:spcAft>
-                <a:spcPts val="0"/>
-              </a:spcAft>
-              <a:buNone/>
-            </a:pPr>
-            <a:r>
-              <a:t/>
-            </a:r>
-            <a:endParaRPr/>
-          </a:p>
-          <a:p>
-            <a:pPr indent="0" lvl="0" marL="0" rtl="0" algn="l">
-              <a:spcBef>
-                <a:spcPts val="0"/>
-              </a:spcBef>
-              <a:spcAft>
-                <a:spcPts val="0"/>
-              </a:spcAft>
-              <a:buNone/>
-            </a:pPr>
-            <a:r>
-              <a:rPr lang="en"/>
-              <a:t>Func&lt;Room&gt; in Dungeon (factory)</a:t>
-            </a:r>
-            <a:endParaRPr/>
+            <a:r>
+              <a:t>A delegate holds a reference to a method. Action and Func are the built-in ones. += adds a handler, Invoke calls them all.</a:t>
+            </a:r>
+          </a:p>
+          <a:p>
+            <a:r>
+              <a:t>Point at the switch in Room.cs: that’s where the room wires its door logic.</a:t>
+            </a:r>
           </a:p>
         </p:txBody>
       </p:sp>
@@ -2304,20 +1996,9 @@
           </a:bodyPr>
           <a:lstStyle/>
           <a:p>
-            <a:pPr indent="0" lvl="0" marL="0" rtl="0" algn="l">
-              <a:spcBef>
-                <a:spcPts val="0"/>
-              </a:spcBef>
-              <a:spcAft>
-                <a:spcPts val="0"/>
-              </a:spcAft>
-              <a:buNone/>
-            </a:pPr>
-            <a:r>
-              <a:rPr lang="en"/>
-              <a:t>the event keyword is about who has control. The owner fires, everyone else just listens. That boundary is what makes large codebases manageable.</a:t>
-            </a:r>
-            <a:endParaRPr/>
+            <a:r>
+              <a:t>An event is a delegate with guardrails: outside code can only += and -=. The owner fires; everyone else listens.</a:t>
+            </a:r>
           </a:p>
         </p:txBody>
       </p:sp>
@@ -2404,19 +2085,9 @@
           </a:bodyPr>
           <a:lstStyle/>
           <a:p>
-            <a:pPr indent="0" lvl="0" marL="0" rtl="0" algn="l">
-              <a:spcBef>
-                <a:spcPts val="0"/>
-              </a:spcBef>
-              <a:spcAft>
-                <a:spcPts val="0"/>
-              </a:spcAft>
-              <a:buNone/>
-            </a:pPr>
-            <a:r>
-              <a:t/>
-            </a:r>
-            <a:endParaRPr/>
+            <a:r>
+              <a:t>A lambda: a function without a name, written where it’s used. The same IsEven, twice.</a:t>
+            </a:r>
           </a:p>
         </p:txBody>
       </p:sp>
@@ -2503,20 +2174,14 @@
           </a:bodyPr>
           <a:lstStyle/>
           <a:p>
-            <a:pPr indent="0" lvl="0" marL="0" rtl="0" algn="l">
-              <a:spcBef>
-                <a:spcPts val="0"/>
-              </a:spcBef>
-              <a:spcAft>
-                <a:spcPts val="0"/>
-              </a:spcAft>
-              <a:buNone/>
-            </a:pPr>
-            <a:r>
-              <a:rPr lang="en"/>
-              <a:t>It motivates why lambdas exist. The behaviour is one-off, it needs access to local variables, and extracting it into a named method would actually make the code harder to follow.</a:t>
-            </a:r>
-            <a:endParaRPr/>
+            <a:r>
+              <a:t>The switch handler captures switchObj and Doorways from the room: a closure.</a:t>
+            </a:r>
+          </a:p>
+          <a:p>
+            <a:r>
+              <a:t>Ask: what would this look like as a named method? It would need both as fields or parameters.</a:t>
+            </a:r>
           </a:p>
         </p:txBody>
       </p:sp>
@@ -2604,74 +2269,17 @@
           <a:lstStyle/>
           <a:p>
             <a:r>
-              <a:t>Player health changed? HUD Updated</a:t>
-            </a:r>
-          </a:p>
-          <a:p>
-            <a:r>
-              <a:t>Enemy dies</a:t>
-            </a:r>
-          </a:p>
-          <a:p>
-            <a:r>
-              <a:t>Sword is swung!</a:t>
-            </a:r>
-          </a:p>
-          <a:p/>
-          <a:p>
-            <a:r>
-              <a:t>The one caveat: the codebase is small enough that the polling isn't actually painful yet, so students need to be told to imagine it at scale. But that's actually a good teaching moment too - when should you reach for events vs. just polling?</a:t>
-            </a:r>
-          </a:p>
-          <a:p/>
-          <a:p>
-            <a:r>
-              <a:t>Full instructions (also on the course site):</a:t>
-            </a:r>
-          </a:p>
-          <a:p>
-            <a:r>
-              <a:t>- OnPlayerDied is detected in one place but causes a game over screen to appear somewhere completely different. Trace the full chain through the code.</a:t>
-            </a:r>
-          </a:p>
-          <a:p>
-            <a:r>
-              <a:t>- Enemy death is handled asymmetrically to player death.</a:t>
-            </a:r>
-          </a:p>
-          <a:p>
-            <a:r>
-              <a:t>  - What happens now when an enemy dies?</a:t>
-            </a:r>
-          </a:p>
-          <a:p>
-            <a:r>
-              <a:t>  - What could happen if there were an event for it?</a:t>
-            </a:r>
-          </a:p>
-          <a:p>
-            <a:r>
-              <a:t>  - What would you need to add, and where?</a:t>
-            </a:r>
-          </a:p>
-          <a:p>
-            <a:r>
-              <a:t>- SoundManager.PlaySound(...) is called directly from several unrelated classes.</a:t>
-            </a:r>
-          </a:p>
-          <a:p>
-            <a:r>
-              <a:t>  - Find all the call sites. Why is this a problem, and how would events fix it?</a:t>
-            </a:r>
-          </a:p>
-          <a:p>
-            <a:r>
-              <a:t>- Pick one of the above and refactor it to be event-driven.</a:t>
-            </a:r>
-          </a:p>
-          <a:p>
-            <a:r>
-              <a:t>  - The class firing the event should have no reference to the class reacting to it.</a:t>
+              <a:t>Exercise: pick one of the three and refactor it. The class firing the event must not know who reacts.</a:t>
+            </a:r>
+          </a:p>
+          <a:p>
+            <a:r>
+              <a:t>The OnPlayerDied chain is the one to trace first: room, dungeon, play state.</a:t>
+            </a:r>
+          </a:p>
+          <a:p>
+            <a:r>
+              <a:t>Full instructions are on the course site; students work from there. Walk round while they work.</a:t>
             </a:r>
           </a:p>
         </p:txBody>
@@ -2759,19 +2367,9 @@
           </a:bodyPr>
           <a:lstStyle/>
           <a:p>
-            <a:pPr indent="0" lvl="0" marL="0" rtl="0" algn="l">
-              <a:spcBef>
-                <a:spcPts val="0"/>
-              </a:spcBef>
-              <a:spcAft>
-                <a:spcPts val="0"/>
-              </a:spcAft>
-              <a:buNone/>
-            </a:pPr>
-            <a:r>
-              <a:t/>
-            </a:r>
-            <a:endParaRPr/>
+            <a:r>
+              <a:t>The original’s scroll between rooms. How would you build this?</a:t>
+            </a:r>
           </a:p>
         </p:txBody>
       </p:sp>
@@ -2859,57 +2457,7 @@
           <a:lstStyle/>
           <a:p>
             <a:r>
-              <a:t>Talking points:</a:t>
-            </a:r>
-          </a:p>
-          <a:p>
-            <a:r>
-              <a:t>- Short for “in-betweening”</a:t>
-            </a:r>
-          </a:p>
-          <a:p>
-            <a:r>
-              <a:t>  - Animating a value from A to B over time</a:t>
-            </a:r>
-          </a:p>
-          <a:p>
-            <a:r>
-              <a:t>- Comes from traditional animation</a:t>
-            </a:r>
-          </a:p>
-          <a:p>
-            <a:r>
-              <a:t>  - Artists drew keyframes, assistants filled in the frames in between</a:t>
-            </a:r>
-          </a:p>
-          <a:p>
-            <a:r>
-              <a:t>- Instead of snapping a position instantly, you move it a little each frame until it arrives</a:t>
-            </a:r>
-          </a:p>
-          <a:p>
-            <a:r>
-              <a:t>- Used everywhere in games</a:t>
-            </a:r>
-          </a:p>
-          <a:p>
-            <a:r>
-              <a:t>  - UI animations, camera movement, character transitions, screen wipes</a:t>
-            </a:r>
-          </a:p>
-          <a:p>
-            <a:r>
-              <a:t>- The two things you always need to define:</a:t>
-            </a:r>
-          </a:p>
-          <a:p>
-            <a:r>
-              <a:t>  - What is moving</a:t>
-            </a:r>
-          </a:p>
-          <a:p>
-            <a:r>
-              <a:t>  - How fast / by what curve (Easings.net)</a:t>
+              <a:t>A tween moves a value from A to B over time. The dots are nine frames of the same move: evenly spaced for linear, bunched up at the end for ease-out.</a:t>
             </a:r>
           </a:p>
         </p:txBody>
@@ -2998,57 +2546,7 @@
           <a:lstStyle/>
           <a:p>
             <a:r>
-              <a:t>Talking points:</a:t>
-            </a:r>
-          </a:p>
-          <a:p>
-            <a:r>
-              <a:t>- The simplest tween curve - constant speed from A to B</a:t>
-            </a:r>
-          </a:p>
-          <a:p>
-            <a:r>
-              <a:t>- lerp(a, b, t) = a + (b - a) * t where t goes from 0 to 1</a:t>
-            </a:r>
-          </a:p>
-          <a:p>
-            <a:r>
-              <a:t>  - t = 0 → result is a</a:t>
-            </a:r>
-          </a:p>
-          <a:p>
-            <a:r>
-              <a:t>  - t = 0.5 → result is exactly halfway</a:t>
-            </a:r>
-          </a:p>
-          <a:p>
-            <a:r>
-              <a:t>  - t = 1 → result is b</a:t>
-            </a:r>
-          </a:p>
-          <a:p>
-            <a:r>
-              <a:t>- "Linear" means equal steps</a:t>
-            </a:r>
-          </a:p>
-          <a:p>
-            <a:r>
-              <a:t>  - The value moves the same amount every frame</a:t>
-            </a:r>
-          </a:p>
-          <a:p>
-            <a:r>
-              <a:t>- Works on anything numeric</a:t>
-            </a:r>
-          </a:p>
-          <a:p>
-            <a:r>
-              <a:t>  - floats, positions, colours, even angles</a:t>
-            </a:r>
-          </a:p>
-          <a:p>
-            <a:r>
-              <a:t>- Non-linear curves (ease-in, ease-out) feel more natural but lerp is a good starting point</a:t>
+              <a:t>lerp: a plus a fraction of the way to b. t = 0, a; t = 1, b. Works on positions, colours, angles.</a:t>
             </a:r>
           </a:p>
         </p:txBody>
@@ -3137,93 +2635,12 @@
           <a:lstStyle/>
           <a:p>
             <a:r>
-              <a:t>the lerp on the camera and the lerp on the player are independent but run in parallel, which is what makes the player look like they're walking through the doorway rather than floating across a black screen.</a:t>
-            </a:r>
-          </a:p>
-          <a:p>
-            <a:r>
-              <a:t>During the scroll, Room.Update is not called — enemies and gameplay are frozen until the transition finishes</a:t>
-            </a:r>
-          </a:p>
-          <a:p/>
-          <a:p>
-            <a:r>
-              <a:t>Talking points:</a:t>
-            </a:r>
-          </a:p>
-          <a:p>
-            <a:r>
-              <a:t>- When the player walks through a door, two things tween simultaneously</a:t>
-            </a:r>
-          </a:p>
-          <a:p>
-            <a:r>
-              <a:t>  - The camera - from (0, 0) to _shiftTarget (one screen width/height away)</a:t>
-            </a:r>
-          </a:p>
-          <a:p>
-            <a:r>
-              <a:t>  - The player - from the exit doorway to the matching entry point in the new room</a:t>
-            </a:r>
-          </a:p>
-          <a:p>
-            <a:r>
-              <a:t>- The new room is placed at _shiftTarget and never moves</a:t>
-            </a:r>
-          </a:p>
-          <a:p>
-            <a:r>
-              <a:t>  - The camera travelling toward it is what creates the scroll effect</a:t>
-            </a:r>
-          </a:p>
-          <a:p>
-            <a:r>
-              <a:t>- All objects render through the same camera.Transform * screenScaleMatrix</a:t>
-            </a:r>
-          </a:p>
-          <a:p>
-            <a:r>
-              <a:t>  - The whole scene shifts together</a:t>
-            </a:r>
-          </a:p>
-          <a:p>
-            <a:r>
-              <a:t>- When the tween finishes, FinishShift makes the new room current</a:t>
-            </a:r>
-          </a:p>
-          <a:p>
-            <a:r>
-              <a:t>  - Camera &amp; Player position is then reset</a:t>
-            </a:r>
-          </a:p>
-          <a:p>
-            <a:r>
-              <a:t>  - Gameplay resumes (Room.Update is now called again)</a:t>
-            </a:r>
-          </a:p>
-          <a:p>
-            <a:r>
-              <a:t>// Dungeon.cs, BeginShift</a:t>
-            </a:r>
-          </a:p>
-          <a:p>
-            <a:r>
-              <a:t>_tweens.Tween(GameSettings.RoomShiftDuration)</a:t>
-            </a:r>
-          </a:p>
-          <a:p>
-            <a:r>
-              <a:t>    .Add(t =&gt; /* move the camera */, 0f, 1f)</a:t>
-            </a:r>
-          </a:p>
-          <a:p>
-            <a:r>
-              <a:t>    .Add(t =&gt; /* walk the player */, 0f, 1f)</a:t>
-            </a:r>
-          </a:p>
-          <a:p>
-            <a:r>
-              <a:t>    .Finish(FinishShift);</a:t>
+              <a:t>The next room is placed one screen away and never moves. The camera tweens towards it while the player walks through the door.</a:t>
+            </a:r>
+          </a:p>
+          <a:p>
+            <a:r>
+              <a:t>When the tween finishes, the next room becomes the current one.</a:t>
             </a:r>
           </a:p>
         </p:txBody>
@@ -3312,18 +2729,7 @@
           <a:lstStyle/>
           <a:p>
             <a:r>
-              <a:t>Stencil buffer</a:t>
-            </a:r>
-          </a:p>
-          <a:p/>
-          <a:p>
-            <a:r>
-              <a:t>Talking points:</a:t>
-            </a:r>
-          </a:p>
-          <a:p>
-            <a:r>
-              <a:t>- Stencil buffer</a:t>
+              <a:t>Without it, the player is drawn over the door arch. Three passes: rooms; arch masks into the stencil buffer only; the player where nothing is marked.</a:t>
             </a:r>
           </a:p>
         </p:txBody>
@@ -3411,19 +2817,14 @@
           </a:bodyPr>
           <a:lstStyle/>
           <a:p>
-            <a:pPr indent="0" lvl="0" marL="0" rtl="0" algn="l">
-              <a:spcBef>
-                <a:spcPts val="0"/>
-              </a:spcBef>
-              <a:spcAft>
-                <a:spcPts val="0"/>
-              </a:spcAft>
-              <a:buNone/>
-            </a:pPr>
-            <a:r>
-              <a:t/>
-            </a:r>
-            <a:endParaRPr/>
+            <a:r>
+              <a:t>Run Zelda7 and play it for a minute.</a:t>
+            </a:r>
+          </a:p>
+          <a:p>
+            <a:r>
+              <a:t>Ask: what would you need to build this? Collect answers on the board, and come back to them at the end.</a:t>
+            </a:r>
           </a:p>
         </p:txBody>
       </p:sp>
@@ -3511,78 +2912,7 @@
           <a:lstStyle/>
           <a:p>
             <a:r>
-              <a:t>point out that a designer can read and edit XML without knowing C#</a:t>
-            </a:r>
-          </a:p>
-          <a:p/>
-          <a:p>
-            <a:r>
-              <a:t>Talking points:</a:t>
-            </a:r>
-          </a:p>
-          <a:p>
-            <a:r>
-              <a:t>- Content lives in config files, behaviour lives in C#</a:t>
-            </a:r>
-          </a:p>
-          <a:p>
-            <a:r>
-              <a:t>  - This project uses XML — alternatives: JSON, YAML, TOML, Lua</a:t>
-            </a:r>
-          </a:p>
-          <a:p>
-            <a:r>
-              <a:t>- Definition classes parse the files once at startup into dictionaries</a:t>
-            </a:r>
-          </a:p>
-          <a:p>
-            <a:r>
-              <a:t>  - The rest of the code never touches XML</a:t>
-            </a:r>
-          </a:p>
-          <a:p>
-            <a:r>
-              <a:t>- Adding a new enemy type = one &lt;Enemy&gt; block in XML + a spritesheet row</a:t>
-            </a:r>
-          </a:p>
-          <a:p>
-            <a:r>
-              <a:t>  - No C# changes, no recompile</a:t>
-            </a:r>
-          </a:p>
-          <a:p>
-            <a:r>
-              <a:t>- GameObject has no if (type == "switch") anywhere</a:t>
-            </a:r>
-          </a:p>
-          <a:p>
-            <a:r>
-              <a:t>  - the XML defines valid states, the C# just looks up the current state name at draw time</a:t>
-            </a:r>
-          </a:p>
-          <a:p>
-            <a:r>
-              <a:t>&lt;Enemy type="skeleton" width="16" height="16" walkSpeed="20" health="1"&gt;</a:t>
-            </a:r>
-          </a:p>
-          <a:p>
-            <a:r>
-              <a:t>  &lt;Animation name="walk-down"  frames="9,10,11,10"   interval="0.2" /&gt;</a:t>
-            </a:r>
-          </a:p>
-          <a:p>
-            <a:r>
-              <a:t>  &lt;Animation name="idle-down"  frames="10"           interval="0.2" /&gt;</a:t>
-            </a:r>
-          </a:p>
-          <a:p>
-            <a:r>
-              <a:t>&lt;/Enemy&gt;</a:t>
-            </a:r>
-          </a:p>
-          <a:p>
-            <a:r>
-              <a:t>Tradeoff: typos in XML become runtime errors, not compile errors — the compiler can't catch type="skelton"</a:t>
+              <a:t>A new enemy is one XML block and a row in the sheet. Ask the question: someone writes type="skelton". When do you find out? At runtime, not compile time. That’s the cost.</a:t>
             </a:r>
           </a:p>
         </p:txBody>
@@ -3671,52 +3001,12 @@
           <a:lstStyle/>
           <a:p>
             <a:r>
-              <a:t>Full instructions (also on the course site):</a:t>
-            </a:r>
-          </a:p>
-          <a:p>
-            <a:r>
-              <a:t>- Start from Zelda7, the finished game</a:t>
-            </a:r>
-          </a:p>
-          <a:p>
-            <a:r>
-              <a:t>- Make some enemies drop hearts randomly, which heal the player for 2 damage</a:t>
-            </a:r>
-          </a:p>
-          <a:p>
-            <a:r>
-              <a:t>  - I.e. one whole heart</a:t>
-            </a:r>
-          </a:p>
-          <a:p>
-            <a:r>
-              <a:t>- Allow the player to lift pots</a:t>
-            </a:r>
-          </a:p>
-          <a:p>
-            <a:r>
-              <a:t>  - Using the animations included in the sprite sheets here</a:t>
-            </a:r>
-          </a:p>
-          <a:p>
-            <a:r>
-              <a:t>- Pots should stick to the player while they are carrying them</a:t>
-            </a:r>
-          </a:p>
-          <a:p>
-            <a:r>
-              <a:t>  - The pot needs to track player position</a:t>
-            </a:r>
-          </a:p>
-          <a:p>
-            <a:r>
-              <a:t>- Allow the player to throw pots and damage enemies</a:t>
-            </a:r>
-          </a:p>
-          <a:p>
-            <a:r>
-              <a:t>  - If it hits a wall, an enemy, or travels farther than four tiles, destroy it.</a:t>
+              <a:t>Exercise: hearts, pots to lift, pots to throw.</a:t>
+            </a:r>
+          </a:p>
+          <a:p>
+            <a:r>
+              <a:t>Full instructions are on the course site; students work from there. Walk round while they work.</a:t>
             </a:r>
           </a:p>
         </p:txBody>
@@ -3804,19 +3094,14 @@
           </a:bodyPr>
           <a:lstStyle/>
           <a:p>
-            <a:pPr indent="0" lvl="0" marL="0" rtl="0" algn="l">
-              <a:spcBef>
-                <a:spcPts val="0"/>
-              </a:spcBef>
-              <a:spcAft>
-                <a:spcPts val="0"/>
-              </a:spcAft>
-              <a:buNone/>
-            </a:pPr>
-            <a:r>
-              <a:t/>
-            </a:r>
-            <a:endParaRPr/>
+            <a:r>
+              <a:t>Give the project groups five minutes with these questions.</a:t>
+            </a:r>
+          </a:p>
+          <a:p>
+            <a:r>
+              <a:t>Ask two groups to share one answer each. Push for concrete classes and files, not intentions.</a:t>
+            </a:r>
           </a:p>
         </p:txBody>
       </p:sp>
@@ -3873,37 +3158,12 @@
           <a:lstStyle/>
           <a:p>
             <a:r>
-              <a:t>Talking points:</a:t>
-            </a:r>
-          </a:p>
-          <a:p>
-            <a:r>
-              <a:t>- The player and the enemies share an abstract Entity base class</a:t>
-            </a:r>
-          </a:p>
-          <a:p>
-            <a:r>
-              <a:t>  - Position, collision box, animations, health, invulnerability, a current state</a:t>
-            </a:r>
-          </a:p>
-          <a:p>
-            <a:r>
-              <a:t>- Inheritance works while there is one axis of variation</a:t>
-            </a:r>
-          </a:p>
-          <a:p>
-            <a:r>
-              <a:t>  - But an enemy that shoots and flies and explodes?</a:t>
-            </a:r>
-          </a:p>
-          <a:p>
-            <a:r>
-              <a:t>- Deep hierarchies lead to duplicated code, or a bloated base class</a:t>
-            </a:r>
-          </a:p>
-          <a:p>
-            <a:r>
-              <a:t>- “Favor object composition over class inheritance” (Gang of Four)</a:t>
+              <a:t>Build the tree with them: Enemy, then flying, shooting and exploding enemies. Then ask: an enemy that flies and shoots?</a:t>
+            </a:r>
+          </a:p>
+          <a:p>
+            <a:r>
+              <a:t>Copy the code, or move it up into Enemy until every enemy carries everything. Neither is good.</a:t>
             </a:r>
           </a:p>
         </p:txBody>
@@ -3961,47 +3221,12 @@
           <a:lstStyle/>
           <a:p>
             <a:r>
-              <a:t>Talking points:</a:t>
-            </a:r>
-          </a:p>
-          <a:p>
-            <a:r>
-              <a:t>- Behaviour in state objects</a:t>
-            </a:r>
-          </a:p>
-          <a:p>
-            <a:r>
-              <a:t>  - An enemy’s AI is the state object it holds, not the Enemy class itself</a:t>
-            </a:r>
-          </a:p>
-          <a:p>
-            <a:r>
-              <a:t>- Behaviour wired from outside</a:t>
-            </a:r>
-          </a:p>
-          <a:p>
-            <a:r>
-              <a:t>  - A floor switch is a plain GameObject; the room attaches what happens via OnCollide</a:t>
-            </a:r>
-          </a:p>
-          <a:p>
-            <a:r>
-              <a:t>- Data instead of subclasses</a:t>
-            </a:r>
-          </a:p>
-          <a:p>
-            <a:r>
-              <a:t>  - Enemy types come from XML, not one class per type</a:t>
-            </a:r>
-          </a:p>
-          <a:p>
-            <a:r>
-              <a:t>- Ask: is it what something is, or what it can do?</a:t>
-            </a:r>
-          </a:p>
-          <a:p>
-            <a:r>
-              <a:t>  - Plants vs. Zombies takes this all the way: the Component pattern</a:t>
+              <a:t>Zelda already composes in three ways; go through the boxes.</a:t>
+            </a:r>
+          </a:p>
+          <a:p>
+            <a:r>
+              <a:t>The question to keep asking: is this what something is, or what it can do? Plants vs. Zombies takes it all the way.</a:t>
             </a:r>
           </a:p>
         </p:txBody>
@@ -4059,7 +3284,288 @@
           <a:lstStyle/>
           <a:p>
             <a:r>
-              <a:t>Ask, let them answer in pairs for a minute, then take a few answers. These are the site’s Check yourself questions.</a:t>
+              <a:t>Ask one question at a time. Pairs discuss for a minute, then take two or three answers.</a:t>
+            </a:r>
+          </a:p>
+          <a:p>
+            <a:r>
+              <a:t>Expected answers (from the course site):</a:t>
+            </a:r>
+          </a:p>
+          <a:p/>
+          <a:p>
+            <a:r>
+              <a:t>Q: When does inheritance fit, and when is composition better?</a:t>
+            </a:r>
+          </a:p>
+          <a:p>
+            <a:r>
+              <a:t>A: Inheritance fits when there is one clear "is a" axis and the shared behaviour is needed by every subclass. Composition fits when behaviours combine freely: instead of one subclass per combination, an object has the parts it needs, and they can even change at runtime.</a:t>
+            </a:r>
+          </a:p>
+          <a:p/>
+          <a:p>
+            <a:r>
+              <a:t>Q: Why does Observer suit UI code particularly well?</a:t>
+            </a:r>
+          </a:p>
+          <a:p>
+            <a:r>
+              <a:t>A: The UI depends on the game data, but the game shouldn't depend on the UI. With events, the health bar subscribes to HealthChanged and gameplay code never needs to know a health bar exists. The UI also only updates when something actually changes.</a:t>
+            </a:r>
+          </a:p>
+          <a:p/>
+          <a:p>
+            <a:r>
+              <a:t>Q: What is the difference between a delegate and an event in C#?</a:t>
+            </a:r>
+          </a:p>
+          <a:p>
+            <a:r>
+              <a:t>A: An event is a delegate that outside code can only subscribe to and unsubscribe from. Only the declaring class can invoke it or overwrite its subscriber list.</a:t>
+            </a:r>
+          </a:p>
+          <a:p/>
+          <a:p>
+            <a:r>
+              <a:t>Q: What is the cost of data-driven design?</a:t>
+            </a:r>
+          </a:p>
+          <a:p>
+            <a:r>
+              <a:t>A: Errors move from compile time to runtime, you need loading and validation code, and behaviour is split between code and data files.</a:t>
+            </a:r>
+          </a:p>
+        </p:txBody>
+      </p:sp>
+    </p:spTree>
+  </p:cSld>
+  <p:clrMapOvr>
+    <a:masterClrMapping/>
+  </p:clrMapOvr>
+</p:notes>
+</file>
+
+<file path=ppt/notesSlides/notesSlide36.xml><?xml version="1.0" encoding="utf-8"?>
+<p:notes xmlns:a="http://schemas.openxmlformats.org/drawingml/2006/main" xmlns:p="http://schemas.openxmlformats.org/presentationml/2006/main" xmlns:r="http://schemas.openxmlformats.org/officeDocument/2006/relationships">
+  <p:cSld>
+    <p:spTree>
+      <p:nvGrpSpPr>
+        <p:cNvPr id="1" name=""/>
+        <p:cNvGrpSpPr/>
+        <p:nvPr/>
+      </p:nvGrpSpPr>
+      <p:grpSpPr>
+        <a:xfrm>
+          <a:off x="0" y="0"/>
+          <a:ext cx="0" cy="0"/>
+          <a:chOff x="0" y="0"/>
+          <a:chExt cx="0" cy="0"/>
+        </a:xfrm>
+      </p:grpSpPr>
+      <p:sp>
+        <p:nvSpPr>
+          <p:cNvPr id="2" name="Slide Image Placeholder 1"/>
+          <p:cNvSpPr>
+            <a:spLocks noGrp="1"/>
+          </p:cNvSpPr>
+          <p:nvPr>
+            <p:ph type="sldImg" idx="2"/>
+          </p:nvPr>
+        </p:nvSpPr>
+        <p:spPr/>
+      </p:sp>
+      <p:sp>
+        <p:nvSpPr>
+          <p:cNvPr id="3" name="Notes Placeholder 2"/>
+          <p:cNvSpPr>
+            <a:spLocks noGrp="1"/>
+          </p:cNvSpPr>
+          <p:nvPr>
+            <p:ph type="body" idx="1"/>
+          </p:nvPr>
+        </p:nvSpPr>
+        <p:spPr/>
+        <p:txBody>
+          <a:bodyPr/>
+          <a:lstStyle/>
+          <a:p>
+            <a:r>
+              <a:t>The eight steps, one idea each. The README has the same table with more detail.</a:t>
+            </a:r>
+          </a:p>
+        </p:txBody>
+      </p:sp>
+    </p:spTree>
+  </p:cSld>
+  <p:clrMapOvr>
+    <a:masterClrMapping/>
+  </p:clrMapOvr>
+</p:notes>
+</file>
+
+<file path=ppt/notesSlides/notesSlide37.xml><?xml version="1.0" encoding="utf-8"?>
+<p:notes xmlns:a="http://schemas.openxmlformats.org/drawingml/2006/main" xmlns:p="http://schemas.openxmlformats.org/presentationml/2006/main" xmlns:r="http://schemas.openxmlformats.org/officeDocument/2006/relationships">
+  <p:cSld>
+    <p:spTree>
+      <p:nvGrpSpPr>
+        <p:cNvPr id="1" name=""/>
+        <p:cNvGrpSpPr/>
+        <p:nvPr/>
+      </p:nvGrpSpPr>
+      <p:grpSpPr>
+        <a:xfrm>
+          <a:off x="0" y="0"/>
+          <a:ext cx="0" cy="0"/>
+          <a:chOff x="0" y="0"/>
+          <a:chExt cx="0" cy="0"/>
+        </a:xfrm>
+      </p:grpSpPr>
+      <p:sp>
+        <p:nvSpPr>
+          <p:cNvPr id="2" name="Slide Image Placeholder 1"/>
+          <p:cNvSpPr>
+            <a:spLocks noGrp="1"/>
+          </p:cNvSpPr>
+          <p:nvPr>
+            <p:ph type="sldImg" idx="2"/>
+          </p:nvPr>
+        </p:nvSpPr>
+        <p:spPr/>
+      </p:sp>
+      <p:sp>
+        <p:nvSpPr>
+          <p:cNvPr id="3" name="Notes Placeholder 2"/>
+          <p:cNvSpPr>
+            <a:spLocks noGrp="1"/>
+          </p:cNvSpPr>
+          <p:nvPr>
+            <p:ph type="body" idx="1"/>
+          </p:nvPr>
+        </p:nvSpPr>
+        <p:spPr/>
+        <p:txBody>
+          <a:bodyPr/>
+          <a:lstStyle/>
+          <a:p>
+            <a:r>
+              <a:t>Games tween constantly, so GMDCore gets a TweenManager: Tween, After, Every, chained with Add and Finish. No progress variables anywhere.</a:t>
+            </a:r>
+          </a:p>
+        </p:txBody>
+      </p:sp>
+    </p:spTree>
+  </p:cSld>
+  <p:clrMapOvr>
+    <a:masterClrMapping/>
+  </p:clrMapOvr>
+</p:notes>
+</file>
+
+<file path=ppt/notesSlides/notesSlide38.xml><?xml version="1.0" encoding="utf-8"?>
+<p:notes xmlns:a="http://schemas.openxmlformats.org/drawingml/2006/main" xmlns:p="http://schemas.openxmlformats.org/presentationml/2006/main" xmlns:r="http://schemas.openxmlformats.org/officeDocument/2006/relationships">
+  <p:cSld>
+    <p:spTree>
+      <p:nvGrpSpPr>
+        <p:cNvPr id="1" name=""/>
+        <p:cNvGrpSpPr/>
+        <p:nvPr/>
+      </p:nvGrpSpPr>
+      <p:grpSpPr>
+        <a:xfrm>
+          <a:off x="0" y="0"/>
+          <a:ext cx="0" cy="0"/>
+          <a:chOff x="0" y="0"/>
+          <a:chExt cx="0" cy="0"/>
+        </a:xfrm>
+      </p:grpSpPr>
+      <p:sp>
+        <p:nvSpPr>
+          <p:cNvPr id="2" name="Slide Image Placeholder 1"/>
+          <p:cNvSpPr>
+            <a:spLocks noGrp="1"/>
+          </p:cNvSpPr>
+          <p:nvPr>
+            <p:ph type="sldImg" idx="2"/>
+          </p:nvPr>
+        </p:nvSpPr>
+        <p:spPr/>
+      </p:sp>
+      <p:sp>
+        <p:nvSpPr>
+          <p:cNvPr id="3" name="Notes Placeholder 2"/>
+          <p:cNvSpPr>
+            <a:spLocks noGrp="1"/>
+          </p:cNvSpPr>
+          <p:nvPr>
+            <p:ph type="body" idx="1"/>
+          </p:nvPr>
+        </p:nvSpPr>
+        <p:spPr/>
+        <p:txBody>
+          <a:bodyPr/>
+          <a:lstStyle/>
+          <a:p>
+            <a:r>
+              <a:t>Exercise: sketch the hierarchy, then the composition, then implement one part (a shooting behaviour any enemy can have).</a:t>
+            </a:r>
+          </a:p>
+        </p:txBody>
+      </p:sp>
+    </p:spTree>
+  </p:cSld>
+  <p:clrMapOvr>
+    <a:masterClrMapping/>
+  </p:clrMapOvr>
+</p:notes>
+</file>
+
+<file path=ppt/notesSlides/notesSlide39.xml><?xml version="1.0" encoding="utf-8"?>
+<p:notes xmlns:a="http://schemas.openxmlformats.org/drawingml/2006/main" xmlns:p="http://schemas.openxmlformats.org/presentationml/2006/main" xmlns:r="http://schemas.openxmlformats.org/officeDocument/2006/relationships">
+  <p:cSld>
+    <p:spTree>
+      <p:nvGrpSpPr>
+        <p:cNvPr id="1" name=""/>
+        <p:cNvGrpSpPr/>
+        <p:nvPr/>
+      </p:nvGrpSpPr>
+      <p:grpSpPr>
+        <a:xfrm>
+          <a:off x="0" y="0"/>
+          <a:ext cx="0" cy="0"/>
+          <a:chOff x="0" y="0"/>
+          <a:chExt cx="0" cy="0"/>
+        </a:xfrm>
+      </p:grpSpPr>
+      <p:sp>
+        <p:nvSpPr>
+          <p:cNvPr id="2" name="Slide Image Placeholder 1"/>
+          <p:cNvSpPr>
+            <a:spLocks noGrp="1"/>
+          </p:cNvSpPr>
+          <p:nvPr>
+            <p:ph type="sldImg" idx="2"/>
+          </p:nvPr>
+        </p:nvSpPr>
+        <p:spPr/>
+      </p:sp>
+      <p:sp>
+        <p:nvSpPr>
+          <p:cNvPr id="3" name="Notes Placeholder 2"/>
+          <p:cNvSpPr>
+            <a:spLocks noGrp="1"/>
+          </p:cNvSpPr>
+          <p:nvPr>
+            <p:ph type="body" idx="1"/>
+          </p:nvPr>
+        </p:nvSpPr>
+        <p:spPr/>
+        <p:txBody>
+          <a:bodyPr/>
+          <a:lstStyle/>
+          <a:p>
+            <a:r>
+              <a:t>Next milestone by session 09: the self-review, with an event map of your game.</a:t>
             </a:r>
           </a:p>
         </p:txBody>
@@ -4147,19 +3653,9 @@
           </a:bodyPr>
           <a:lstStyle/>
           <a:p>
-            <a:pPr indent="0" lvl="0" marL="0" rtl="0" algn="l">
-              <a:spcBef>
-                <a:spcPts val="0"/>
-              </a:spcBef>
-              <a:spcAft>
-                <a:spcPts val="0"/>
-              </a:spcAft>
-              <a:buNone/>
-            </a:pPr>
-            <a:r>
-              <a:t/>
-            </a:r>
-            <a:endParaRPr/>
+            <a:r>
+              <a:t>The main topic: composition vs. inheritance. With it: the Observer pattern and C# events, hitboxes, and a tweening system.</a:t>
+            </a:r>
           </a:p>
         </p:txBody>
       </p:sp>
@@ -4247,42 +3743,12 @@
           <a:lstStyle/>
           <a:p>
             <a:r>
-              <a:t>Talking points:</a:t>
-            </a:r>
-          </a:p>
-          <a:p>
-            <a:r>
-              <a:t>- All Source code for today’s game can be found here:</a:t>
-            </a:r>
-          </a:p>
-          <a:p>
-            <a:r>
-              <a:t>  - github.com/Metamate/gar-games (folder 08-zelda)</a:t>
-            </a:r>
-          </a:p>
-          <a:p>
-            <a:r>
-              <a:t>- Walkthrough in README.md</a:t>
-            </a:r>
-          </a:p>
-          <a:p>
-            <a:r>
-              <a:t>- The game is built up in steps: Zelda0 → Zelda7</a:t>
-            </a:r>
-          </a:p>
-          <a:p>
-            <a:r>
-              <a:t>  - Each step is a separate project that adds one concept</a:t>
-            </a:r>
-          </a:p>
-          <a:p>
-            <a:r>
-              <a:t>  - Compare neighbouring steps to see exactly what changed</a:t>
-            </a:r>
-          </a:p>
-          <a:p>
-            <a:r>
-              <a:t>- Zelda7 is the finished game: explore it, and start the exercises from it</a:t>
+              <a:t>Open gar-games/08-zelda live. Show the README: the step table, the code map, how to run a step.</a:t>
+            </a:r>
+          </a:p>
+          <a:p>
+            <a:r>
+              <a:t>Say: the site explains the ideas, the README helps you find them in the code, the slides are for today.</a:t>
             </a:r>
           </a:p>
         </p:txBody>
@@ -4370,19 +3836,9 @@
           </a:bodyPr>
           <a:lstStyle/>
           <a:p>
-            <a:pPr indent="0" lvl="0" marL="0" rtl="0" algn="l">
-              <a:spcBef>
-                <a:spcPts val="0"/>
-              </a:spcBef>
-              <a:spcAft>
-                <a:spcPts val="0"/>
-              </a:spcAft>
-              <a:buNone/>
-            </a:pPr>
-            <a:r>
-              <a:t/>
-            </a:r>
-            <a:endParaRPr/>
+            <a:r>
+              <a:t>The finished game’s main classes. Don’t read it all: find Entity, Player, Enemy, Room and Dungeon.</a:t>
+            </a:r>
           </a:p>
         </p:txBody>
       </p:sp>
@@ -4469,19 +3925,9 @@
           </a:bodyPr>
           <a:lstStyle/>
           <a:p>
-            <a:pPr indent="0" lvl="0" marL="0" rtl="0" algn="l">
-              <a:spcBef>
-                <a:spcPts val="0"/>
-              </a:spcBef>
-              <a:spcAft>
-                <a:spcPts val="0"/>
-              </a:spcAft>
-              <a:buNone/>
-            </a:pPr>
-            <a:r>
-              <a:t/>
-            </a:r>
-            <a:endParaRPr/>
+            <a:r>
+              <a:t>Fifteen minutes in pairs with Zelda7 and the README’s code map. Take answers to two or three of the questions afterwards.</a:t>
+            </a:r>
           </a:p>
         </p:txBody>
       </p:sp>
@@ -4568,20 +4014,9 @@
           </a:bodyPr>
           <a:lstStyle/>
           <a:p>
-            <a:pPr indent="0" lvl="0" marL="0" rtl="0" algn="l">
-              <a:spcBef>
-                <a:spcPts val="0"/>
-              </a:spcBef>
-              <a:spcAft>
-                <a:spcPts val="0"/>
-              </a:spcAft>
-              <a:buNone/>
-            </a:pPr>
-            <a:r>
-              <a:rPr lang="en"/>
-              <a:t>Today’s assets don’t all conform to the same grid size</a:t>
-            </a:r>
-            <a:endParaRPr/>
+            <a:r>
+              <a:t>The sheets: tiles, the player walking and swinging, and the monsters. Not all on the same grid size.</a:t>
+            </a:r>
           </a:p>
         </p:txBody>
       </p:sp>
@@ -4668,19 +4103,9 @@
           </a:bodyPr>
           <a:lstStyle/>
           <a:p>
-            <a:pPr indent="0" lvl="0" marL="0" rtl="0" algn="l">
-              <a:spcBef>
-                <a:spcPts val="0"/>
-              </a:spcBef>
-              <a:spcAft>
-                <a:spcPts val="0"/>
-              </a:spcAft>
-              <a:buNone/>
-            </a:pPr>
-            <a:r>
-              <a:t/>
-            </a:r>
-            <a:endParaRPr/>
+            <a:r>
+              <a:t>LabelTiles writes each tile’s number onto a copy of the sheet. The XML refers to tiles by number; nobody can read those off an image. Small tools like this are common in game projects.</a:t>
+            </a:r>
           </a:p>
         </p:txBody>
       </p:sp>
@@ -23412,6 +22837,179 @@
 </file>
 
 <file path=ppt/slides/slide37.xml><?xml version="1.0" encoding="utf-8"?>
+<p:sld xmlns:a="http://schemas.openxmlformats.org/drawingml/2006/main" xmlns:p="http://schemas.openxmlformats.org/presentationml/2006/main" xmlns:r="http://schemas.openxmlformats.org/officeDocument/2006/relationships">
+  <p:cSld>
+    <p:spTree>
+      <p:nvGrpSpPr>
+        <p:cNvPr id="1" name=""/>
+        <p:cNvGrpSpPr/>
+        <p:nvPr/>
+      </p:nvGrpSpPr>
+      <p:grpSpPr/>
+      <p:sp>
+        <p:nvSpPr>
+          <p:cNvPr id="2" name="Title 1"/>
+          <p:cNvSpPr>
+            <a:spLocks noGrp="1"/>
+          </p:cNvSpPr>
+          <p:nvPr>
+            <p:ph type="title"/>
+          </p:nvPr>
+        </p:nvSpPr>
+        <p:spPr/>
+        <p:txBody>
+          <a:bodyPr/>
+          <a:lstStyle/>
+          <a:p>
+            <a:pPr indent="0" lvl="0" marL="0" rtl="0" algn="l">
+              <a:spcBef>
+                <a:spcPts val="0"/>
+              </a:spcBef>
+              <a:spcAft>
+                <a:spcPts val="0"/>
+              </a:spcAft>
+              <a:buNone/>
+            </a:pPr>
+            <a:r>
+              <a:rPr lang="en"/>
+              <a:t>Check Yourself</a:t>
+            </a:r>
+            <a:endParaRPr/>
+          </a:p>
+        </p:txBody>
+      </p:sp>
+      <p:sp>
+        <p:nvSpPr>
+          <p:cNvPr id="3" name="Text Placeholder 2"/>
+          <p:cNvSpPr>
+            <a:spLocks noGrp="1"/>
+          </p:cNvSpPr>
+          <p:nvPr>
+            <p:ph type="body" idx="1"/>
+          </p:nvPr>
+        </p:nvSpPr>
+        <p:spPr>
+          <a:xfrm>
+            <a:off x="311700" y="885950"/>
+            <a:ext cx="8520600" cy="1719072"/>
+          </a:xfrm>
+        </p:spPr>
+        <p:txBody>
+          <a:bodyPr/>
+          <a:lstStyle/>
+          <a:p>
+            <a:pPr indent="-330200" lvl="0" marL="457200" rtl="0" algn="l">
+              <a:spcBef>
+                <a:spcPts val="0"/>
+              </a:spcBef>
+              <a:spcAft>
+                <a:spcPts val="0"/>
+              </a:spcAft>
+              <a:buSzPts val="1600"/>
+              <a:buChar char="●"/>
+            </a:pPr>
+            <a:r>
+              <a:rPr lang="en"/>
+              <a:t>When does inheritance fit, and when is composition better?</a:t>
+            </a:r>
+            <a:endParaRPr/>
+          </a:p>
+          <a:p>
+            <a:pPr indent="-330200" lvl="0" marL="457200" rtl="0" algn="l">
+              <a:spcBef>
+                <a:spcPts val="0"/>
+              </a:spcBef>
+              <a:spcAft>
+                <a:spcPts val="0"/>
+              </a:spcAft>
+              <a:buSzPts val="1600"/>
+              <a:buChar char="●"/>
+            </a:pPr>
+            <a:r>
+              <a:rPr lang="en"/>
+              <a:t>Why does Observer suit UI code particularly well?</a:t>
+            </a:r>
+            <a:endParaRPr/>
+          </a:p>
+          <a:p>
+            <a:pPr indent="-330200" lvl="0" marL="457200" rtl="0" algn="l">
+              <a:spcBef>
+                <a:spcPts val="0"/>
+              </a:spcBef>
+              <a:spcAft>
+                <a:spcPts val="0"/>
+              </a:spcAft>
+              <a:buSzPts val="1600"/>
+              <a:buChar char="●"/>
+            </a:pPr>
+            <a:r>
+              <a:rPr lang="en"/>
+              <a:t>What is the difference between a delegate and an event in C#?</a:t>
+            </a:r>
+            <a:endParaRPr/>
+          </a:p>
+          <a:p>
+            <a:pPr indent="-330200" lvl="0" marL="457200" rtl="0" algn="l">
+              <a:spcBef>
+                <a:spcPts val="0"/>
+              </a:spcBef>
+              <a:spcAft>
+                <a:spcPts val="0"/>
+              </a:spcAft>
+              <a:buSzPts val="1600"/>
+              <a:buChar char="●"/>
+            </a:pPr>
+            <a:r>
+              <a:rPr lang="en"/>
+              <a:t>What is the cost of data-driven design?</a:t>
+            </a:r>
+            <a:endParaRPr/>
+          </a:p>
+        </p:txBody>
+      </p:sp>
+      <p:sp>
+        <p:nvSpPr>
+          <p:cNvPr id="4" name="TextBox 3"/>
+          <p:cNvSpPr txBox="1"/>
+          <p:nvPr/>
+        </p:nvSpPr>
+        <p:spPr>
+          <a:xfrm>
+            <a:off x="457200" y="3182112"/>
+            <a:ext cx="8229600" cy="457200"/>
+          </a:xfrm>
+          <a:prstGeom prst="rect">
+            <a:avLst/>
+          </a:prstGeom>
+          <a:noFill/>
+        </p:spPr>
+        <p:txBody>
+          <a:bodyPr wrap="square">
+            <a:spAutoFit/>
+          </a:bodyPr>
+          <a:lstStyle/>
+          <a:p>
+            <a:pPr algn="ctr"/>
+            <a:r>
+              <a:rPr sz="1400" b="0" i="0">
+                <a:solidFill>
+                  <a:srgbClr val="9AA3AB"/>
+                </a:solidFill>
+              </a:rPr>
+              <a:t>The answers, and more questions, are on the course site.</a:t>
+            </a:r>
+          </a:p>
+        </p:txBody>
+      </p:sp>
+    </p:spTree>
+  </p:cSld>
+  <p:clrMapOvr>
+    <a:masterClrMapping/>
+  </p:clrMapOvr>
+</p:sld>
+</file>
+
+<file path=ppt/slides/slide38.xml><?xml version="1.0" encoding="utf-8"?>
 <p:sld xmlns:a="http://schemas.openxmlformats.org/drawingml/2006/main" xmlns:r="http://schemas.openxmlformats.org/officeDocument/2006/relationships" xmlns:mc="http://schemas.openxmlformats.org/markup-compatibility/2006" xmlns:mv="urn:schemas-microsoft-com:mac:vml" xmlns:p="http://schemas.openxmlformats.org/presentationml/2006/main" xmlns:c="http://schemas.openxmlformats.org/drawingml/2006/chart" xmlns:dgm="http://schemas.openxmlformats.org/drawingml/2006/diagram" xmlns:o="urn:schemas-microsoft-com:office:office" xmlns:v="urn:schemas-microsoft-com:vml" xmlns:pvml="urn:schemas-microsoft-com:office:powerpoint" xmlns:com="http://schemas.openxmlformats.org/drawingml/2006/compatibility" xmlns:p14="http://schemas.microsoft.com/office/powerpoint/2010/main" xmlns:p15="http://schemas.microsoft.com/office/powerpoint/2012/main" xmlns:ahyp="http://schemas.microsoft.com/office/drawing/2018/hyperlinkcolor">
   <p:cSld>
     <p:spTree>
@@ -24094,7 +23692,7 @@
 </p:sld>
 </file>
 
-<file path=ppt/slides/slide38.xml><?xml version="1.0" encoding="utf-8"?>
+<file path=ppt/slides/slide39.xml><?xml version="1.0" encoding="utf-8"?>
 <p:sld xmlns:a="http://schemas.openxmlformats.org/drawingml/2006/main" xmlns:p="http://schemas.openxmlformats.org/presentationml/2006/main" xmlns:r="http://schemas.openxmlformats.org/officeDocument/2006/relationships">
   <p:cSld>
     <p:spTree>
@@ -24233,179 +23831,6 @@
               <a:t>At least one refactoring</a:t>
             </a:r>
             <a:endParaRPr/>
-          </a:p>
-        </p:txBody>
-      </p:sp>
-    </p:spTree>
-  </p:cSld>
-  <p:clrMapOvr>
-    <a:masterClrMapping/>
-  </p:clrMapOvr>
-</p:sld>
-</file>
-
-<file path=ppt/slides/slide39.xml><?xml version="1.0" encoding="utf-8"?>
-<p:sld xmlns:a="http://schemas.openxmlformats.org/drawingml/2006/main" xmlns:p="http://schemas.openxmlformats.org/presentationml/2006/main" xmlns:r="http://schemas.openxmlformats.org/officeDocument/2006/relationships">
-  <p:cSld>
-    <p:spTree>
-      <p:nvGrpSpPr>
-        <p:cNvPr id="1" name=""/>
-        <p:cNvGrpSpPr/>
-        <p:nvPr/>
-      </p:nvGrpSpPr>
-      <p:grpSpPr/>
-      <p:sp>
-        <p:nvSpPr>
-          <p:cNvPr id="2" name="Title 1"/>
-          <p:cNvSpPr>
-            <a:spLocks noGrp="1"/>
-          </p:cNvSpPr>
-          <p:nvPr>
-            <p:ph type="title"/>
-          </p:nvPr>
-        </p:nvSpPr>
-        <p:spPr/>
-        <p:txBody>
-          <a:bodyPr/>
-          <a:lstStyle/>
-          <a:p>
-            <a:pPr indent="0" lvl="0" marL="0" rtl="0" algn="l">
-              <a:spcBef>
-                <a:spcPts val="0"/>
-              </a:spcBef>
-              <a:spcAft>
-                <a:spcPts val="0"/>
-              </a:spcAft>
-              <a:buNone/>
-            </a:pPr>
-            <a:r>
-              <a:rPr lang="en"/>
-              <a:t>Check Yourself</a:t>
-            </a:r>
-            <a:endParaRPr/>
-          </a:p>
-        </p:txBody>
-      </p:sp>
-      <p:sp>
-        <p:nvSpPr>
-          <p:cNvPr id="3" name="Text Placeholder 2"/>
-          <p:cNvSpPr>
-            <a:spLocks noGrp="1"/>
-          </p:cNvSpPr>
-          <p:nvPr>
-            <p:ph type="body" idx="1"/>
-          </p:nvPr>
-        </p:nvSpPr>
-        <p:spPr>
-          <a:xfrm>
-            <a:off x="311700" y="885950"/>
-            <a:ext cx="8520600" cy="1719072"/>
-          </a:xfrm>
-        </p:spPr>
-        <p:txBody>
-          <a:bodyPr/>
-          <a:lstStyle/>
-          <a:p>
-            <a:pPr indent="-330200" lvl="0" marL="457200" rtl="0" algn="l">
-              <a:spcBef>
-                <a:spcPts val="0"/>
-              </a:spcBef>
-              <a:spcAft>
-                <a:spcPts val="0"/>
-              </a:spcAft>
-              <a:buSzPts val="1600"/>
-              <a:buChar char="●"/>
-            </a:pPr>
-            <a:r>
-              <a:rPr lang="en"/>
-              <a:t>When does inheritance fit, and when is composition better?</a:t>
-            </a:r>
-            <a:endParaRPr/>
-          </a:p>
-          <a:p>
-            <a:pPr indent="-330200" lvl="0" marL="457200" rtl="0" algn="l">
-              <a:spcBef>
-                <a:spcPts val="0"/>
-              </a:spcBef>
-              <a:spcAft>
-                <a:spcPts val="0"/>
-              </a:spcAft>
-              <a:buSzPts val="1600"/>
-              <a:buChar char="●"/>
-            </a:pPr>
-            <a:r>
-              <a:rPr lang="en"/>
-              <a:t>Why does Observer suit UI code particularly well?</a:t>
-            </a:r>
-            <a:endParaRPr/>
-          </a:p>
-          <a:p>
-            <a:pPr indent="-330200" lvl="0" marL="457200" rtl="0" algn="l">
-              <a:spcBef>
-                <a:spcPts val="0"/>
-              </a:spcBef>
-              <a:spcAft>
-                <a:spcPts val="0"/>
-              </a:spcAft>
-              <a:buSzPts val="1600"/>
-              <a:buChar char="●"/>
-            </a:pPr>
-            <a:r>
-              <a:rPr lang="en"/>
-              <a:t>What is the difference between a delegate and an event in C#?</a:t>
-            </a:r>
-            <a:endParaRPr/>
-          </a:p>
-          <a:p>
-            <a:pPr indent="-330200" lvl="0" marL="457200" rtl="0" algn="l">
-              <a:spcBef>
-                <a:spcPts val="0"/>
-              </a:spcBef>
-              <a:spcAft>
-                <a:spcPts val="0"/>
-              </a:spcAft>
-              <a:buSzPts val="1600"/>
-              <a:buChar char="●"/>
-            </a:pPr>
-            <a:r>
-              <a:rPr lang="en"/>
-              <a:t>What is the cost of data-driven design?</a:t>
-            </a:r>
-            <a:endParaRPr/>
-          </a:p>
-        </p:txBody>
-      </p:sp>
-      <p:sp>
-        <p:nvSpPr>
-          <p:cNvPr id="4" name="TextBox 3"/>
-          <p:cNvSpPr txBox="1"/>
-          <p:nvPr/>
-        </p:nvSpPr>
-        <p:spPr>
-          <a:xfrm>
-            <a:off x="457200" y="3182112"/>
-            <a:ext cx="8229600" cy="457200"/>
-          </a:xfrm>
-          <a:prstGeom prst="rect">
-            <a:avLst/>
-          </a:prstGeom>
-          <a:noFill/>
-        </p:spPr>
-        <p:txBody>
-          <a:bodyPr wrap="square">
-            <a:spAutoFit/>
-          </a:bodyPr>
-          <a:lstStyle/>
-          <a:p>
-            <a:pPr algn="ctr"/>
-            <a:r>
-              <a:rPr sz="1400" b="0" i="0">
-                <a:solidFill>
-                  <a:srgbClr val="9AA3AB"/>
-                </a:solidFill>
-              </a:rPr>
-              <a:t>The answers, and more questions, are on the course site.</a:t>
-            </a:r>
           </a:p>
         </p:txBody>
       </p:sp>

--- a/slides/08 The Legend of Zelda.pptx
+++ b/slides/08 The Legend of Zelda.pptx
@@ -3001,7 +3001,12 @@
           <a:lstStyle/>
           <a:p>
             <a:r>
-              <a:t>Exercise: hearts, pots to lift, pots to throw.</a:t>
+              <a:t>Exercise: keys dropped by enemies, and locked doors they open.</a:t>
+            </a:r>
+          </a:p>
+          <a:p>
+            <a:r>
+              <a:t>It joins the two ideas of the day: the key drop is an event, the locked look is data.</a:t>
             </a:r>
           </a:p>
           <a:p>
@@ -22146,7 +22151,7 @@
                   <a:schemeClr val="accent5"/>
                 </a:solidFill>
               </a:rPr>
-              <a:t>Extending Zelda</a:t>
+              <a:t>Keys and Locked Doors</a:t>
             </a:r>
             <a:endParaRPr>
               <a:solidFill>
@@ -22208,7 +22213,7 @@
             </a:pPr>
             <a:r>
               <a:rPr lang="en"/>
-              <a:t>Enemies sometimes drop a heart that heals one whole heart</a:t>
+              <a:t>Some enemies drop a key when they die: use an event</a:t>
             </a:r>
             <a:endParaRPr/>
           </a:p>
@@ -22225,7 +22230,7 @@
             </a:pPr>
             <a:r>
               <a:rPr lang="en"/>
-              <a:t>The player lifts pots (the animations are in the sheet), and carries them</a:t>
+              <a:t>A locked state for doorways, in door_layouts.xml</a:t>
             </a:r>
             <a:endParaRPr/>
           </a:p>
@@ -22242,7 +22247,7 @@
             </a:pPr>
             <a:r>
               <a:rPr lang="en"/>
-              <a:t>Thrown pots damage enemies, and break on walls, enemies or after four tiles</a:t>
+              <a:t>A key opens a locked door for good; show the keys next to the hearts</a:t>
             </a:r>
             <a:endParaRPr/>
           </a:p>

--- a/slides/08 The Legend of Zelda.pptx
+++ b/slides/08 The Legend of Zelda.pptx
@@ -3105,7 +3105,7 @@
           </a:p>
           <a:p>
             <a:r>
-              <a:t>Ask two groups to share one answer each. Push for concrete classes and files, not intentions.</a:t>
+              <a:t>Ask two groups to share one answer each, and push them to name actual classes and files.</a:t>
             </a:r>
           </a:p>
         </p:txBody>
@@ -11757,7 +11757,7 @@
             </a:pPr>
             <a:r>
               <a:rPr lang="en"/>
-              <a:t>A delegate is a variable that holds a reference to a method — call it later, from anywhere.</a:t>
+              <a:t>A delegate is a variable that holds a reference to a method, to call later from anywhere.</a:t>
             </a:r>
             <a:endParaRPr/>
           </a:p>
@@ -13060,7 +13060,7 @@
             </a:pPr>
             <a:r>
               <a:rPr lang="en"/>
-              <a:t>under the hood it is a delegate, but the event keyword restricts what outside code can do with it</a:t>
+              <a:t>It is still a delegate, but the event keyword restricts what outside code can do with it</a:t>
             </a:r>
             <a:endParaRPr/>
           </a:p>
@@ -20512,7 +20512,7 @@
                   <a:srgbClr val="DEE2E6"/>
                 </a:solidFill>
               </a:rPr>
-              <a:t>No progress variable, no “is it done yet?” check</a:t>
+              <a:t>The dungeon keeps no progress variable, and never asks if the scroll is done</a:t>
             </a:r>
             <a:endParaRPr/>
           </a:p>
@@ -24471,7 +24471,7 @@
             </a:pPr>
             <a:r>
               <a:rPr lang="en"/>
-              <a:t>Its README: the steps (Zelda0 to Zelda7), a map of the code, how to run it</a:t>
+              <a:t>Its README: the steps (Zelda0 to Zelda7), where things are in the code, how to run it</a:t>
             </a:r>
             <a:endParaRPr/>
           </a:p>

--- a/slides/08 The Legend of Zelda.pptx
+++ b/slides/08 The Legend of Zelda.pptx
@@ -9664,7 +9664,7 @@
         </p:blipFill>
         <p:spPr>
           <a:xfrm>
-            <a:off x="1866575" y="1138124"/>
+            <a:off x="1866587" y="960120"/>
             <a:ext cx="5410826" cy="3554650"/>
           </a:xfrm>
           <a:prstGeom prst="rect">
@@ -9676,6 +9676,40 @@
           </a:ln>
         </p:spPr>
       </p:pic>
+      <p:sp>
+        <p:nvSpPr>
+          <p:cNvPr id="47" name="TextBox 46"/>
+          <p:cNvSpPr txBox="1"/>
+          <p:nvPr/>
+        </p:nvSpPr>
+        <p:spPr>
+          <a:xfrm>
+            <a:off x="457200" y="4736592"/>
+            <a:ext cx="8229600" cy="274320"/>
+          </a:xfrm>
+          <a:prstGeom prst="rect">
+            <a:avLst/>
+          </a:prstGeom>
+          <a:noFill/>
+        </p:spPr>
+        <p:txBody>
+          <a:bodyPr wrap="square">
+            <a:spAutoFit/>
+          </a:bodyPr>
+          <a:lstStyle/>
+          <a:p>
+            <a:pPr algn="ctr"/>
+            <a:r>
+              <a:rPr sz="900" b="0" i="0">
+                <a:solidFill>
+                  <a:srgbClr val="9AA3AB"/>
+                </a:solidFill>
+              </a:rPr>
+              <a:t>The Legend of Zelda (Nintendo, 1986). Screenshot © Nintendo.</a:t>
+            </a:r>
+          </a:p>
+        </p:txBody>
+      </p:sp>
     </p:spTree>
   </p:cSld>
   <p:clrMapOvr>

--- a/slides/08 The Legend of Zelda.pptx
+++ b/slides/08 The Legend of Zelda.pptx
@@ -24,6 +24,7 @@
     <p:sldId id="266" r:id="rId16"/>
     <p:sldId id="267" r:id="rId17"/>
     <p:sldId id="268" r:id="rId18"/>
+    <p:sldId id="295" r:id="rId54"/>
     <p:sldId id="269" r:id="rId19"/>
     <p:sldId id="270" r:id="rId20"/>
     <p:sldId id="271" r:id="rId21"/>
@@ -3660,6 +3661,64 @@
           <a:p>
             <a:r>
               <a:t>The main topic: composition vs. inheritance. With it: the Observer pattern and C# events, hitboxes, and a tweening system.</a:t>
+            </a:r>
+          </a:p>
+        </p:txBody>
+      </p:sp>
+    </p:spTree>
+  </p:cSld>
+  <p:clrMapOvr>
+    <a:masterClrMapping/>
+  </p:clrMapOvr>
+</p:notes>
+</file>
+
+<file path=ppt/notesSlides/notesSlide40.xml><?xml version="1.0" encoding="utf-8"?>
+<p:notes xmlns:a="http://schemas.openxmlformats.org/drawingml/2006/main" xmlns:p="http://schemas.openxmlformats.org/presentationml/2006/main" xmlns:r="http://schemas.openxmlformats.org/officeDocument/2006/relationships">
+  <p:cSld>
+    <p:spTree>
+      <p:nvGrpSpPr>
+        <p:cNvPr id="1" name=""/>
+        <p:cNvGrpSpPr/>
+        <p:nvPr/>
+      </p:nvGrpSpPr>
+      <p:grpSpPr>
+        <a:xfrm>
+          <a:off x="0" y="0"/>
+          <a:ext cx="0" cy="0"/>
+          <a:chOff x="0" y="0"/>
+          <a:chExt cx="0" cy="0"/>
+        </a:xfrm>
+      </p:grpSpPr>
+      <p:sp>
+        <p:nvSpPr>
+          <p:cNvPr id="2" name="Slide Image Placeholder 1"/>
+          <p:cNvSpPr>
+            <a:spLocks noGrp="1"/>
+          </p:cNvSpPr>
+          <p:nvPr>
+            <p:ph type="sldImg" idx="2"/>
+          </p:nvPr>
+        </p:nvSpPr>
+        <p:spPr/>
+      </p:sp>
+      <p:sp>
+        <p:nvSpPr>
+          <p:cNvPr id="3" name="Notes Placeholder 2"/>
+          <p:cNvSpPr>
+            <a:spLocks noGrp="1"/>
+          </p:cNvSpPr>
+          <p:nvPr>
+            <p:ph type="body" idx="1"/>
+          </p:nvPr>
+        </p:nvSpPr>
+        <p:spPr/>
+        <p:txBody>
+          <a:bodyPr/>
+          <a:lstStyle/>
+          <a:p>
+            <a:r>
+              <a:t>Pairs, about 5 minutes. SwordReach in GameSettings. The hitbox is built from it when a swing starts; the sprite doesn’t change, so hits now land where the sword isn’t drawn.</a:t>
             </a:r>
           </a:p>
         </p:txBody>
@@ -9016,6 +9075,128 @@
 </file>
 
 <file path=ppt/slides/slide17.xml><?xml version="1.0" encoding="utf-8"?>
+<p:sld xmlns:a="http://schemas.openxmlformats.org/drawingml/2006/main" xmlns:p="http://schemas.openxmlformats.org/presentationml/2006/main" xmlns:r="http://schemas.openxmlformats.org/officeDocument/2006/relationships">
+  <p:cSld>
+    <p:spTree>
+      <p:nvGrpSpPr>
+        <p:cNvPr id="1" name=""/>
+        <p:cNvGrpSpPr/>
+        <p:nvPr/>
+      </p:nvGrpSpPr>
+      <p:grpSpPr/>
+      <p:sp>
+        <p:nvSpPr>
+          <p:cNvPr id="2" name="Title 1"/>
+          <p:cNvSpPr>
+            <a:spLocks noGrp="1"/>
+          </p:cNvSpPr>
+          <p:nvPr>
+            <p:ph type="title"/>
+          </p:nvPr>
+        </p:nvSpPr>
+        <p:spPr/>
+        <p:txBody>
+          <a:bodyPr/>
+          <a:lstStyle/>
+          <a:p>
+            <a:pPr indent="0" lvl="0" marL="0" rtl="0" algn="l">
+              <a:spcBef>
+                <a:spcPts val="0"/>
+              </a:spcBef>
+              <a:spcAft>
+                <a:spcPts val="0"/>
+              </a:spcAft>
+              <a:buNone/>
+            </a:pPr>
+            <a:r>
+              <a:rPr lang="en"/>
+              <a:t>Try It: Sword Reach</a:t>
+            </a:r>
+            <a:endParaRPr/>
+          </a:p>
+        </p:txBody>
+      </p:sp>
+      <p:sp>
+        <p:nvSpPr>
+          <p:cNvPr id="3" name="Text Placeholder 2"/>
+          <p:cNvSpPr>
+            <a:spLocks noGrp="1"/>
+          </p:cNvSpPr>
+          <p:nvPr>
+            <p:ph type="body" idx="1"/>
+          </p:nvPr>
+        </p:nvSpPr>
+        <p:spPr>
+          <a:xfrm>
+            <a:off x="311700" y="885950"/>
+            <a:ext cx="8520600" cy="1289304"/>
+          </a:xfrm>
+        </p:spPr>
+        <p:txBody>
+          <a:bodyPr/>
+          <a:lstStyle/>
+          <a:p>
+            <a:pPr indent="-330200" lvl="0" marL="457200" rtl="0" algn="l">
+              <a:spcBef>
+                <a:spcPts val="0"/>
+              </a:spcBef>
+              <a:spcAft>
+                <a:spcPts val="0"/>
+              </a:spcAft>
+              <a:buSzPts val="1600"/>
+              <a:buChar char="●"/>
+            </a:pPr>
+            <a:r>
+              <a:rPr lang="en"/>
+              <a:t>In Zelda7’s GameSettings:</a:t>
+            </a:r>
+            <a:endParaRPr/>
+          </a:p>
+          <a:p>
+            <a:pPr indent="-330200" lvl="0" marL="457200" rtl="0" algn="l">
+              <a:spcBef>
+                <a:spcPts val="0"/>
+              </a:spcBef>
+              <a:spcAft>
+                <a:spcPts val="0"/>
+              </a:spcAft>
+              <a:buSzPts val="1600"/>
+              <a:buChar char="●"/>
+            </a:pPr>
+            <a:r>
+              <a:rPr lang="en"/>
+              <a:t>Make the sword reach twice as far</a:t>
+            </a:r>
+            <a:endParaRPr/>
+          </a:p>
+          <a:p>
+            <a:pPr indent="-330200" lvl="0" marL="457200" rtl="0" algn="l">
+              <a:spcBef>
+                <a:spcPts val="0"/>
+              </a:spcBef>
+              <a:spcAft>
+                <a:spcPts val="0"/>
+              </a:spcAft>
+              <a:buSzPts val="1600"/>
+              <a:buChar char="●"/>
+            </a:pPr>
+            <a:r>
+              <a:rPr lang="en"/>
+              <a:t>Play: does it still feel fair?</a:t>
+            </a:r>
+            <a:endParaRPr/>
+          </a:p>
+        </p:txBody>
+      </p:sp>
+    </p:spTree>
+  </p:cSld>
+  <p:clrMapOvr>
+    <a:masterClrMapping/>
+  </p:clrMapOvr>
+</p:sld>
+</file>
+
+<file path=ppt/slides/slide18.xml><?xml version="1.0" encoding="utf-8"?>
 <p:sld xmlns:a="http://schemas.openxmlformats.org/drawingml/2006/main" xmlns:r="http://schemas.openxmlformats.org/officeDocument/2006/relationships" xmlns:mc="http://schemas.openxmlformats.org/markup-compatibility/2006" xmlns:mv="urn:schemas-microsoft-com:mac:vml" xmlns:p="http://schemas.openxmlformats.org/presentationml/2006/main" xmlns:c="http://schemas.openxmlformats.org/drawingml/2006/chart" xmlns:dgm="http://schemas.openxmlformats.org/drawingml/2006/diagram" xmlns:o="urn:schemas-microsoft-com:office:office" xmlns:v="urn:schemas-microsoft-com:vml" xmlns:pvml="urn:schemas-microsoft-com:office:powerpoint" xmlns:com="http://schemas.openxmlformats.org/drawingml/2006/compatibility" xmlns:p14="http://schemas.microsoft.com/office/powerpoint/2010/main" xmlns:p15="http://schemas.microsoft.com/office/powerpoint/2012/main" xmlns:ahyp="http://schemas.microsoft.com/office/drawing/2018/hyperlinkcolor">
   <p:cSld>
     <p:spTree>
@@ -9405,7 +9586,7 @@
 </p:sld>
 </file>
 
-<file path=ppt/slides/slide18.xml><?xml version="1.0" encoding="utf-8"?>
+<file path=ppt/slides/slide19.xml><?xml version="1.0" encoding="utf-8"?>
 <p:sld xmlns:a="http://schemas.openxmlformats.org/drawingml/2006/main" xmlns:r="http://schemas.openxmlformats.org/officeDocument/2006/relationships" xmlns:mc="http://schemas.openxmlformats.org/markup-compatibility/2006" xmlns:mv="urn:schemas-microsoft-com:mac:vml" xmlns:p="http://schemas.openxmlformats.org/presentationml/2006/main" xmlns:c="http://schemas.openxmlformats.org/drawingml/2006/chart" xmlns:dgm="http://schemas.openxmlformats.org/drawingml/2006/diagram" xmlns:o="urn:schemas-microsoft-com:office:office" xmlns:v="urn:schemas-microsoft-com:vml" xmlns:pvml="urn:schemas-microsoft-com:office:powerpoint" xmlns:com="http://schemas.openxmlformats.org/drawingml/2006/compatibility" xmlns:p14="http://schemas.microsoft.com/office/powerpoint/2010/main" xmlns:p15="http://schemas.microsoft.com/office/powerpoint/2012/main" xmlns:ahyp="http://schemas.microsoft.com/office/drawing/2018/hyperlinkcolor">
   <p:cSld>
     <p:spTree>
@@ -9480,99 +9661,6 @@
           <a:xfrm>
             <a:off x="2247900" y="1280598"/>
             <a:ext cx="4648200" cy="2905125"/>
-          </a:xfrm>
-          <a:prstGeom prst="rect">
-            <a:avLst/>
-          </a:prstGeom>
-          <a:noFill/>
-          <a:ln>
-            <a:noFill/>
-          </a:ln>
-        </p:spPr>
-      </p:pic>
-    </p:spTree>
-  </p:cSld>
-  <p:clrMapOvr>
-    <a:masterClrMapping/>
-  </p:clrMapOvr>
-</p:sld>
-</file>
-
-<file path=ppt/slides/slide19.xml><?xml version="1.0" encoding="utf-8"?>
-<p:sld xmlns:a="http://schemas.openxmlformats.org/drawingml/2006/main" xmlns:r="http://schemas.openxmlformats.org/officeDocument/2006/relationships" xmlns:mc="http://schemas.openxmlformats.org/markup-compatibility/2006" xmlns:mv="urn:schemas-microsoft-com:mac:vml" xmlns:p="http://schemas.openxmlformats.org/presentationml/2006/main" xmlns:c="http://schemas.openxmlformats.org/drawingml/2006/chart" xmlns:dgm="http://schemas.openxmlformats.org/drawingml/2006/diagram" xmlns:o="urn:schemas-microsoft-com:office:office" xmlns:v="urn:schemas-microsoft-com:vml" xmlns:pvml="urn:schemas-microsoft-com:office:powerpoint" xmlns:com="http://schemas.openxmlformats.org/drawingml/2006/compatibility" xmlns:p14="http://schemas.microsoft.com/office/powerpoint/2010/main" xmlns:p15="http://schemas.microsoft.com/office/powerpoint/2012/main" xmlns:ahyp="http://schemas.microsoft.com/office/drawing/2018/hyperlinkcolor">
-  <p:cSld>
-    <p:spTree>
-      <p:nvGrpSpPr>
-        <p:cNvPr id="138" name="Shape 138"/>
-        <p:cNvGrpSpPr/>
-        <p:nvPr/>
-      </p:nvGrpSpPr>
-      <p:grpSpPr>
-        <a:xfrm>
-          <a:off x="0" y="0"/>
-          <a:ext cx="0" cy="0"/>
-          <a:chOff x="0" y="0"/>
-          <a:chExt cx="0" cy="0"/>
-        </a:xfrm>
-      </p:grpSpPr>
-      <p:sp>
-        <p:nvSpPr>
-          <p:cNvPr id="139" name="Google Shape;139;p24"/>
-          <p:cNvSpPr txBox="1"/>
-          <p:nvPr>
-            <p:ph type="title"/>
-          </p:nvPr>
-        </p:nvSpPr>
-        <p:spPr>
-          <a:xfrm>
-            <a:off x="311700" y="195615"/>
-            <a:ext cx="8520600" cy="572700"/>
-          </a:xfrm>
-          <a:prstGeom prst="rect">
-            <a:avLst/>
-          </a:prstGeom>
-        </p:spPr>
-        <p:txBody>
-          <a:bodyPr anchorCtr="0" anchor="t" bIns="91425" lIns="91425" spcFirstLastPara="1" rIns="91425" wrap="square" tIns="91425">
-            <a:normAutofit fontScale="90000"/>
-          </a:bodyPr>
-          <a:lstStyle/>
-          <a:p>
-            <a:pPr indent="0" lvl="0" marL="0" rtl="0" algn="l">
-              <a:spcBef>
-                <a:spcPts val="0"/>
-              </a:spcBef>
-              <a:spcAft>
-                <a:spcPts val="0"/>
-              </a:spcAft>
-              <a:buNone/>
-            </a:pPr>
-            <a:r>
-              <a:rPr lang="en"/>
-              <a:t>Observer Pattern</a:t>
-            </a:r>
-            <a:endParaRPr/>
-          </a:p>
-        </p:txBody>
-      </p:sp>
-      <p:pic>
-        <p:nvPicPr>
-          <p:cNvPr id="140" name="Google Shape;140;p24"/>
-          <p:cNvPicPr preferRelativeResize="0"/>
-          <p:nvPr/>
-        </p:nvPicPr>
-        <p:blipFill>
-          <a:blip r:embed="rId3">
-            <a:alphaModFix/>
-          </a:blip>
-          <a:stretch>
-            <a:fillRect/>
-          </a:stretch>
-        </p:blipFill>
-        <p:spPr>
-          <a:xfrm>
-            <a:off x="1017138" y="1498598"/>
-            <a:ext cx="7109724" cy="2936950"/>
           </a:xfrm>
           <a:prstGeom prst="rect">
             <a:avLst/>
@@ -9719,6 +9807,99 @@
 </file>
 
 <file path=ppt/slides/slide20.xml><?xml version="1.0" encoding="utf-8"?>
+<p:sld xmlns:a="http://schemas.openxmlformats.org/drawingml/2006/main" xmlns:r="http://schemas.openxmlformats.org/officeDocument/2006/relationships" xmlns:mc="http://schemas.openxmlformats.org/markup-compatibility/2006" xmlns:mv="urn:schemas-microsoft-com:mac:vml" xmlns:p="http://schemas.openxmlformats.org/presentationml/2006/main" xmlns:c="http://schemas.openxmlformats.org/drawingml/2006/chart" xmlns:dgm="http://schemas.openxmlformats.org/drawingml/2006/diagram" xmlns:o="urn:schemas-microsoft-com:office:office" xmlns:v="urn:schemas-microsoft-com:vml" xmlns:pvml="urn:schemas-microsoft-com:office:powerpoint" xmlns:com="http://schemas.openxmlformats.org/drawingml/2006/compatibility" xmlns:p14="http://schemas.microsoft.com/office/powerpoint/2010/main" xmlns:p15="http://schemas.microsoft.com/office/powerpoint/2012/main" xmlns:ahyp="http://schemas.microsoft.com/office/drawing/2018/hyperlinkcolor">
+  <p:cSld>
+    <p:spTree>
+      <p:nvGrpSpPr>
+        <p:cNvPr id="138" name="Shape 138"/>
+        <p:cNvGrpSpPr/>
+        <p:nvPr/>
+      </p:nvGrpSpPr>
+      <p:grpSpPr>
+        <a:xfrm>
+          <a:off x="0" y="0"/>
+          <a:ext cx="0" cy="0"/>
+          <a:chOff x="0" y="0"/>
+          <a:chExt cx="0" cy="0"/>
+        </a:xfrm>
+      </p:grpSpPr>
+      <p:sp>
+        <p:nvSpPr>
+          <p:cNvPr id="139" name="Google Shape;139;p24"/>
+          <p:cNvSpPr txBox="1"/>
+          <p:nvPr>
+            <p:ph type="title"/>
+          </p:nvPr>
+        </p:nvSpPr>
+        <p:spPr>
+          <a:xfrm>
+            <a:off x="311700" y="195615"/>
+            <a:ext cx="8520600" cy="572700"/>
+          </a:xfrm>
+          <a:prstGeom prst="rect">
+            <a:avLst/>
+          </a:prstGeom>
+        </p:spPr>
+        <p:txBody>
+          <a:bodyPr anchorCtr="0" anchor="t" bIns="91425" lIns="91425" spcFirstLastPara="1" rIns="91425" wrap="square" tIns="91425">
+            <a:normAutofit fontScale="90000"/>
+          </a:bodyPr>
+          <a:lstStyle/>
+          <a:p>
+            <a:pPr indent="0" lvl="0" marL="0" rtl="0" algn="l">
+              <a:spcBef>
+                <a:spcPts val="0"/>
+              </a:spcBef>
+              <a:spcAft>
+                <a:spcPts val="0"/>
+              </a:spcAft>
+              <a:buNone/>
+            </a:pPr>
+            <a:r>
+              <a:rPr lang="en"/>
+              <a:t>Observer Pattern</a:t>
+            </a:r>
+            <a:endParaRPr/>
+          </a:p>
+        </p:txBody>
+      </p:sp>
+      <p:pic>
+        <p:nvPicPr>
+          <p:cNvPr id="140" name="Google Shape;140;p24"/>
+          <p:cNvPicPr preferRelativeResize="0"/>
+          <p:nvPr/>
+        </p:nvPicPr>
+        <p:blipFill>
+          <a:blip r:embed="rId3">
+            <a:alphaModFix/>
+          </a:blip>
+          <a:stretch>
+            <a:fillRect/>
+          </a:stretch>
+        </p:blipFill>
+        <p:spPr>
+          <a:xfrm>
+            <a:off x="1017138" y="1498598"/>
+            <a:ext cx="7109724" cy="2936950"/>
+          </a:xfrm>
+          <a:prstGeom prst="rect">
+            <a:avLst/>
+          </a:prstGeom>
+          <a:noFill/>
+          <a:ln>
+            <a:noFill/>
+          </a:ln>
+        </p:spPr>
+      </p:pic>
+    </p:spTree>
+  </p:cSld>
+  <p:clrMapOvr>
+    <a:masterClrMapping/>
+  </p:clrMapOvr>
+</p:sld>
+</file>
+
+<file path=ppt/slides/slide21.xml><?xml version="1.0" encoding="utf-8"?>
 <p:sld xmlns:a="http://schemas.openxmlformats.org/drawingml/2006/main" xmlns:r="http://schemas.openxmlformats.org/officeDocument/2006/relationships" xmlns:mc="http://schemas.openxmlformats.org/markup-compatibility/2006" xmlns:mv="urn:schemas-microsoft-com:mac:vml" xmlns:p="http://schemas.openxmlformats.org/presentationml/2006/main" xmlns:c="http://schemas.openxmlformats.org/drawingml/2006/chart" xmlns:dgm="http://schemas.openxmlformats.org/drawingml/2006/diagram" xmlns:o="urn:schemas-microsoft-com:office:office" xmlns:v="urn:schemas-microsoft-com:vml" xmlns:pvml="urn:schemas-microsoft-com:office:powerpoint" xmlns:com="http://schemas.openxmlformats.org/drawingml/2006/compatibility" xmlns:p14="http://schemas.microsoft.com/office/powerpoint/2010/main" xmlns:p15="http://schemas.microsoft.com/office/powerpoint/2012/main" xmlns:ahyp="http://schemas.microsoft.com/office/drawing/2018/hyperlinkcolor">
   <p:cSld>
     <p:spTree>
@@ -9959,7 +10140,7 @@
 </p:sld>
 </file>
 
-<file path=ppt/slides/slide21.xml><?xml version="1.0" encoding="utf-8"?>
+<file path=ppt/slides/slide22.xml><?xml version="1.0" encoding="utf-8"?>
 <p:sld xmlns:a="http://schemas.openxmlformats.org/drawingml/2006/main" xmlns:r="http://schemas.openxmlformats.org/officeDocument/2006/relationships" xmlns:mc="http://schemas.openxmlformats.org/markup-compatibility/2006" xmlns:mv="urn:schemas-microsoft-com:mac:vml" xmlns:p="http://schemas.openxmlformats.org/presentationml/2006/main" xmlns:c="http://schemas.openxmlformats.org/drawingml/2006/chart" xmlns:dgm="http://schemas.openxmlformats.org/drawingml/2006/diagram" xmlns:o="urn:schemas-microsoft-com:office:office" xmlns:v="urn:schemas-microsoft-com:vml" xmlns:pvml="urn:schemas-microsoft-com:office:powerpoint" xmlns:com="http://schemas.openxmlformats.org/drawingml/2006/compatibility" xmlns:p14="http://schemas.microsoft.com/office/powerpoint/2010/main" xmlns:p15="http://schemas.microsoft.com/office/powerpoint/2012/main" xmlns:ahyp="http://schemas.microsoft.com/office/drawing/2018/hyperlinkcolor">
   <p:cSld>
     <p:spTree>
@@ -10139,7 +10320,7 @@
 </p:sld>
 </file>
 
-<file path=ppt/slides/slide22.xml><?xml version="1.0" encoding="utf-8"?>
+<file path=ppt/slides/slide23.xml><?xml version="1.0" encoding="utf-8"?>
 <p:sld xmlns:a="http://schemas.openxmlformats.org/drawingml/2006/main" xmlns:r="http://schemas.openxmlformats.org/officeDocument/2006/relationships" xmlns:mc="http://schemas.openxmlformats.org/markup-compatibility/2006" xmlns:mv="urn:schemas-microsoft-com:mac:vml" xmlns:p="http://schemas.openxmlformats.org/presentationml/2006/main" xmlns:c="http://schemas.openxmlformats.org/drawingml/2006/chart" xmlns:dgm="http://schemas.openxmlformats.org/drawingml/2006/diagram" xmlns:o="urn:schemas-microsoft-com:office:office" xmlns:v="urn:schemas-microsoft-com:vml" xmlns:pvml="urn:schemas-microsoft-com:office:powerpoint" xmlns:com="http://schemas.openxmlformats.org/drawingml/2006/compatibility" xmlns:p14="http://schemas.microsoft.com/office/powerpoint/2010/main" xmlns:p15="http://schemas.microsoft.com/office/powerpoint/2012/main" xmlns:ahyp="http://schemas.microsoft.com/office/drawing/2018/hyperlinkcolor">
   <p:cSld>
     <p:spTree>
@@ -10380,7 +10561,7 @@
 </p:sld>
 </file>
 
-<file path=ppt/slides/slide23.xml><?xml version="1.0" encoding="utf-8"?>
+<file path=ppt/slides/slide24.xml><?xml version="1.0" encoding="utf-8"?>
 <p:sld xmlns:a="http://schemas.openxmlformats.org/drawingml/2006/main" xmlns:r="http://schemas.openxmlformats.org/officeDocument/2006/relationships" xmlns:mc="http://schemas.openxmlformats.org/markup-compatibility/2006" xmlns:mv="urn:schemas-microsoft-com:mac:vml" xmlns:p="http://schemas.openxmlformats.org/presentationml/2006/main" xmlns:c="http://schemas.openxmlformats.org/drawingml/2006/chart" xmlns:dgm="http://schemas.openxmlformats.org/drawingml/2006/diagram" xmlns:o="urn:schemas-microsoft-com:office:office" xmlns:v="urn:schemas-microsoft-com:vml" xmlns:pvml="urn:schemas-microsoft-com:office:powerpoint" xmlns:com="http://schemas.openxmlformats.org/drawingml/2006/compatibility" xmlns:p14="http://schemas.microsoft.com/office/powerpoint/2010/main" xmlns:p15="http://schemas.microsoft.com/office/powerpoint/2012/main" xmlns:ahyp="http://schemas.microsoft.com/office/drawing/2018/hyperlinkcolor">
   <p:cSld>
     <p:spTree>
@@ -12949,7 +13130,7 @@
 </p:sld>
 </file>
 
-<file path=ppt/slides/slide24.xml><?xml version="1.0" encoding="utf-8"?>
+<file path=ppt/slides/slide25.xml><?xml version="1.0" encoding="utf-8"?>
 <p:sld xmlns:a="http://schemas.openxmlformats.org/drawingml/2006/main" xmlns:r="http://schemas.openxmlformats.org/officeDocument/2006/relationships" xmlns:mc="http://schemas.openxmlformats.org/markup-compatibility/2006" xmlns:mv="urn:schemas-microsoft-com:mac:vml" xmlns:p="http://schemas.openxmlformats.org/presentationml/2006/main" xmlns:c="http://schemas.openxmlformats.org/drawingml/2006/chart" xmlns:dgm="http://schemas.openxmlformats.org/drawingml/2006/diagram" xmlns:o="urn:schemas-microsoft-com:office:office" xmlns:v="urn:schemas-microsoft-com:vml" xmlns:pvml="urn:schemas-microsoft-com:office:powerpoint" xmlns:com="http://schemas.openxmlformats.org/drawingml/2006/compatibility" xmlns:p14="http://schemas.microsoft.com/office/powerpoint/2010/main" xmlns:p15="http://schemas.microsoft.com/office/powerpoint/2012/main" xmlns:ahyp="http://schemas.microsoft.com/office/drawing/2018/hyperlinkcolor">
   <p:cSld>
     <p:spTree>
@@ -13281,7 +13462,7 @@
 </p:sld>
 </file>
 
-<file path=ppt/slides/slide25.xml><?xml version="1.0" encoding="utf-8"?>
+<file path=ppt/slides/slide26.xml><?xml version="1.0" encoding="utf-8"?>
 <p:sld xmlns:a="http://schemas.openxmlformats.org/drawingml/2006/main" xmlns:r="http://schemas.openxmlformats.org/officeDocument/2006/relationships" xmlns:mc="http://schemas.openxmlformats.org/markup-compatibility/2006" xmlns:mv="urn:schemas-microsoft-com:mac:vml" xmlns:p="http://schemas.openxmlformats.org/presentationml/2006/main" xmlns:c="http://schemas.openxmlformats.org/drawingml/2006/chart" xmlns:dgm="http://schemas.openxmlformats.org/drawingml/2006/diagram" xmlns:o="urn:schemas-microsoft-com:office:office" xmlns:v="urn:schemas-microsoft-com:vml" xmlns:pvml="urn:schemas-microsoft-com:office:powerpoint" xmlns:com="http://schemas.openxmlformats.org/drawingml/2006/compatibility" xmlns:p14="http://schemas.microsoft.com/office/powerpoint/2010/main" xmlns:p15="http://schemas.microsoft.com/office/powerpoint/2012/main" xmlns:ahyp="http://schemas.microsoft.com/office/drawing/2018/hyperlinkcolor">
   <p:cSld>
     <p:spTree>
@@ -14509,7 +14690,7 @@
 </p:sld>
 </file>
 
-<file path=ppt/slides/slide26.xml><?xml version="1.0" encoding="utf-8"?>
+<file path=ppt/slides/slide27.xml><?xml version="1.0" encoding="utf-8"?>
 <p:sld xmlns:a="http://schemas.openxmlformats.org/drawingml/2006/main" xmlns:r="http://schemas.openxmlformats.org/officeDocument/2006/relationships" xmlns:mc="http://schemas.openxmlformats.org/markup-compatibility/2006" xmlns:mv="urn:schemas-microsoft-com:mac:vml" xmlns:p="http://schemas.openxmlformats.org/presentationml/2006/main" xmlns:c="http://schemas.openxmlformats.org/drawingml/2006/chart" xmlns:dgm="http://schemas.openxmlformats.org/drawingml/2006/diagram" xmlns:o="urn:schemas-microsoft-com:office:office" xmlns:v="urn:schemas-microsoft-com:vml" xmlns:pvml="urn:schemas-microsoft-com:office:powerpoint" xmlns:com="http://schemas.openxmlformats.org/drawingml/2006/compatibility" xmlns:p14="http://schemas.microsoft.com/office/powerpoint/2010/main" xmlns:p15="http://schemas.microsoft.com/office/powerpoint/2012/main" xmlns:ahyp="http://schemas.microsoft.com/office/drawing/2018/hyperlinkcolor">
   <p:cSld>
     <p:spTree>
@@ -15897,7 +16078,7 @@
 </p:sld>
 </file>
 
-<file path=ppt/slides/slide27.xml><?xml version="1.0" encoding="utf-8"?>
+<file path=ppt/slides/slide28.xml><?xml version="1.0" encoding="utf-8"?>
 <p:sld xmlns:a="http://schemas.openxmlformats.org/drawingml/2006/main" xmlns:r="http://schemas.openxmlformats.org/officeDocument/2006/relationships" xmlns:mc="http://schemas.openxmlformats.org/markup-compatibility/2006" xmlns:mv="urn:schemas-microsoft-com:mac:vml" xmlns:p="http://schemas.openxmlformats.org/presentationml/2006/main" xmlns:c="http://schemas.openxmlformats.org/drawingml/2006/chart" xmlns:dgm="http://schemas.openxmlformats.org/drawingml/2006/diagram" xmlns:o="urn:schemas-microsoft-com:office:office" xmlns:v="urn:schemas-microsoft-com:vml" xmlns:pvml="urn:schemas-microsoft-com:office:powerpoint" xmlns:com="http://schemas.openxmlformats.org/drawingml/2006/compatibility" xmlns:p14="http://schemas.microsoft.com/office/powerpoint/2010/main" xmlns:p15="http://schemas.microsoft.com/office/powerpoint/2012/main" xmlns:ahyp="http://schemas.microsoft.com/office/drawing/2018/hyperlinkcolor">
   <p:cSld>
     <p:spTree>
@@ -16533,7 +16714,7 @@
 </p:sld>
 </file>
 
-<file path=ppt/slides/slide28.xml><?xml version="1.0" encoding="utf-8"?>
+<file path=ppt/slides/slide29.xml><?xml version="1.0" encoding="utf-8"?>
 <p:sld xmlns:a="http://schemas.openxmlformats.org/drawingml/2006/main" xmlns:r="http://schemas.openxmlformats.org/officeDocument/2006/relationships" xmlns:mc="http://schemas.openxmlformats.org/markup-compatibility/2006" xmlns:mv="urn:schemas-microsoft-com:mac:vml" xmlns:p="http://schemas.openxmlformats.org/presentationml/2006/main" xmlns:c="http://schemas.openxmlformats.org/drawingml/2006/chart" xmlns:dgm="http://schemas.openxmlformats.org/drawingml/2006/diagram" xmlns:o="urn:schemas-microsoft-com:office:office" xmlns:v="urn:schemas-microsoft-com:vml" xmlns:pvml="urn:schemas-microsoft-com:office:powerpoint" xmlns:com="http://schemas.openxmlformats.org/drawingml/2006/compatibility" xmlns:p14="http://schemas.microsoft.com/office/powerpoint/2010/main" xmlns:p15="http://schemas.microsoft.com/office/powerpoint/2012/main" xmlns:ahyp="http://schemas.microsoft.com/office/drawing/2018/hyperlinkcolor">
   <p:cSld>
     <p:spTree>
@@ -16626,7 +16807,96 @@
 </p:sld>
 </file>
 
-<file path=ppt/slides/slide29.xml><?xml version="1.0" encoding="utf-8"?>
+<file path=ppt/slides/slide3.xml><?xml version="1.0" encoding="utf-8"?>
+<p:sld xmlns:a="http://schemas.openxmlformats.org/drawingml/2006/main" xmlns:r="http://schemas.openxmlformats.org/officeDocument/2006/relationships" xmlns:mc="http://schemas.openxmlformats.org/markup-compatibility/2006" xmlns:mv="urn:schemas-microsoft-com:mac:vml" xmlns:p="http://schemas.openxmlformats.org/presentationml/2006/main" xmlns:c="http://schemas.openxmlformats.org/drawingml/2006/chart" xmlns:dgm="http://schemas.openxmlformats.org/drawingml/2006/diagram" xmlns:o="urn:schemas-microsoft-com:office:office" xmlns:v="urn:schemas-microsoft-com:vml" xmlns:pvml="urn:schemas-microsoft-com:office:powerpoint" xmlns:com="http://schemas.openxmlformats.org/drawingml/2006/compatibility" xmlns:p14="http://schemas.microsoft.com/office/powerpoint/2010/main" xmlns:p15="http://schemas.microsoft.com/office/powerpoint/2012/main" xmlns:ahyp="http://schemas.microsoft.com/office/drawing/2018/hyperlinkcolor">
+  <p:cSld>
+    <p:spTree>
+      <p:nvGrpSpPr>
+        <p:cNvPr id="50" name="Shape 50"/>
+        <p:cNvGrpSpPr/>
+        <p:nvPr/>
+      </p:nvGrpSpPr>
+      <p:grpSpPr>
+        <a:xfrm>
+          <a:off x="0" y="0"/>
+          <a:ext cx="0" cy="0"/>
+          <a:chOff x="0" y="0"/>
+          <a:chExt cx="0" cy="0"/>
+        </a:xfrm>
+      </p:grpSpPr>
+      <p:sp>
+        <p:nvSpPr>
+          <p:cNvPr id="51" name="Google Shape;51;p11"/>
+          <p:cNvSpPr txBox="1"/>
+          <p:nvPr>
+            <p:ph type="title"/>
+          </p:nvPr>
+        </p:nvSpPr>
+        <p:spPr>
+          <a:xfrm>
+            <a:off x="311700" y="195615"/>
+            <a:ext cx="8520600" cy="572700"/>
+          </a:xfrm>
+          <a:prstGeom prst="rect">
+            <a:avLst/>
+          </a:prstGeom>
+        </p:spPr>
+        <p:txBody>
+          <a:bodyPr anchorCtr="0" anchor="t" bIns="91425" lIns="91425" spcFirstLastPara="1" rIns="91425" wrap="square" tIns="91425">
+            <a:normAutofit fontScale="90000"/>
+          </a:bodyPr>
+          <a:lstStyle/>
+          <a:p>
+            <a:pPr indent="0" lvl="0" marL="0" rtl="0" algn="l">
+              <a:spcBef>
+                <a:spcPts val="0"/>
+              </a:spcBef>
+              <a:spcAft>
+                <a:spcPts val="0"/>
+              </a:spcAft>
+              <a:buNone/>
+            </a:pPr>
+            <a:r>
+              <a:rPr lang="en"/>
+              <a:t>Today’s Goal</a:t>
+            </a:r>
+            <a:endParaRPr/>
+          </a:p>
+        </p:txBody>
+      </p:sp>
+      <p:pic>
+        <p:nvPicPr>
+          <p:cNvPr id="52" name="Picture 52" descr="gif-zelda.gif"/>
+          <p:cNvPicPr>
+            <a:picLocks noChangeAspect="1"/>
+          </p:cNvPicPr>
+          <p:nvPr/>
+        </p:nvPicPr>
+        <p:blipFill>
+          <a:blip r:embed="rId4"/>
+          <a:stretch>
+            <a:fillRect/>
+          </a:stretch>
+        </p:blipFill>
+        <p:spPr>
+          <a:xfrm>
+            <a:off x="1412777" y="1203675"/>
+            <a:ext cx="6318444" cy="3554125"/>
+          </a:xfrm>
+          <a:prstGeom prst="rect">
+            <a:avLst/>
+          </a:prstGeom>
+        </p:spPr>
+      </p:pic>
+    </p:spTree>
+  </p:cSld>
+  <p:clrMapOvr>
+    <a:masterClrMapping/>
+  </p:clrMapOvr>
+</p:sld>
+</file>
+
+<file path=ppt/slides/slide30.xml><?xml version="1.0" encoding="utf-8"?>
 <p:sld xmlns:a="http://schemas.openxmlformats.org/drawingml/2006/main" xmlns:r="http://schemas.openxmlformats.org/officeDocument/2006/relationships" xmlns:mc="http://schemas.openxmlformats.org/markup-compatibility/2006" xmlns:mv="urn:schemas-microsoft-com:mac:vml" xmlns:p="http://schemas.openxmlformats.org/presentationml/2006/main" xmlns:c="http://schemas.openxmlformats.org/drawingml/2006/chart" xmlns:dgm="http://schemas.openxmlformats.org/drawingml/2006/diagram" xmlns:o="urn:schemas-microsoft-com:office:office" xmlns:v="urn:schemas-microsoft-com:vml" xmlns:pvml="urn:schemas-microsoft-com:office:powerpoint" xmlns:com="http://schemas.openxmlformats.org/drawingml/2006/compatibility" xmlns:p14="http://schemas.microsoft.com/office/powerpoint/2010/main" xmlns:p15="http://schemas.microsoft.com/office/powerpoint/2012/main" xmlns:ahyp="http://schemas.microsoft.com/office/drawing/2018/hyperlinkcolor">
   <p:cSld>
     <p:spTree>
@@ -18301,96 +18571,7 @@
 </p:sld>
 </file>
 
-<file path=ppt/slides/slide3.xml><?xml version="1.0" encoding="utf-8"?>
-<p:sld xmlns:a="http://schemas.openxmlformats.org/drawingml/2006/main" xmlns:r="http://schemas.openxmlformats.org/officeDocument/2006/relationships" xmlns:mc="http://schemas.openxmlformats.org/markup-compatibility/2006" xmlns:mv="urn:schemas-microsoft-com:mac:vml" xmlns:p="http://schemas.openxmlformats.org/presentationml/2006/main" xmlns:c="http://schemas.openxmlformats.org/drawingml/2006/chart" xmlns:dgm="http://schemas.openxmlformats.org/drawingml/2006/diagram" xmlns:o="urn:schemas-microsoft-com:office:office" xmlns:v="urn:schemas-microsoft-com:vml" xmlns:pvml="urn:schemas-microsoft-com:office:powerpoint" xmlns:com="http://schemas.openxmlformats.org/drawingml/2006/compatibility" xmlns:p14="http://schemas.microsoft.com/office/powerpoint/2010/main" xmlns:p15="http://schemas.microsoft.com/office/powerpoint/2012/main" xmlns:ahyp="http://schemas.microsoft.com/office/drawing/2018/hyperlinkcolor">
-  <p:cSld>
-    <p:spTree>
-      <p:nvGrpSpPr>
-        <p:cNvPr id="50" name="Shape 50"/>
-        <p:cNvGrpSpPr/>
-        <p:nvPr/>
-      </p:nvGrpSpPr>
-      <p:grpSpPr>
-        <a:xfrm>
-          <a:off x="0" y="0"/>
-          <a:ext cx="0" cy="0"/>
-          <a:chOff x="0" y="0"/>
-          <a:chExt cx="0" cy="0"/>
-        </a:xfrm>
-      </p:grpSpPr>
-      <p:sp>
-        <p:nvSpPr>
-          <p:cNvPr id="51" name="Google Shape;51;p11"/>
-          <p:cNvSpPr txBox="1"/>
-          <p:nvPr>
-            <p:ph type="title"/>
-          </p:nvPr>
-        </p:nvSpPr>
-        <p:spPr>
-          <a:xfrm>
-            <a:off x="311700" y="195615"/>
-            <a:ext cx="8520600" cy="572700"/>
-          </a:xfrm>
-          <a:prstGeom prst="rect">
-            <a:avLst/>
-          </a:prstGeom>
-        </p:spPr>
-        <p:txBody>
-          <a:bodyPr anchorCtr="0" anchor="t" bIns="91425" lIns="91425" spcFirstLastPara="1" rIns="91425" wrap="square" tIns="91425">
-            <a:normAutofit fontScale="90000"/>
-          </a:bodyPr>
-          <a:lstStyle/>
-          <a:p>
-            <a:pPr indent="0" lvl="0" marL="0" rtl="0" algn="l">
-              <a:spcBef>
-                <a:spcPts val="0"/>
-              </a:spcBef>
-              <a:spcAft>
-                <a:spcPts val="0"/>
-              </a:spcAft>
-              <a:buNone/>
-            </a:pPr>
-            <a:r>
-              <a:rPr lang="en"/>
-              <a:t>Today’s Goal</a:t>
-            </a:r>
-            <a:endParaRPr/>
-          </a:p>
-        </p:txBody>
-      </p:sp>
-      <p:pic>
-        <p:nvPicPr>
-          <p:cNvPr id="52" name="Picture 52" descr="gif-zelda.gif"/>
-          <p:cNvPicPr>
-            <a:picLocks noChangeAspect="1"/>
-          </p:cNvPicPr>
-          <p:nvPr/>
-        </p:nvPicPr>
-        <p:blipFill>
-          <a:blip r:embed="rId4"/>
-          <a:stretch>
-            <a:fillRect/>
-          </a:stretch>
-        </p:blipFill>
-        <p:spPr>
-          <a:xfrm>
-            <a:off x="1412777" y="1203675"/>
-            <a:ext cx="6318444" cy="3554125"/>
-          </a:xfrm>
-          <a:prstGeom prst="rect">
-            <a:avLst/>
-          </a:prstGeom>
-        </p:spPr>
-      </p:pic>
-    </p:spTree>
-  </p:cSld>
-  <p:clrMapOvr>
-    <a:masterClrMapping/>
-  </p:clrMapOvr>
-</p:sld>
-</file>
-
-<file path=ppt/slides/slide30.xml><?xml version="1.0" encoding="utf-8"?>
+<file path=ppt/slides/slide31.xml><?xml version="1.0" encoding="utf-8"?>
 <p:sld xmlns:a="http://schemas.openxmlformats.org/drawingml/2006/main" xmlns:r="http://schemas.openxmlformats.org/officeDocument/2006/relationships" xmlns:mc="http://schemas.openxmlformats.org/markup-compatibility/2006" xmlns:mv="urn:schemas-microsoft-com:mac:vml" xmlns:p="http://schemas.openxmlformats.org/presentationml/2006/main" xmlns:c="http://schemas.openxmlformats.org/drawingml/2006/chart" xmlns:dgm="http://schemas.openxmlformats.org/drawingml/2006/diagram" xmlns:o="urn:schemas-microsoft-com:office:office" xmlns:v="urn:schemas-microsoft-com:vml" xmlns:pvml="urn:schemas-microsoft-com:office:powerpoint" xmlns:com="http://schemas.openxmlformats.org/drawingml/2006/compatibility" xmlns:p14="http://schemas.microsoft.com/office/powerpoint/2010/main" xmlns:p15="http://schemas.microsoft.com/office/powerpoint/2012/main" xmlns:ahyp="http://schemas.microsoft.com/office/drawing/2018/hyperlinkcolor">
   <p:cSld>
     <p:spTree>
@@ -19306,7 +19487,7 @@
 </p:sld>
 </file>
 
-<file path=ppt/slides/slide31.xml><?xml version="1.0" encoding="utf-8"?>
+<file path=ppt/slides/slide32.xml><?xml version="1.0" encoding="utf-8"?>
 <p:sld xmlns:a="http://schemas.openxmlformats.org/drawingml/2006/main" xmlns:r="http://schemas.openxmlformats.org/officeDocument/2006/relationships" xmlns:mc="http://schemas.openxmlformats.org/markup-compatibility/2006" xmlns:mv="urn:schemas-microsoft-com:mac:vml" xmlns:p="http://schemas.openxmlformats.org/presentationml/2006/main" xmlns:c="http://schemas.openxmlformats.org/drawingml/2006/chart" xmlns:dgm="http://schemas.openxmlformats.org/drawingml/2006/diagram" xmlns:o="urn:schemas-microsoft-com:office:office" xmlns:v="urn:schemas-microsoft-com:vml" xmlns:pvml="urn:schemas-microsoft-com:office:powerpoint" xmlns:com="http://schemas.openxmlformats.org/drawingml/2006/compatibility" xmlns:p14="http://schemas.microsoft.com/office/powerpoint/2010/main" xmlns:p15="http://schemas.microsoft.com/office/powerpoint/2012/main" xmlns:ahyp="http://schemas.microsoft.com/office/drawing/2018/hyperlinkcolor">
   <p:cSld>
     <p:spTree>
@@ -20310,7 +20491,7 @@
 </p:sld>
 </file>
 
-<file path=ppt/slides/slide32.xml><?xml version="1.0" encoding="utf-8"?>
+<file path=ppt/slides/slide33.xml><?xml version="1.0" encoding="utf-8"?>
 <p:sld xmlns:a="http://schemas.openxmlformats.org/drawingml/2006/main" xmlns:p="http://schemas.openxmlformats.org/presentationml/2006/main" xmlns:r="http://schemas.openxmlformats.org/officeDocument/2006/relationships">
   <p:cSld>
     <p:spTree>
@@ -21005,7 +21186,7 @@
 </p:sld>
 </file>
 
-<file path=ppt/slides/slide33.xml><?xml version="1.0" encoding="utf-8"?>
+<file path=ppt/slides/slide34.xml><?xml version="1.0" encoding="utf-8"?>
 <p:sld xmlns:a="http://schemas.openxmlformats.org/drawingml/2006/main" xmlns:r="http://schemas.openxmlformats.org/officeDocument/2006/relationships" xmlns:mc="http://schemas.openxmlformats.org/markup-compatibility/2006" xmlns:mv="urn:schemas-microsoft-com:mac:vml" xmlns:p="http://schemas.openxmlformats.org/presentationml/2006/main" xmlns:c="http://schemas.openxmlformats.org/drawingml/2006/chart" xmlns:dgm="http://schemas.openxmlformats.org/drawingml/2006/diagram" xmlns:o="urn:schemas-microsoft-com:office:office" xmlns:v="urn:schemas-microsoft-com:vml" xmlns:pvml="urn:schemas-microsoft-com:office:powerpoint" xmlns:com="http://schemas.openxmlformats.org/drawingml/2006/compatibility" xmlns:p14="http://schemas.microsoft.com/office/powerpoint/2010/main" xmlns:p15="http://schemas.microsoft.com/office/powerpoint/2012/main" xmlns:ahyp="http://schemas.microsoft.com/office/drawing/2018/hyperlinkcolor">
   <p:cSld>
     <p:spTree>
@@ -21336,7 +21517,7 @@
 </p:sld>
 </file>
 
-<file path=ppt/slides/slide34.xml><?xml version="1.0" encoding="utf-8"?>
+<file path=ppt/slides/slide35.xml><?xml version="1.0" encoding="utf-8"?>
 <p:sld xmlns:a="http://schemas.openxmlformats.org/drawingml/2006/main" xmlns:r="http://schemas.openxmlformats.org/officeDocument/2006/relationships" xmlns:mc="http://schemas.openxmlformats.org/markup-compatibility/2006" xmlns:mv="urn:schemas-microsoft-com:mac:vml" xmlns:p="http://schemas.openxmlformats.org/presentationml/2006/main" xmlns:c="http://schemas.openxmlformats.org/drawingml/2006/chart" xmlns:dgm="http://schemas.openxmlformats.org/drawingml/2006/diagram" xmlns:o="urn:schemas-microsoft-com:office:office" xmlns:v="urn:schemas-microsoft-com:vml" xmlns:pvml="urn:schemas-microsoft-com:office:powerpoint" xmlns:com="http://schemas.openxmlformats.org/drawingml/2006/compatibility" xmlns:p14="http://schemas.microsoft.com/office/powerpoint/2010/main" xmlns:p15="http://schemas.microsoft.com/office/powerpoint/2012/main" xmlns:ahyp="http://schemas.microsoft.com/office/drawing/2018/hyperlinkcolor">
   <p:cSld>
     <p:spTree>
@@ -22130,7 +22311,7 @@
 </p:sld>
 </file>
 
-<file path=ppt/slides/slide35.xml><?xml version="1.0" encoding="utf-8"?>
+<file path=ppt/slides/slide36.xml><?xml version="1.0" encoding="utf-8"?>
 <p:sld xmlns:a="http://schemas.openxmlformats.org/drawingml/2006/main" xmlns:r="http://schemas.openxmlformats.org/officeDocument/2006/relationships" xmlns:mc="http://schemas.openxmlformats.org/markup-compatibility/2006" xmlns:mv="urn:schemas-microsoft-com:mac:vml" xmlns:p="http://schemas.openxmlformats.org/presentationml/2006/main" xmlns:c="http://schemas.openxmlformats.org/drawingml/2006/chart" xmlns:dgm="http://schemas.openxmlformats.org/drawingml/2006/diagram" xmlns:o="urn:schemas-microsoft-com:office:office" xmlns:v="urn:schemas-microsoft-com:vml" xmlns:pvml="urn:schemas-microsoft-com:office:powerpoint" xmlns:com="http://schemas.openxmlformats.org/drawingml/2006/compatibility" xmlns:p14="http://schemas.microsoft.com/office/powerpoint/2010/main" xmlns:p15="http://schemas.microsoft.com/office/powerpoint/2012/main" xmlns:ahyp="http://schemas.microsoft.com/office/drawing/2018/hyperlinkcolor">
   <p:cSld>
     <p:spTree>
@@ -22717,7 +22898,7 @@
 </p:sld>
 </file>
 
-<file path=ppt/slides/slide36.xml><?xml version="1.0" encoding="utf-8"?>
+<file path=ppt/slides/slide37.xml><?xml version="1.0" encoding="utf-8"?>
 <p:sld xmlns:a="http://schemas.openxmlformats.org/drawingml/2006/main" xmlns:p="http://schemas.openxmlformats.org/presentationml/2006/main" xmlns:r="http://schemas.openxmlformats.org/officeDocument/2006/relationships">
   <p:cSld>
     <p:spTree>
@@ -22875,7 +23056,7 @@
 </p:sld>
 </file>
 
-<file path=ppt/slides/slide37.xml><?xml version="1.0" encoding="utf-8"?>
+<file path=ppt/slides/slide38.xml><?xml version="1.0" encoding="utf-8"?>
 <p:sld xmlns:a="http://schemas.openxmlformats.org/drawingml/2006/main" xmlns:p="http://schemas.openxmlformats.org/presentationml/2006/main" xmlns:r="http://schemas.openxmlformats.org/officeDocument/2006/relationships">
   <p:cSld>
     <p:spTree>
@@ -23048,7 +23229,7 @@
 </p:sld>
 </file>
 
-<file path=ppt/slides/slide38.xml><?xml version="1.0" encoding="utf-8"?>
+<file path=ppt/slides/slide39.xml><?xml version="1.0" encoding="utf-8"?>
 <p:sld xmlns:a="http://schemas.openxmlformats.org/drawingml/2006/main" xmlns:r="http://schemas.openxmlformats.org/officeDocument/2006/relationships" xmlns:mc="http://schemas.openxmlformats.org/markup-compatibility/2006" xmlns:mv="urn:schemas-microsoft-com:mac:vml" xmlns:p="http://schemas.openxmlformats.org/presentationml/2006/main" xmlns:c="http://schemas.openxmlformats.org/drawingml/2006/chart" xmlns:dgm="http://schemas.openxmlformats.org/drawingml/2006/diagram" xmlns:o="urn:schemas-microsoft-com:office:office" xmlns:v="urn:schemas-microsoft-com:vml" xmlns:pvml="urn:schemas-microsoft-com:office:powerpoint" xmlns:com="http://schemas.openxmlformats.org/drawingml/2006/compatibility" xmlns:p14="http://schemas.microsoft.com/office/powerpoint/2010/main" xmlns:p15="http://schemas.microsoft.com/office/powerpoint/2012/main" xmlns:ahyp="http://schemas.microsoft.com/office/drawing/2018/hyperlinkcolor">
   <p:cSld>
     <p:spTree>
@@ -23731,156 +23912,6 @@
 </p:sld>
 </file>
 
-<file path=ppt/slides/slide39.xml><?xml version="1.0" encoding="utf-8"?>
-<p:sld xmlns:a="http://schemas.openxmlformats.org/drawingml/2006/main" xmlns:p="http://schemas.openxmlformats.org/presentationml/2006/main" xmlns:r="http://schemas.openxmlformats.org/officeDocument/2006/relationships">
-  <p:cSld>
-    <p:spTree>
-      <p:nvGrpSpPr>
-        <p:cNvPr id="1" name=""/>
-        <p:cNvGrpSpPr/>
-        <p:nvPr/>
-      </p:nvGrpSpPr>
-      <p:grpSpPr/>
-      <p:sp>
-        <p:nvSpPr>
-          <p:cNvPr id="63" name="Google Shape;63;p13"/>
-          <p:cNvSpPr txBox="1"/>
-          <p:nvPr>
-            <p:ph type="title"/>
-          </p:nvPr>
-        </p:nvSpPr>
-        <p:spPr>
-          <a:xfrm>
-            <a:off x="311700" y="195615"/>
-            <a:ext cx="8520600" cy="572700"/>
-          </a:xfrm>
-          <a:prstGeom prst="rect">
-            <a:avLst/>
-          </a:prstGeom>
-        </p:spPr>
-        <p:txBody>
-          <a:bodyPr anchorCtr="0" anchor="t" bIns="91425" lIns="91425" spcFirstLastPara="1" rIns="91425" wrap="square" tIns="91425">
-            <a:normAutofit fontScale="90000"/>
-          </a:bodyPr>
-          <a:lstStyle/>
-          <a:p>
-            <a:pPr indent="0" lvl="0" marL="0" rtl="0" algn="l">
-              <a:spcBef>
-                <a:spcPts val="0"/>
-              </a:spcBef>
-              <a:spcAft>
-                <a:spcPts val="0"/>
-              </a:spcAft>
-              <a:buNone/>
-            </a:pPr>
-            <a:r>
-              <a:rPr lang="en"/>
-              <a:t>Your Course Project</a:t>
-            </a:r>
-            <a:endParaRPr/>
-          </a:p>
-        </p:txBody>
-      </p:sp>
-      <p:sp>
-        <p:nvSpPr>
-          <p:cNvPr id="64" name="Google Shape;64;p13"/>
-          <p:cNvSpPr txBox="1"/>
-          <p:nvPr>
-            <p:ph idx="1" type="body"/>
-          </p:nvPr>
-        </p:nvSpPr>
-        <p:spPr>
-          <a:xfrm>
-            <a:off x="311700" y="885950"/>
-            <a:ext cx="8520600" cy="4023300"/>
-          </a:xfrm>
-          <a:prstGeom prst="rect">
-            <a:avLst/>
-          </a:prstGeom>
-        </p:spPr>
-        <p:txBody>
-          <a:bodyPr anchorCtr="0" anchor="t" bIns="91425" lIns="91425" spcFirstLastPara="1" rIns="91425" wrap="square" tIns="91425">
-            <a:normAutofit/>
-          </a:bodyPr>
-          <a:lstStyle/>
-          <a:p>
-            <a:pPr indent="-330200" lvl="0" marL="457200" rtl="0" algn="l">
-              <a:spcBef>
-                <a:spcPts val="0"/>
-              </a:spcBef>
-              <a:spcAft>
-                <a:spcPts val="0"/>
-              </a:spcAft>
-              <a:buSzPts val="1600"/>
-              <a:buChar char="●"/>
-            </a:pPr>
-            <a:r>
-              <a:rPr lang="en"/>
-              <a:t>Next milestone, by session 09: self-review</a:t>
-            </a:r>
-            <a:endParaRPr/>
-          </a:p>
-          <a:p>
-            <a:pPr indent="-317500" lvl="1" marL="914400" rtl="0" algn="l">
-              <a:spcBef>
-                <a:spcPts val="0"/>
-              </a:spcBef>
-              <a:spcAft>
-                <a:spcPts val="0"/>
-              </a:spcAft>
-              <a:buSzPts val="1400"/>
-              <a:buChar char="○"/>
-            </a:pPr>
-            <a:r>
-              <a:rPr lang="en"/>
-              <a:t>Updated class diagram, list of patterns, and an event map</a:t>
-            </a:r>
-            <a:endParaRPr/>
-          </a:p>
-          <a:p>
-            <a:pPr indent="-317500" lvl="1" marL="914400" rtl="0" algn="l">
-              <a:spcBef>
-                <a:spcPts val="0"/>
-              </a:spcBef>
-              <a:spcAft>
-                <a:spcPts val="0"/>
-              </a:spcAft>
-              <a:buSzPts val="1400"/>
-              <a:buChar char="○"/>
-            </a:pPr>
-            <a:r>
-              <a:rPr lang="en"/>
-              <a:t>The meaningful moments in your game: who fires them, who reacts</a:t>
-            </a:r>
-            <a:endParaRPr/>
-          </a:p>
-          <a:p>
-            <a:pPr indent="-317500" lvl="1" marL="914400" rtl="0" algn="l">
-              <a:spcBef>
-                <a:spcPts val="0"/>
-              </a:spcBef>
-              <a:spcAft>
-                <a:spcPts val="0"/>
-              </a:spcAft>
-              <a:buSzPts val="1400"/>
-              <a:buChar char="○"/>
-            </a:pPr>
-            <a:r>
-              <a:rPr lang="en"/>
-              <a:t>At least one refactoring</a:t>
-            </a:r>
-            <a:endParaRPr/>
-          </a:p>
-        </p:txBody>
-      </p:sp>
-    </p:spTree>
-  </p:cSld>
-  <p:clrMapOvr>
-    <a:masterClrMapping/>
-  </p:clrMapOvr>
-</p:sld>
-</file>
-
 <file path=ppt/slides/slide4.xml><?xml version="1.0" encoding="utf-8"?>
 <p:sld xmlns:a="http://schemas.openxmlformats.org/drawingml/2006/main" xmlns:r="http://schemas.openxmlformats.org/officeDocument/2006/relationships" xmlns:mc="http://schemas.openxmlformats.org/markup-compatibility/2006" xmlns:mv="urn:schemas-microsoft-com:mac:vml" xmlns:p="http://schemas.openxmlformats.org/presentationml/2006/main" xmlns:c="http://schemas.openxmlformats.org/drawingml/2006/chart" xmlns:dgm="http://schemas.openxmlformats.org/drawingml/2006/diagram" xmlns:o="urn:schemas-microsoft-com:office:office" xmlns:v="urn:schemas-microsoft-com:vml" xmlns:pvml="urn:schemas-microsoft-com:office:powerpoint" xmlns:com="http://schemas.openxmlformats.org/drawingml/2006/compatibility" xmlns:p14="http://schemas.microsoft.com/office/powerpoint/2010/main" xmlns:p15="http://schemas.microsoft.com/office/powerpoint/2012/main" xmlns:ahyp="http://schemas.microsoft.com/office/drawing/2018/hyperlinkcolor">
   <p:cSld>
@@ -24393,6 +24424,156 @@
       </p:par>
     </p:tnLst>
   </p:timing>
+</p:sld>
+</file>
+
+<file path=ppt/slides/slide40.xml><?xml version="1.0" encoding="utf-8"?>
+<p:sld xmlns:a="http://schemas.openxmlformats.org/drawingml/2006/main" xmlns:p="http://schemas.openxmlformats.org/presentationml/2006/main" xmlns:r="http://schemas.openxmlformats.org/officeDocument/2006/relationships">
+  <p:cSld>
+    <p:spTree>
+      <p:nvGrpSpPr>
+        <p:cNvPr id="1" name=""/>
+        <p:cNvGrpSpPr/>
+        <p:nvPr/>
+      </p:nvGrpSpPr>
+      <p:grpSpPr/>
+      <p:sp>
+        <p:nvSpPr>
+          <p:cNvPr id="63" name="Google Shape;63;p13"/>
+          <p:cNvSpPr txBox="1"/>
+          <p:nvPr>
+            <p:ph type="title"/>
+          </p:nvPr>
+        </p:nvSpPr>
+        <p:spPr>
+          <a:xfrm>
+            <a:off x="311700" y="195615"/>
+            <a:ext cx="8520600" cy="572700"/>
+          </a:xfrm>
+          <a:prstGeom prst="rect">
+            <a:avLst/>
+          </a:prstGeom>
+        </p:spPr>
+        <p:txBody>
+          <a:bodyPr anchorCtr="0" anchor="t" bIns="91425" lIns="91425" spcFirstLastPara="1" rIns="91425" wrap="square" tIns="91425">
+            <a:normAutofit fontScale="90000"/>
+          </a:bodyPr>
+          <a:lstStyle/>
+          <a:p>
+            <a:pPr indent="0" lvl="0" marL="0" rtl="0" algn="l">
+              <a:spcBef>
+                <a:spcPts val="0"/>
+              </a:spcBef>
+              <a:spcAft>
+                <a:spcPts val="0"/>
+              </a:spcAft>
+              <a:buNone/>
+            </a:pPr>
+            <a:r>
+              <a:rPr lang="en"/>
+              <a:t>Your Course Project</a:t>
+            </a:r>
+            <a:endParaRPr/>
+          </a:p>
+        </p:txBody>
+      </p:sp>
+      <p:sp>
+        <p:nvSpPr>
+          <p:cNvPr id="64" name="Google Shape;64;p13"/>
+          <p:cNvSpPr txBox="1"/>
+          <p:nvPr>
+            <p:ph idx="1" type="body"/>
+          </p:nvPr>
+        </p:nvSpPr>
+        <p:spPr>
+          <a:xfrm>
+            <a:off x="311700" y="885950"/>
+            <a:ext cx="8520600" cy="4023300"/>
+          </a:xfrm>
+          <a:prstGeom prst="rect">
+            <a:avLst/>
+          </a:prstGeom>
+        </p:spPr>
+        <p:txBody>
+          <a:bodyPr anchorCtr="0" anchor="t" bIns="91425" lIns="91425" spcFirstLastPara="1" rIns="91425" wrap="square" tIns="91425">
+            <a:normAutofit/>
+          </a:bodyPr>
+          <a:lstStyle/>
+          <a:p>
+            <a:pPr indent="-330200" lvl="0" marL="457200" rtl="0" algn="l">
+              <a:spcBef>
+                <a:spcPts val="0"/>
+              </a:spcBef>
+              <a:spcAft>
+                <a:spcPts val="0"/>
+              </a:spcAft>
+              <a:buSzPts val="1600"/>
+              <a:buChar char="●"/>
+            </a:pPr>
+            <a:r>
+              <a:rPr lang="en"/>
+              <a:t>Next milestone, by session 09: self-review</a:t>
+            </a:r>
+            <a:endParaRPr/>
+          </a:p>
+          <a:p>
+            <a:pPr indent="-317500" lvl="1" marL="914400" rtl="0" algn="l">
+              <a:spcBef>
+                <a:spcPts val="0"/>
+              </a:spcBef>
+              <a:spcAft>
+                <a:spcPts val="0"/>
+              </a:spcAft>
+              <a:buSzPts val="1400"/>
+              <a:buChar char="○"/>
+            </a:pPr>
+            <a:r>
+              <a:rPr lang="en"/>
+              <a:t>Updated class diagram, list of patterns, and an event map</a:t>
+            </a:r>
+            <a:endParaRPr/>
+          </a:p>
+          <a:p>
+            <a:pPr indent="-317500" lvl="1" marL="914400" rtl="0" algn="l">
+              <a:spcBef>
+                <a:spcPts val="0"/>
+              </a:spcBef>
+              <a:spcAft>
+                <a:spcPts val="0"/>
+              </a:spcAft>
+              <a:buSzPts val="1400"/>
+              <a:buChar char="○"/>
+            </a:pPr>
+            <a:r>
+              <a:rPr lang="en"/>
+              <a:t>The meaningful moments in your game: who fires them, who reacts</a:t>
+            </a:r>
+            <a:endParaRPr/>
+          </a:p>
+          <a:p>
+            <a:pPr indent="-317500" lvl="1" marL="914400" rtl="0" algn="l">
+              <a:spcBef>
+                <a:spcPts val="0"/>
+              </a:spcBef>
+              <a:spcAft>
+                <a:spcPts val="0"/>
+              </a:spcAft>
+              <a:buSzPts val="1400"/>
+              <a:buChar char="○"/>
+            </a:pPr>
+            <a:r>
+              <a:rPr lang="en"/>
+              <a:t>At least one refactoring</a:t>
+            </a:r>
+            <a:endParaRPr/>
+          </a:p>
+        </p:txBody>
+      </p:sp>
+    </p:spTree>
+  </p:cSld>
+  <p:clrMapOvr>
+    <a:masterClrMapping/>
+  </p:clrMapOvr>
 </p:sld>
 </file>
 
